--- a/Web/WebGeneral-Notes.pptx
+++ b/Web/WebGeneral-Notes.pptx
@@ -8,7 +8,7 @@
     <p:notesMasterId r:id="rId4"/>
   </p:notesMasterIdLst>
   <p:handoutMasterIdLst>
-    <p:handoutMasterId r:id="rId25"/>
+    <p:handoutMasterId r:id="rId32"/>
   </p:handoutMasterIdLst>
   <p:sldIdLst>
     <p:sldId id="256" r:id="rId3"/>
@@ -27,16 +27,23 @@
     <p:sldId id="298" r:id="rId17"/>
     <p:sldId id="297" r:id="rId18"/>
     <p:sldId id="296" r:id="rId19"/>
-    <p:sldId id="301" r:id="rId20"/>
-    <p:sldId id="302" r:id="rId21"/>
-    <p:sldId id="303" r:id="rId22"/>
-    <p:sldId id="304" r:id="rId23"/>
-    <p:sldId id="305" r:id="rId24"/>
+    <p:sldId id="317" r:id="rId20"/>
+    <p:sldId id="318" r:id="rId21"/>
+    <p:sldId id="319" r:id="rId22"/>
+    <p:sldId id="308" r:id="rId23"/>
+    <p:sldId id="309" r:id="rId24"/>
+    <p:sldId id="301" r:id="rId25"/>
+    <p:sldId id="302" r:id="rId26"/>
+    <p:sldId id="303" r:id="rId27"/>
+    <p:sldId id="304" r:id="rId28"/>
+    <p:sldId id="305" r:id="rId29"/>
+    <p:sldId id="306" r:id="rId30"/>
+    <p:sldId id="307" r:id="rId31"/>
   </p:sldIdLst>
   <p:sldSz cx="12192000" cy="6858000"/>
   <p:notesSz cx="6858000" cy="9144000"/>
   <p:custDataLst>
-    <p:tags r:id="rId29"/>
+    <p:tags r:id="rId36"/>
   </p:custDataLst>
   <p:defaultTextStyle>
     <a:defPPr>
@@ -133,6 +140,22 @@
       </a:defRPr>
     </a:lvl9pPr>
   </p:defaultTextStyle>
+  <p:extLst>
+    <p:ext uri="{EFAFB233-063F-42B5-8137-9DF3F51BA10A}">
+      <p15:sldGuideLst xmlns:p15="http://schemas.microsoft.com/office/powerpoint/2012/main">
+        <p15:guide id="1" orient="horz" pos="2196" userDrawn="1">
+          <p15:clr>
+            <a:srgbClr val="A4A3A4"/>
+          </p15:clr>
+        </p15:guide>
+        <p15:guide id="2" pos="3840" userDrawn="1">
+          <p15:clr>
+            <a:srgbClr val="A4A3A4"/>
+          </p15:clr>
+        </p15:guide>
+      </p15:sldGuideLst>
+    </p:ext>
+  </p:extLst>
 </p:presentation>
 </file>
 
@@ -4875,7 +4898,7 @@
       <p:grpSpPr/>
       <p:sp>
         <p:nvSpPr>
-          <p:cNvPr id="4" name="标题 3"/>
+          <p:cNvPr id="2" name="标题 1"/>
           <p:cNvSpPr>
             <a:spLocks noGrp="1"/>
           </p:cNvSpPr>
@@ -4888,34 +4911,295 @@
           <a:bodyPr/>
           <a:p>
             <a:r>
-              <a:rPr lang="en-US" altLang="zh-CN"/>
-              <a:t>ClearPath</a:t>
-            </a:r>
-            <a:endParaRPr lang="en-US" altLang="zh-CN"/>
-          </a:p>
-        </p:txBody>
-      </p:sp>
-      <p:sp>
-        <p:nvSpPr>
-          <p:cNvPr id="5" name="文本占位符 4"/>
-          <p:cNvSpPr>
-            <a:spLocks noGrp="1"/>
-          </p:cNvSpPr>
-          <p:nvPr>
-            <p:ph type="body" idx="1"/>
-          </p:nvPr>
-        </p:nvSpPr>
-        <p:spPr/>
-        <p:txBody>
-          <a:bodyPr/>
-          <a:p>
+              <a:rPr lang="zh-CN" altLang="en-US"/>
+              <a:t>配网</a:t>
+            </a:r>
             <a:endParaRPr lang="zh-CN" altLang="en-US"/>
           </a:p>
         </p:txBody>
       </p:sp>
+      <p:sp>
+        <p:nvSpPr>
+          <p:cNvPr id="3" name="内容占位符 2"/>
+          <p:cNvSpPr>
+            <a:spLocks noGrp="1"/>
+          </p:cNvSpPr>
+          <p:nvPr>
+            <p:ph idx="1"/>
+          </p:nvPr>
+        </p:nvSpPr>
+        <p:spPr>
+          <a:xfrm>
+            <a:off x="838200" y="1211580"/>
+            <a:ext cx="4290695" cy="5142865"/>
+          </a:xfrm>
+        </p:spPr>
+        <p:txBody>
+          <a:bodyPr>
+            <a:normAutofit fontScale="80000"/>
+          </a:bodyPr>
+          <a:p>
+            <a:r>
+              <a:rPr lang="en-US" altLang="zh-CN" sz="1800"/>
+              <a:t>References</a:t>
+            </a:r>
+            <a:endParaRPr lang="en-US" altLang="zh-CN" sz="1800"/>
+          </a:p>
+          <a:p>
+            <a:pPr lvl="1"/>
+            <a:r>
+              <a:rPr lang="en-US" altLang="zh-CN" sz="1625"/>
+              <a:t>https://zhuanlan.zhihu.com/p/222428623</a:t>
+            </a:r>
+            <a:endParaRPr lang="en-US" altLang="zh-CN" sz="1625"/>
+          </a:p>
+          <a:p>
+            <a:pPr lvl="1"/>
+            <a:r>
+              <a:rPr lang="en-US" altLang="zh-CN" sz="1625"/>
+              <a:t>https://zhuanlan.zhihu.com/p/410052540</a:t>
+            </a:r>
+            <a:endParaRPr lang="en-US" altLang="zh-CN" sz="1625"/>
+          </a:p>
+          <a:p>
+            <a:pPr lvl="1"/>
+            <a:r>
+              <a:rPr lang="en-US" altLang="zh-CN" sz="1570"/>
+              <a:t>https://blog.51cto.com/u_16213335/12126510 </a:t>
+            </a:r>
+            <a:r>
+              <a:rPr lang="zh-CN" altLang="en-US" sz="1570"/>
+              <a:t>（</a:t>
+            </a:r>
+            <a:r>
+              <a:rPr lang="en-US" altLang="zh-CN" sz="1570"/>
+              <a:t>Android App</a:t>
+            </a:r>
+            <a:r>
+              <a:rPr lang="zh-CN" altLang="en-US" sz="1570"/>
+              <a:t>中蓝牙配网）</a:t>
+            </a:r>
+            <a:endParaRPr lang="en-US" altLang="zh-CN" sz="1570"/>
+          </a:p>
+          <a:p>
+            <a:pPr lvl="0"/>
+            <a:r>
+              <a:rPr lang="en-US" altLang="zh-CN" sz="1800"/>
+              <a:t>Methods</a:t>
+            </a:r>
+            <a:endParaRPr lang="en-US" altLang="zh-CN" sz="1800"/>
+          </a:p>
+          <a:p>
+            <a:pPr lvl="1"/>
+            <a:r>
+              <a:rPr lang="zh-CN" altLang="en-US" sz="1600"/>
+              <a:t>一键配网</a:t>
+            </a:r>
+            <a:endParaRPr lang="zh-CN" altLang="en-US" sz="1600"/>
+          </a:p>
+          <a:p>
+            <a:pPr lvl="2"/>
+            <a:r>
+              <a:rPr lang="zh-CN" altLang="en-US" sz="1400"/>
+              <a:t>广播包长方式、组播地址方式</a:t>
+            </a:r>
+            <a:endParaRPr lang="zh-CN" altLang="en-US" sz="1400"/>
+          </a:p>
+          <a:p>
+            <a:pPr lvl="2"/>
+            <a:r>
+              <a:rPr lang="zh-CN" altLang="en-US" sz="1400"/>
+              <a:t>整体兼容性差，配网成功率低</a:t>
+            </a:r>
+            <a:endParaRPr lang="zh-CN" altLang="en-US" sz="1400"/>
+          </a:p>
+          <a:p>
+            <a:pPr lvl="1"/>
+            <a:r>
+              <a:rPr lang="zh-CN" altLang="en-US" sz="1600"/>
+              <a:t>设备热点配网</a:t>
+            </a:r>
+            <a:endParaRPr lang="zh-CN" altLang="en-US" sz="1600"/>
+          </a:p>
+          <a:p>
+            <a:pPr lvl="1"/>
+            <a:r>
+              <a:rPr lang="zh-CN" altLang="en-US" sz="1600"/>
+              <a:t>手机热点配网</a:t>
+            </a:r>
+            <a:endParaRPr lang="zh-CN" altLang="en-US" sz="1600"/>
+          </a:p>
+          <a:p>
+            <a:pPr lvl="1"/>
+            <a:r>
+              <a:rPr lang="zh-CN" altLang="en-US" sz="1600"/>
+              <a:t>蓝牙配网</a:t>
+            </a:r>
+            <a:endParaRPr lang="zh-CN" altLang="en-US" sz="1600"/>
+          </a:p>
+          <a:p>
+            <a:pPr lvl="2"/>
+            <a:r>
+              <a:rPr lang="zh-CN" altLang="en-US" sz="1400"/>
+              <a:t>手机</a:t>
+            </a:r>
+            <a:r>
+              <a:rPr lang="en-US" altLang="zh-CN" sz="1400"/>
+              <a:t>APP</a:t>
+            </a:r>
+            <a:r>
+              <a:rPr lang="zh-CN" altLang="en-US" sz="1400"/>
+              <a:t>通过蓝牙连接到待配网的设备</a:t>
+            </a:r>
+            <a:endParaRPr lang="zh-CN" altLang="en-US" sz="1400"/>
+          </a:p>
+          <a:p>
+            <a:pPr lvl="2"/>
+            <a:r>
+              <a:rPr lang="zh-CN" altLang="en-US" sz="1445"/>
+              <a:t>手机通过</a:t>
+            </a:r>
+            <a:r>
+              <a:rPr lang="en-US" altLang="zh-CN" sz="1445"/>
+              <a:t>BLE</a:t>
+            </a:r>
+            <a:r>
+              <a:rPr lang="zh-CN" altLang="en-US" sz="1445"/>
+              <a:t>将</a:t>
+            </a:r>
+            <a:r>
+              <a:rPr lang="en-US" altLang="zh-CN" sz="1445"/>
+              <a:t>Wi-Fi</a:t>
+            </a:r>
+            <a:r>
+              <a:rPr lang="zh-CN" altLang="en-US" sz="1445"/>
+              <a:t>路由器的配网信息（</a:t>
+            </a:r>
+            <a:r>
+              <a:rPr lang="en-US" altLang="zh-CN" sz="1445"/>
+              <a:t>SSID/password</a:t>
+            </a:r>
+            <a:r>
+              <a:rPr lang="zh-CN" altLang="en-US" sz="1445"/>
+              <a:t>）发送给设备端</a:t>
+            </a:r>
+            <a:endParaRPr lang="zh-CN" altLang="en-US" sz="1445"/>
+          </a:p>
+          <a:p>
+            <a:pPr lvl="1"/>
+            <a:r>
+              <a:rPr lang="zh-CN" altLang="en-US" sz="1600"/>
+              <a:t>路由器配网</a:t>
+            </a:r>
+            <a:endParaRPr lang="zh-CN" altLang="en-US" sz="1600"/>
+          </a:p>
+          <a:p>
+            <a:pPr lvl="2"/>
+            <a:r>
+              <a:rPr lang="zh-CN" altLang="en-US" sz="1400"/>
+              <a:t>路由器在配网模式下开启一个特定的用于配网的</a:t>
+            </a:r>
+            <a:r>
+              <a:rPr lang="en-US" altLang="zh-CN" sz="1400"/>
+              <a:t>SSID</a:t>
+            </a:r>
+            <a:r>
+              <a:rPr lang="zh-CN" altLang="en-US" sz="1400"/>
+              <a:t>，设备发现了这个热点后连接这个热点以获取配网信息</a:t>
+            </a:r>
+            <a:endParaRPr lang="zh-CN" altLang="en-US" sz="1400"/>
+          </a:p>
+          <a:p>
+            <a:pPr lvl="1"/>
+            <a:r>
+              <a:rPr lang="zh-CN" altLang="en-US" sz="1600"/>
+              <a:t>零配</a:t>
+            </a:r>
+            <a:endParaRPr lang="zh-CN" altLang="en-US" sz="1600"/>
+          </a:p>
+          <a:p>
+            <a:pPr lvl="1"/>
+            <a:r>
+              <a:rPr lang="zh-CN" altLang="en-US" sz="1600"/>
+              <a:t>摄像头扫码配网</a:t>
+            </a:r>
+            <a:endParaRPr lang="zh-CN" altLang="en-US" sz="1600"/>
+          </a:p>
+          <a:p>
+            <a:pPr lvl="2"/>
+            <a:endParaRPr lang="zh-CN" altLang="en-US" sz="1600"/>
+          </a:p>
+        </p:txBody>
+      </p:sp>
+      <p:pic>
+        <p:nvPicPr>
+          <p:cNvPr id="5" name="图片 4"/>
+          <p:cNvPicPr/>
+          <p:nvPr/>
+        </p:nvPicPr>
+        <p:blipFill>
+          <a:blip r:embed="rId1"/>
+          <a:stretch>
+            <a:fillRect/>
+          </a:stretch>
+        </p:blipFill>
+        <p:spPr>
+          <a:xfrm>
+            <a:off x="5321300" y="1885950"/>
+            <a:ext cx="1784985" cy="1146175"/>
+          </a:xfrm>
+          <a:prstGeom prst="rect">
+            <a:avLst/>
+          </a:prstGeom>
+        </p:spPr>
+      </p:pic>
+      <p:pic>
+        <p:nvPicPr>
+          <p:cNvPr id="6" name="图片 5"/>
+          <p:cNvPicPr/>
+          <p:nvPr/>
+        </p:nvPicPr>
+        <p:blipFill>
+          <a:blip r:embed="rId2"/>
+          <a:stretch>
+            <a:fillRect/>
+          </a:stretch>
+        </p:blipFill>
+        <p:spPr>
+          <a:xfrm>
+            <a:off x="5260975" y="3803015"/>
+            <a:ext cx="7051040" cy="2200275"/>
+          </a:xfrm>
+          <a:prstGeom prst="rect">
+            <a:avLst/>
+          </a:prstGeom>
+        </p:spPr>
+      </p:pic>
+      <p:pic>
+        <p:nvPicPr>
+          <p:cNvPr id="8" name="图片 7"/>
+          <p:cNvPicPr/>
+          <p:nvPr/>
+        </p:nvPicPr>
+        <p:blipFill>
+          <a:blip r:embed="rId3"/>
+          <a:stretch>
+            <a:fillRect/>
+          </a:stretch>
+        </p:blipFill>
+        <p:spPr>
+          <a:xfrm>
+            <a:off x="6985635" y="1102360"/>
+            <a:ext cx="5082540" cy="2700655"/>
+          </a:xfrm>
+          <a:prstGeom prst="rect">
+            <a:avLst/>
+          </a:prstGeom>
+        </p:spPr>
+      </p:pic>
     </p:spTree>
     <p:custDataLst>
-      <p:tags r:id="rId1"/>
+      <p:tags r:id="rId4"/>
     </p:custDataLst>
   </p:cSld>
   <p:clrMapOvr>
@@ -4936,7 +5220,7 @@
       <p:grpSpPr/>
       <p:sp>
         <p:nvSpPr>
-          <p:cNvPr id="4" name="标题 3"/>
+          <p:cNvPr id="2" name="标题 1"/>
           <p:cNvSpPr>
             <a:spLocks noGrp="1"/>
           </p:cNvSpPr>
@@ -4949,16 +5233,16 @@
           <a:bodyPr/>
           <a:p>
             <a:r>
-              <a:rPr lang="en-US" altLang="zh-CN"/>
-              <a:t>References</a:t>
-            </a:r>
-            <a:endParaRPr lang="en-US" altLang="zh-CN"/>
-          </a:p>
-        </p:txBody>
-      </p:sp>
-      <p:sp>
-        <p:nvSpPr>
-          <p:cNvPr id="5" name="内容占位符 4"/>
+              <a:rPr lang="zh-CN" altLang="en-US"/>
+              <a:t>蓝牙配网</a:t>
+            </a:r>
+            <a:endParaRPr lang="en-US" altLang="zh-CN"/>
+          </a:p>
+        </p:txBody>
+      </p:sp>
+      <p:sp>
+        <p:nvSpPr>
+          <p:cNvPr id="3" name="内容占位符 2"/>
           <p:cNvSpPr>
             <a:spLocks noGrp="1"/>
           </p:cNvSpPr>
@@ -4966,22 +5250,842 @@
             <p:ph idx="1"/>
           </p:nvPr>
         </p:nvSpPr>
-        <p:spPr/>
-        <p:txBody>
-          <a:bodyPr/>
+        <p:spPr>
+          <a:xfrm>
+            <a:off x="838200" y="1211580"/>
+            <a:ext cx="6502400" cy="5290185"/>
+          </a:xfrm>
+        </p:spPr>
+        <p:txBody>
+          <a:bodyPr>
+            <a:normAutofit fontScale="60000"/>
+          </a:bodyPr>
           <a:p>
             <a:r>
               <a:rPr lang="zh-CN" altLang="en-US"/>
-              <a:t>https://www.arubanetworks.com/assets/so/SO_ClearPass.pdf</a:t>
+              <a:t>微信小程序蓝牙配网步骤</a:t>
+            </a:r>
+            <a:endParaRPr lang="en-US" altLang="zh-CN"/>
+          </a:p>
+          <a:p>
+            <a:pPr lvl="1"/>
+            <a:r>
+              <a:rPr lang="zh-CN" altLang="en-US"/>
+              <a:t>步骤</a:t>
+            </a:r>
+            <a:r>
+              <a:rPr lang="en-US" altLang="zh-CN"/>
+              <a:t>1</a:t>
+            </a:r>
+            <a:r>
+              <a:rPr lang="zh-CN" altLang="en-US"/>
+              <a:t>：设备进入配网模式</a:t>
             </a:r>
             <a:endParaRPr lang="zh-CN" altLang="en-US"/>
           </a:p>
           <a:p>
+            <a:pPr lvl="2"/>
+            <a:r>
+              <a:rPr lang="zh-CN" altLang="en-US">
+                <a:solidFill>
+                  <a:srgbClr val="C00000"/>
+                </a:solidFill>
+              </a:rPr>
+              <a:t>物联网设备需要支持蓝牙功能，并在配网模式下广播特定的蓝牙服务。</a:t>
+            </a:r>
+            <a:endParaRPr lang="zh-CN" altLang="en-US">
+              <a:solidFill>
+                <a:srgbClr val="C00000"/>
+              </a:solidFill>
+            </a:endParaRPr>
+          </a:p>
+          <a:p>
+            <a:pPr lvl="2"/>
             <a:r>
               <a:rPr lang="zh-CN" altLang="en-US"/>
-              <a:t>https://www.arubanetworks.com/products/security/network-access-control/secure-access/</a:t>
+              <a:t>设备通常会有一个配网按钮，长按后进入配网模式。</a:t>
             </a:r>
             <a:endParaRPr lang="zh-CN" altLang="en-US"/>
+          </a:p>
+          <a:p>
+            <a:pPr lvl="1"/>
+            <a:r>
+              <a:rPr lang="zh-CN" altLang="en-US"/>
+              <a:t>步骤</a:t>
+            </a:r>
+            <a:r>
+              <a:rPr lang="en-US" altLang="zh-CN"/>
+              <a:t>2</a:t>
+            </a:r>
+            <a:r>
+              <a:rPr lang="zh-CN" altLang="en-US"/>
+              <a:t>：小程序搜索并连接设备</a:t>
+            </a:r>
+            <a:endParaRPr lang="zh-CN" altLang="en-US"/>
+          </a:p>
+          <a:p>
+            <a:pPr lvl="2"/>
+            <a:r>
+              <a:rPr lang="zh-CN" altLang="en-US"/>
+              <a:t>使用微信小程序的蓝牙</a:t>
+            </a:r>
+            <a:r>
+              <a:rPr lang="en-US" altLang="zh-CN"/>
+              <a:t>API</a:t>
+            </a:r>
+            <a:r>
+              <a:rPr lang="zh-CN" altLang="en-US"/>
+              <a:t>（如</a:t>
+            </a:r>
+            <a:r>
+              <a:rPr lang="en-US" altLang="zh-CN"/>
+              <a:t> wx.startBluetoothDevicesDiscovery</a:t>
+            </a:r>
+            <a:r>
+              <a:rPr lang="zh-CN" altLang="en-US"/>
+              <a:t>）搜索附近的蓝牙设备。</a:t>
+            </a:r>
+            <a:endParaRPr lang="zh-CN" altLang="en-US"/>
+          </a:p>
+          <a:p>
+            <a:pPr lvl="2"/>
+            <a:r>
+              <a:rPr lang="zh-CN" altLang="en-US"/>
+              <a:t>找到目标设备后，通过</a:t>
+            </a:r>
+            <a:r>
+              <a:rPr lang="en-US" altLang="zh-CN"/>
+              <a:t> wx.createBLEConnection </a:t>
+            </a:r>
+            <a:r>
+              <a:rPr lang="zh-CN" altLang="en-US"/>
+              <a:t>建立蓝牙连接。</a:t>
+            </a:r>
+            <a:endParaRPr lang="zh-CN" altLang="en-US"/>
+          </a:p>
+          <a:p>
+            <a:pPr lvl="1"/>
+            <a:r>
+              <a:rPr lang="zh-CN" altLang="en-US"/>
+              <a:t>步骤</a:t>
+            </a:r>
+            <a:r>
+              <a:rPr lang="en-US" altLang="zh-CN"/>
+              <a:t>3</a:t>
+            </a:r>
+            <a:r>
+              <a:rPr lang="zh-CN" altLang="en-US"/>
+              <a:t>：发送</a:t>
+            </a:r>
+            <a:r>
+              <a:rPr lang="en-US" altLang="zh-CN"/>
+              <a:t>Wi-Fi</a:t>
+            </a:r>
+            <a:r>
+              <a:rPr lang="zh-CN" altLang="en-US"/>
+              <a:t>配置信息</a:t>
+            </a:r>
+            <a:endParaRPr lang="zh-CN" altLang="en-US"/>
+          </a:p>
+          <a:p>
+            <a:pPr lvl="2"/>
+            <a:r>
+              <a:rPr lang="zh-CN" altLang="en-US"/>
+              <a:t>小程序通过蓝牙</a:t>
+            </a:r>
+            <a:r>
+              <a:rPr lang="en-US" altLang="zh-CN"/>
+              <a:t>API</a:t>
+            </a:r>
+            <a:r>
+              <a:rPr lang="zh-CN" altLang="en-US"/>
+              <a:t>（如</a:t>
+            </a:r>
+            <a:r>
+              <a:rPr lang="en-US" altLang="zh-CN"/>
+              <a:t> wx.writeBLECharacteristicValue</a:t>
+            </a:r>
+            <a:r>
+              <a:rPr lang="zh-CN" altLang="en-US"/>
+              <a:t>）将</a:t>
+            </a:r>
+            <a:r>
+              <a:rPr lang="en-US" altLang="zh-CN"/>
+              <a:t>Wi-Fi</a:t>
+            </a:r>
+            <a:r>
+              <a:rPr lang="zh-CN" altLang="en-US"/>
+              <a:t>的</a:t>
+            </a:r>
+            <a:r>
+              <a:rPr lang="en-US" altLang="zh-CN"/>
+              <a:t>SSID</a:t>
+            </a:r>
+            <a:r>
+              <a:rPr lang="zh-CN" altLang="en-US"/>
+              <a:t>和密码发送给设备。</a:t>
+            </a:r>
+            <a:endParaRPr lang="zh-CN" altLang="en-US"/>
+          </a:p>
+          <a:p>
+            <a:pPr lvl="2"/>
+            <a:r>
+              <a:rPr lang="zh-CN" altLang="en-US"/>
+              <a:t>数据通常需要按照设备厂商定义的协议进行封装。</a:t>
+            </a:r>
+            <a:endParaRPr lang="zh-CN" altLang="en-US"/>
+          </a:p>
+          <a:p>
+            <a:pPr lvl="1"/>
+            <a:r>
+              <a:rPr lang="zh-CN" altLang="en-US"/>
+              <a:t>步骤</a:t>
+            </a:r>
+            <a:r>
+              <a:rPr lang="en-US" altLang="zh-CN"/>
+              <a:t>4</a:t>
+            </a:r>
+            <a:r>
+              <a:rPr lang="zh-CN" altLang="en-US"/>
+              <a:t>：设备连接</a:t>
+            </a:r>
+            <a:r>
+              <a:rPr lang="en-US" altLang="zh-CN"/>
+              <a:t>Wi-Fi</a:t>
+            </a:r>
+            <a:endParaRPr lang="en-US" altLang="zh-CN"/>
+          </a:p>
+          <a:p>
+            <a:pPr lvl="2"/>
+            <a:r>
+              <a:rPr lang="zh-CN" altLang="en-US">
+                <a:solidFill>
+                  <a:srgbClr val="C00000"/>
+                </a:solidFill>
+              </a:rPr>
+              <a:t>设备接收到</a:t>
+            </a:r>
+            <a:r>
+              <a:rPr lang="en-US" altLang="zh-CN">
+                <a:solidFill>
+                  <a:srgbClr val="C00000"/>
+                </a:solidFill>
+              </a:rPr>
+              <a:t>Wi-Fi</a:t>
+            </a:r>
+            <a:r>
+              <a:rPr lang="zh-CN" altLang="en-US">
+                <a:solidFill>
+                  <a:srgbClr val="C00000"/>
+                </a:solidFill>
+              </a:rPr>
+              <a:t>配置信息后，尝试连接指定的</a:t>
+            </a:r>
+            <a:r>
+              <a:rPr lang="en-US" altLang="zh-CN">
+                <a:solidFill>
+                  <a:srgbClr val="C00000"/>
+                </a:solidFill>
+              </a:rPr>
+              <a:t>Wi-Fi</a:t>
+            </a:r>
+            <a:r>
+              <a:rPr lang="zh-CN" altLang="en-US">
+                <a:solidFill>
+                  <a:srgbClr val="C00000"/>
+                </a:solidFill>
+              </a:rPr>
+              <a:t>网络。</a:t>
+            </a:r>
+            <a:endParaRPr lang="zh-CN" altLang="en-US">
+              <a:solidFill>
+                <a:srgbClr val="C00000"/>
+              </a:solidFill>
+            </a:endParaRPr>
+          </a:p>
+          <a:p>
+            <a:pPr lvl="2"/>
+            <a:r>
+              <a:rPr lang="zh-CN" altLang="en-US">
+                <a:solidFill>
+                  <a:srgbClr val="C00000"/>
+                </a:solidFill>
+              </a:rPr>
+              <a:t>设备通过蓝牙向小程序反馈连接状态（成功或失败）。</a:t>
+            </a:r>
+            <a:endParaRPr lang="zh-CN" altLang="en-US">
+              <a:solidFill>
+                <a:srgbClr val="C00000"/>
+              </a:solidFill>
+            </a:endParaRPr>
+          </a:p>
+          <a:p>
+            <a:pPr lvl="1"/>
+            <a:r>
+              <a:rPr lang="zh-CN" altLang="en-US"/>
+              <a:t>步骤</a:t>
+            </a:r>
+            <a:r>
+              <a:rPr lang="en-US" altLang="zh-CN"/>
+              <a:t>5</a:t>
+            </a:r>
+            <a:r>
+              <a:rPr lang="zh-CN" altLang="en-US"/>
+              <a:t>：小程序显示配网结果</a:t>
+            </a:r>
+            <a:endParaRPr lang="zh-CN" altLang="en-US"/>
+          </a:p>
+          <a:p>
+            <a:pPr lvl="2"/>
+            <a:r>
+              <a:rPr lang="zh-CN" altLang="en-US"/>
+              <a:t>小程序监听设备的反馈，并根据结果提示用户配网是否成功。</a:t>
+            </a:r>
+            <a:endParaRPr lang="zh-CN" altLang="en-US"/>
+          </a:p>
+          <a:p>
+            <a:pPr lvl="0"/>
+            <a:r>
+              <a:rPr lang="zh-CN" altLang="en-US"/>
+              <a:t>微信小程序</a:t>
+            </a:r>
+            <a:r>
+              <a:rPr lang="en-US" altLang="zh-CN"/>
+              <a:t>API</a:t>
+            </a:r>
+            <a:endParaRPr lang="en-US" altLang="zh-CN"/>
+          </a:p>
+          <a:p>
+            <a:pPr lvl="1"/>
+            <a:r>
+              <a:rPr lang="en-US" altLang="zh-CN"/>
+              <a:t>wx.startBluetoothDevicesDiscovery</a:t>
+            </a:r>
+            <a:r>
+              <a:rPr lang="zh-CN" altLang="en-US"/>
+              <a:t>：开始搜索附近的蓝牙设备。</a:t>
+            </a:r>
+            <a:endParaRPr lang="zh-CN" altLang="en-US"/>
+          </a:p>
+          <a:p>
+            <a:pPr lvl="1"/>
+            <a:r>
+              <a:rPr lang="en-US" altLang="zh-CN"/>
+              <a:t>wx.onBluetoothDeviceFound</a:t>
+            </a:r>
+            <a:r>
+              <a:rPr lang="zh-CN" altLang="en-US"/>
+              <a:t>：监听搜索到的蓝牙设备。</a:t>
+            </a:r>
+            <a:endParaRPr lang="zh-CN" altLang="en-US"/>
+          </a:p>
+          <a:p>
+            <a:pPr lvl="1"/>
+            <a:r>
+              <a:rPr lang="en-US" altLang="zh-CN"/>
+              <a:t>wx.createBLEConnection</a:t>
+            </a:r>
+            <a:r>
+              <a:rPr lang="zh-CN" altLang="en-US"/>
+              <a:t>：连接指定的蓝牙设备。</a:t>
+            </a:r>
+            <a:endParaRPr lang="zh-CN" altLang="en-US"/>
+          </a:p>
+          <a:p>
+            <a:pPr lvl="1"/>
+            <a:r>
+              <a:rPr lang="en-US" altLang="zh-CN"/>
+              <a:t>wx.writeBLECharacteristicValue</a:t>
+            </a:r>
+            <a:r>
+              <a:rPr lang="zh-CN" altLang="en-US"/>
+              <a:t>：向设备写入数据（如</a:t>
+            </a:r>
+            <a:r>
+              <a:rPr lang="en-US" altLang="zh-CN"/>
+              <a:t>Wi-Fi</a:t>
+            </a:r>
+            <a:r>
+              <a:rPr lang="zh-CN" altLang="en-US"/>
+              <a:t>配置信息）。</a:t>
+            </a:r>
+            <a:endParaRPr lang="zh-CN" altLang="en-US"/>
+          </a:p>
+          <a:p>
+            <a:pPr lvl="1"/>
+            <a:r>
+              <a:rPr lang="en-US" altLang="zh-CN"/>
+              <a:t>wx.onBLECharacteristicValueChange</a:t>
+            </a:r>
+            <a:r>
+              <a:rPr lang="zh-CN" altLang="en-US"/>
+              <a:t>：监听设备返回的数据（如连接状态）</a:t>
+            </a:r>
+            <a:endParaRPr lang="zh-CN" altLang="en-US"/>
+          </a:p>
+        </p:txBody>
+      </p:sp>
+      <p:sp>
+        <p:nvSpPr>
+          <p:cNvPr id="4" name="文本框 3"/>
+          <p:cNvSpPr txBox="1"/>
+          <p:nvPr/>
+        </p:nvSpPr>
+        <p:spPr>
+          <a:xfrm>
+            <a:off x="7830185" y="91440"/>
+            <a:ext cx="4144645" cy="6675755"/>
+          </a:xfrm>
+          <a:prstGeom prst="rect">
+            <a:avLst/>
+          </a:prstGeom>
+          <a:noFill/>
+          <a:ln>
+            <a:solidFill>
+              <a:srgbClr val="C00000"/>
+            </a:solidFill>
+          </a:ln>
+        </p:spPr>
+        <p:txBody>
+          <a:bodyPr wrap="square" rtlCol="0">
+            <a:noAutofit/>
+          </a:bodyPr>
+          <a:p>
+            <a:r>
+              <a:rPr lang="en-US" altLang="zh-CN" sz="900"/>
+              <a:t>// </a:t>
+            </a:r>
+            <a:r>
+              <a:rPr lang="zh-CN" altLang="en-US" sz="900"/>
+              <a:t>搜索设备</a:t>
+            </a:r>
+            <a:endParaRPr lang="zh-CN" altLang="en-US" sz="900"/>
+          </a:p>
+          <a:p>
+            <a:r>
+              <a:rPr lang="en-US" altLang="zh-CN" sz="900"/>
+              <a:t>wx.startBluetoothDevicesDiscovery({</a:t>
+            </a:r>
+            <a:endParaRPr lang="en-US" altLang="zh-CN" sz="900"/>
+          </a:p>
+          <a:p>
+            <a:r>
+              <a:rPr lang="en-US" altLang="zh-CN" sz="900"/>
+              <a:t>  success: function (res) {</a:t>
+            </a:r>
+            <a:endParaRPr lang="en-US" altLang="zh-CN" sz="900"/>
+          </a:p>
+          <a:p>
+            <a:r>
+              <a:rPr lang="en-US" altLang="zh-CN" sz="900"/>
+              <a:t>    console.log('</a:t>
+            </a:r>
+            <a:r>
+              <a:rPr lang="zh-CN" altLang="en-US" sz="900"/>
+              <a:t>开始搜索设备</a:t>
+            </a:r>
+            <a:r>
+              <a:rPr lang="en-US" altLang="zh-CN" sz="900"/>
+              <a:t>', res);</a:t>
+            </a:r>
+            <a:endParaRPr lang="en-US" altLang="zh-CN" sz="900"/>
+          </a:p>
+          <a:p>
+            <a:r>
+              <a:rPr lang="en-US" altLang="zh-CN" sz="900"/>
+              <a:t>  }</a:t>
+            </a:r>
+            <a:endParaRPr lang="en-US" altLang="zh-CN" sz="900"/>
+          </a:p>
+          <a:p>
+            <a:r>
+              <a:rPr lang="en-US" altLang="zh-CN" sz="900"/>
+              <a:t>});</a:t>
+            </a:r>
+            <a:endParaRPr lang="en-US" altLang="zh-CN" sz="900"/>
+          </a:p>
+          <a:p>
+            <a:endParaRPr lang="en-US" altLang="zh-CN" sz="900"/>
+          </a:p>
+          <a:p>
+            <a:r>
+              <a:rPr lang="en-US" altLang="zh-CN" sz="900"/>
+              <a:t>// </a:t>
+            </a:r>
+            <a:r>
+              <a:rPr lang="zh-CN" altLang="en-US" sz="900"/>
+              <a:t>监听搜索到的设备</a:t>
+            </a:r>
+            <a:endParaRPr lang="zh-CN" altLang="en-US" sz="900"/>
+          </a:p>
+          <a:p>
+            <a:r>
+              <a:rPr lang="en-US" altLang="zh-CN" sz="900"/>
+              <a:t>wx.onBluetoothDeviceFound(function (res) {</a:t>
+            </a:r>
+            <a:endParaRPr lang="en-US" altLang="zh-CN" sz="900"/>
+          </a:p>
+          <a:p>
+            <a:r>
+              <a:rPr lang="en-US" altLang="zh-CN" sz="900"/>
+              <a:t>  const devices = res.devices;</a:t>
+            </a:r>
+            <a:endParaRPr lang="en-US" altLang="zh-CN" sz="900"/>
+          </a:p>
+          <a:p>
+            <a:r>
+              <a:rPr lang="en-US" altLang="zh-CN" sz="900"/>
+              <a:t>  if (devices.length &gt; 0) {</a:t>
+            </a:r>
+            <a:endParaRPr lang="en-US" altLang="zh-CN" sz="900"/>
+          </a:p>
+          <a:p>
+            <a:r>
+              <a:rPr lang="en-US" altLang="zh-CN" sz="900"/>
+              <a:t>    const targetDevice = devices[0]; // </a:t>
+            </a:r>
+            <a:r>
+              <a:rPr lang="zh-CN" altLang="en-US" sz="900"/>
+              <a:t>假设第一个设备是目标设备</a:t>
+            </a:r>
+            <a:endParaRPr lang="zh-CN" altLang="en-US" sz="900"/>
+          </a:p>
+          <a:p>
+            <a:r>
+              <a:rPr lang="en-US" altLang="zh-CN" sz="900"/>
+              <a:t>    wx.createBLEConnection({</a:t>
+            </a:r>
+            <a:endParaRPr lang="en-US" altLang="zh-CN" sz="900"/>
+          </a:p>
+          <a:p>
+            <a:r>
+              <a:rPr lang="en-US" altLang="zh-CN" sz="900"/>
+              <a:t>      deviceId: targetDevice.deviceId,</a:t>
+            </a:r>
+            <a:endParaRPr lang="en-US" altLang="zh-CN" sz="900"/>
+          </a:p>
+          <a:p>
+            <a:r>
+              <a:rPr lang="en-US" altLang="zh-CN" sz="900"/>
+              <a:t>      success: function (res) {</a:t>
+            </a:r>
+            <a:endParaRPr lang="en-US" altLang="zh-CN" sz="900"/>
+          </a:p>
+          <a:p>
+            <a:r>
+              <a:rPr lang="en-US" altLang="zh-CN" sz="900"/>
+              <a:t>        console.log('</a:t>
+            </a:r>
+            <a:r>
+              <a:rPr lang="zh-CN" altLang="en-US" sz="900"/>
+              <a:t>蓝牙连接成功</a:t>
+            </a:r>
+            <a:r>
+              <a:rPr lang="en-US" altLang="zh-CN" sz="900"/>
+              <a:t>', res);</a:t>
+            </a:r>
+            <a:endParaRPr lang="en-US" altLang="zh-CN" sz="900"/>
+          </a:p>
+          <a:p>
+            <a:r>
+              <a:rPr lang="en-US" altLang="zh-CN" sz="900"/>
+              <a:t>        // </a:t>
+            </a:r>
+            <a:r>
+              <a:rPr lang="zh-CN" altLang="en-US" sz="900"/>
+              <a:t>发送</a:t>
+            </a:r>
+            <a:r>
+              <a:rPr lang="en-US" altLang="zh-CN" sz="900"/>
+              <a:t>Wi-Fi</a:t>
+            </a:r>
+            <a:r>
+              <a:rPr lang="zh-CN" altLang="en-US" sz="900"/>
+              <a:t>配置信息</a:t>
+            </a:r>
+            <a:endParaRPr lang="zh-CN" altLang="en-US" sz="900"/>
+          </a:p>
+          <a:p>
+            <a:r>
+              <a:rPr lang="en-US" altLang="zh-CN" sz="900"/>
+              <a:t>        const wifiInfo = { ssid: 'YourWiFiSSID', password: 'YourWiFiPassword' };</a:t>
+            </a:r>
+            <a:endParaRPr lang="en-US" altLang="zh-CN" sz="900"/>
+          </a:p>
+          <a:p>
+            <a:r>
+              <a:rPr lang="en-US" altLang="zh-CN" sz="900"/>
+              <a:t>        const buffer = new ArrayBuffer(64);</a:t>
+            </a:r>
+            <a:endParaRPr lang="en-US" altLang="zh-CN" sz="900"/>
+          </a:p>
+          <a:p>
+            <a:r>
+              <a:rPr lang="en-US" altLang="zh-CN" sz="900"/>
+              <a:t>        const dataView = new DataView(buffer);</a:t>
+            </a:r>
+            <a:endParaRPr lang="en-US" altLang="zh-CN" sz="900"/>
+          </a:p>
+          <a:p>
+            <a:r>
+              <a:rPr lang="en-US" altLang="zh-CN" sz="900"/>
+              <a:t>        // </a:t>
+            </a:r>
+            <a:r>
+              <a:rPr lang="zh-CN" altLang="en-US" sz="900"/>
+              <a:t>按照设备协议封装数据</a:t>
+            </a:r>
+            <a:endParaRPr lang="zh-CN" altLang="en-US" sz="900"/>
+          </a:p>
+          <a:p>
+            <a:r>
+              <a:rPr lang="en-US" altLang="zh-CN" sz="900"/>
+              <a:t>        // </a:t>
+            </a:r>
+            <a:r>
+              <a:rPr lang="zh-CN" altLang="en-US" sz="900"/>
+              <a:t>例如：前</a:t>
+            </a:r>
+            <a:r>
+              <a:rPr lang="en-US" altLang="zh-CN" sz="900"/>
+              <a:t>32</a:t>
+            </a:r>
+            <a:r>
+              <a:rPr lang="zh-CN" altLang="en-US" sz="900"/>
+              <a:t>字节为</a:t>
+            </a:r>
+            <a:r>
+              <a:rPr lang="en-US" altLang="zh-CN" sz="900"/>
+              <a:t>SSID</a:t>
+            </a:r>
+            <a:r>
+              <a:rPr lang="zh-CN" altLang="en-US" sz="900"/>
+              <a:t>，后</a:t>
+            </a:r>
+            <a:r>
+              <a:rPr lang="en-US" altLang="zh-CN" sz="900"/>
+              <a:t>32</a:t>
+            </a:r>
+            <a:r>
+              <a:rPr lang="zh-CN" altLang="en-US" sz="900"/>
+              <a:t>字节为密码</a:t>
+            </a:r>
+            <a:endParaRPr lang="zh-CN" altLang="en-US" sz="900"/>
+          </a:p>
+          <a:p>
+            <a:r>
+              <a:rPr lang="en-US" altLang="zh-CN" sz="900"/>
+              <a:t>        for (let i = 0; i &lt; wifiInfo.ssid.length; i++) {</a:t>
+            </a:r>
+            <a:endParaRPr lang="en-US" altLang="zh-CN" sz="900"/>
+          </a:p>
+          <a:p>
+            <a:r>
+              <a:rPr lang="en-US" altLang="zh-CN" sz="900"/>
+              <a:t>          dataView.setUint8(i, wifiInfo.ssid.charCodeAt(i));</a:t>
+            </a:r>
+            <a:endParaRPr lang="en-US" altLang="zh-CN" sz="900"/>
+          </a:p>
+          <a:p>
+            <a:r>
+              <a:rPr lang="en-US" altLang="zh-CN" sz="900"/>
+              <a:t>        }</a:t>
+            </a:r>
+            <a:endParaRPr lang="en-US" altLang="zh-CN" sz="900"/>
+          </a:p>
+          <a:p>
+            <a:r>
+              <a:rPr lang="en-US" altLang="zh-CN" sz="900"/>
+              <a:t>        for (let i = 0; i &lt; wifiInfo.password.length; i++) {</a:t>
+            </a:r>
+            <a:endParaRPr lang="en-US" altLang="zh-CN" sz="900"/>
+          </a:p>
+          <a:p>
+            <a:r>
+              <a:rPr lang="en-US" altLang="zh-CN" sz="900"/>
+              <a:t>          dataView.setUint8(32 + i, wifiInfo.password.charCodeAt(i));</a:t>
+            </a:r>
+            <a:endParaRPr lang="en-US" altLang="zh-CN" sz="900"/>
+          </a:p>
+          <a:p>
+            <a:r>
+              <a:rPr lang="en-US" altLang="zh-CN" sz="900"/>
+              <a:t>        }</a:t>
+            </a:r>
+            <a:endParaRPr lang="en-US" altLang="zh-CN" sz="900"/>
+          </a:p>
+          <a:p>
+            <a:r>
+              <a:rPr lang="en-US" altLang="zh-CN" sz="900"/>
+              <a:t>        wx.writeBLECharacteristicValue({</a:t>
+            </a:r>
+            <a:endParaRPr lang="en-US" altLang="zh-CN" sz="900"/>
+          </a:p>
+          <a:p>
+            <a:r>
+              <a:rPr lang="en-US" altLang="zh-CN" sz="900"/>
+              <a:t>          deviceId: targetDevice.deviceId,</a:t>
+            </a:r>
+            <a:endParaRPr lang="en-US" altLang="zh-CN" sz="900"/>
+          </a:p>
+          <a:p>
+            <a:r>
+              <a:rPr lang="en-US" altLang="zh-CN" sz="900"/>
+              <a:t>          serviceId: '</a:t>
+            </a:r>
+            <a:r>
+              <a:rPr lang="zh-CN" altLang="en-US" sz="900"/>
+              <a:t>服务</a:t>
+            </a:r>
+            <a:r>
+              <a:rPr lang="en-US" altLang="zh-CN" sz="900"/>
+              <a:t>UUID',</a:t>
+            </a:r>
+            <a:endParaRPr lang="en-US" altLang="zh-CN" sz="900"/>
+          </a:p>
+          <a:p>
+            <a:r>
+              <a:rPr lang="en-US" altLang="zh-CN" sz="900"/>
+              <a:t>          characteristicId: '</a:t>
+            </a:r>
+            <a:r>
+              <a:rPr lang="zh-CN" altLang="en-US" sz="900"/>
+              <a:t>特征值</a:t>
+            </a:r>
+            <a:r>
+              <a:rPr lang="en-US" altLang="zh-CN" sz="900"/>
+              <a:t>UUID',</a:t>
+            </a:r>
+            <a:endParaRPr lang="en-US" altLang="zh-CN" sz="900"/>
+          </a:p>
+          <a:p>
+            <a:r>
+              <a:rPr lang="en-US" altLang="zh-CN" sz="900"/>
+              <a:t>          value: buffer,</a:t>
+            </a:r>
+            <a:endParaRPr lang="en-US" altLang="zh-CN" sz="900"/>
+          </a:p>
+          <a:p>
+            <a:r>
+              <a:rPr lang="en-US" altLang="zh-CN" sz="900"/>
+              <a:t>          success: function (res) {</a:t>
+            </a:r>
+            <a:endParaRPr lang="en-US" altLang="zh-CN" sz="900"/>
+          </a:p>
+          <a:p>
+            <a:r>
+              <a:rPr lang="en-US" altLang="zh-CN" sz="900"/>
+              <a:t>            console.log('Wi-Fi</a:t>
+            </a:r>
+            <a:r>
+              <a:rPr lang="zh-CN" altLang="en-US" sz="900"/>
+              <a:t>配置信息发送成功</a:t>
+            </a:r>
+            <a:r>
+              <a:rPr lang="en-US" altLang="zh-CN" sz="900"/>
+              <a:t>', res);</a:t>
+            </a:r>
+            <a:endParaRPr lang="en-US" altLang="zh-CN" sz="900"/>
+          </a:p>
+          <a:p>
+            <a:r>
+              <a:rPr lang="en-US" altLang="zh-CN" sz="900"/>
+              <a:t>          },</a:t>
+            </a:r>
+            <a:endParaRPr lang="en-US" altLang="zh-CN" sz="900"/>
+          </a:p>
+          <a:p>
+            <a:r>
+              <a:rPr lang="en-US" altLang="zh-CN" sz="900"/>
+              <a:t>          fail: function (err) {</a:t>
+            </a:r>
+            <a:endParaRPr lang="en-US" altLang="zh-CN" sz="900"/>
+          </a:p>
+          <a:p>
+            <a:r>
+              <a:rPr lang="en-US" altLang="zh-CN" sz="900"/>
+              <a:t>            console.error('</a:t>
+            </a:r>
+            <a:r>
+              <a:rPr lang="zh-CN" altLang="en-US" sz="900"/>
+              <a:t>发送失败</a:t>
+            </a:r>
+            <a:r>
+              <a:rPr lang="en-US" altLang="zh-CN" sz="900"/>
+              <a:t>', err);</a:t>
+            </a:r>
+            <a:endParaRPr lang="en-US" altLang="zh-CN" sz="900"/>
+          </a:p>
+          <a:p>
+            <a:r>
+              <a:rPr lang="en-US" altLang="zh-CN" sz="900"/>
+              <a:t>          }</a:t>
+            </a:r>
+            <a:endParaRPr lang="en-US" altLang="zh-CN" sz="900"/>
+          </a:p>
+          <a:p>
+            <a:r>
+              <a:rPr lang="en-US" altLang="zh-CN" sz="900"/>
+              <a:t>        });</a:t>
+            </a:r>
+            <a:endParaRPr lang="en-US" altLang="zh-CN" sz="900"/>
+          </a:p>
+          <a:p>
+            <a:r>
+              <a:rPr lang="en-US" altLang="zh-CN" sz="900"/>
+              <a:t>      },</a:t>
+            </a:r>
+            <a:endParaRPr lang="en-US" altLang="zh-CN" sz="900"/>
+          </a:p>
+          <a:p>
+            <a:r>
+              <a:rPr lang="en-US" altLang="zh-CN" sz="900"/>
+              <a:t>      fail: function (err) {</a:t>
+            </a:r>
+            <a:endParaRPr lang="en-US" altLang="zh-CN" sz="900"/>
+          </a:p>
+          <a:p>
+            <a:r>
+              <a:rPr lang="en-US" altLang="zh-CN" sz="900"/>
+              <a:t>        console.error('</a:t>
+            </a:r>
+            <a:r>
+              <a:rPr lang="zh-CN" altLang="en-US" sz="900"/>
+              <a:t>蓝牙连接失败</a:t>
+            </a:r>
+            <a:r>
+              <a:rPr lang="en-US" altLang="zh-CN" sz="900"/>
+              <a:t>', err);</a:t>
+            </a:r>
+            <a:endParaRPr lang="en-US" altLang="zh-CN" sz="900"/>
+          </a:p>
+          <a:p>
+            <a:r>
+              <a:rPr lang="en-US" altLang="zh-CN" sz="900"/>
+              <a:t>      }</a:t>
+            </a:r>
+            <a:endParaRPr lang="en-US" altLang="zh-CN" sz="900"/>
+          </a:p>
+          <a:p>
+            <a:r>
+              <a:rPr lang="en-US" altLang="zh-CN" sz="900"/>
+              <a:t>    });</a:t>
+            </a:r>
+            <a:endParaRPr lang="en-US" altLang="zh-CN" sz="900"/>
+          </a:p>
+          <a:p>
+            <a:r>
+              <a:rPr lang="en-US" altLang="zh-CN" sz="900"/>
+              <a:t>  }</a:t>
+            </a:r>
+            <a:endParaRPr lang="en-US" altLang="zh-CN" sz="900"/>
+          </a:p>
+          <a:p>
+            <a:r>
+              <a:rPr lang="en-US" altLang="zh-CN" sz="900"/>
+              <a:t>});</a:t>
+            </a:r>
+            <a:endParaRPr lang="en-US" altLang="zh-CN" sz="900"/>
           </a:p>
         </p:txBody>
       </p:sp>
@@ -4997,6 +6101,1250 @@
 </file>
 
 <file path=ppt/slides/slide19.xml><?xml version="1.0" encoding="utf-8"?>
+<p:sld xmlns:a="http://schemas.openxmlformats.org/drawingml/2006/main" xmlns:r="http://schemas.openxmlformats.org/officeDocument/2006/relationships" xmlns:p="http://schemas.openxmlformats.org/presentationml/2006/main">
+  <p:cSld>
+    <p:spTree>
+      <p:nvGrpSpPr>
+        <p:cNvPr id="1" name=""/>
+        <p:cNvGrpSpPr/>
+        <p:nvPr/>
+      </p:nvGrpSpPr>
+      <p:grpSpPr/>
+      <p:sp>
+        <p:nvSpPr>
+          <p:cNvPr id="2" name="标题 1"/>
+          <p:cNvSpPr>
+            <a:spLocks noGrp="1"/>
+          </p:cNvSpPr>
+          <p:nvPr>
+            <p:ph type="title"/>
+          </p:nvPr>
+        </p:nvSpPr>
+        <p:spPr/>
+        <p:txBody>
+          <a:bodyPr/>
+          <a:p>
+            <a:r>
+              <a:rPr lang="en-US" altLang="zh-CN"/>
+              <a:t>Log System</a:t>
+            </a:r>
+            <a:endParaRPr lang="en-US" altLang="zh-CN"/>
+          </a:p>
+        </p:txBody>
+      </p:sp>
+      <p:sp>
+        <p:nvSpPr>
+          <p:cNvPr id="3" name="内容占位符 2"/>
+          <p:cNvSpPr>
+            <a:spLocks noGrp="1"/>
+          </p:cNvSpPr>
+          <p:nvPr>
+            <p:ph idx="1"/>
+          </p:nvPr>
+        </p:nvSpPr>
+        <p:spPr>
+          <a:xfrm>
+            <a:off x="838200" y="1211580"/>
+            <a:ext cx="5583555" cy="4549140"/>
+          </a:xfrm>
+        </p:spPr>
+        <p:txBody>
+          <a:bodyPr/>
+          <a:p>
+            <a:r>
+              <a:rPr lang="en-US" altLang="zh-CN"/>
+              <a:t>https://github.com/Meituan-Dianping/Logan</a:t>
+            </a:r>
+            <a:endParaRPr lang="en-US" altLang="zh-CN"/>
+          </a:p>
+          <a:p>
+            <a:pPr lvl="1"/>
+            <a:r>
+              <a:rPr lang="en-US" altLang="zh-CN"/>
+              <a:t>MIT license</a:t>
+            </a:r>
+            <a:endParaRPr lang="en-US" altLang="zh-CN"/>
+          </a:p>
+        </p:txBody>
+      </p:sp>
+      <p:pic>
+        <p:nvPicPr>
+          <p:cNvPr id="5" name="图片 4"/>
+          <p:cNvPicPr/>
+          <p:nvPr/>
+        </p:nvPicPr>
+        <p:blipFill>
+          <a:blip r:embed="rId1"/>
+          <a:stretch>
+            <a:fillRect/>
+          </a:stretch>
+        </p:blipFill>
+        <p:spPr>
+          <a:xfrm>
+            <a:off x="5300345" y="387985"/>
+            <a:ext cx="6336030" cy="2476500"/>
+          </a:xfrm>
+          <a:prstGeom prst="rect">
+            <a:avLst/>
+          </a:prstGeom>
+        </p:spPr>
+      </p:pic>
+    </p:spTree>
+    <p:custDataLst>
+      <p:tags r:id="rId2"/>
+    </p:custDataLst>
+  </p:cSld>
+  <p:clrMapOvr>
+    <a:masterClrMapping/>
+  </p:clrMapOvr>
+</p:sld>
+</file>
+
+<file path=ppt/slides/slide2.xml><?xml version="1.0" encoding="utf-8"?>
+<p:sld xmlns:a="http://schemas.openxmlformats.org/drawingml/2006/main" xmlns:r="http://schemas.openxmlformats.org/officeDocument/2006/relationships" xmlns:p="http://schemas.openxmlformats.org/presentationml/2006/main">
+  <p:cSld>
+    <p:spTree>
+      <p:nvGrpSpPr>
+        <p:cNvPr id="1" name=""/>
+        <p:cNvGrpSpPr/>
+        <p:nvPr/>
+      </p:nvGrpSpPr>
+      <p:grpSpPr/>
+      <p:sp>
+        <p:nvSpPr>
+          <p:cNvPr id="2" name="标题 1"/>
+          <p:cNvSpPr>
+            <a:spLocks noGrp="1"/>
+          </p:cNvSpPr>
+          <p:nvPr>
+            <p:ph type="title"/>
+          </p:nvPr>
+        </p:nvSpPr>
+        <p:spPr/>
+        <p:txBody>
+          <a:bodyPr/>
+          <a:p>
+            <a:r>
+              <a:rPr lang="en-US" altLang="zh-CN"/>
+              <a:t>HTTP Status Code</a:t>
+            </a:r>
+            <a:endParaRPr lang="en-US" altLang="zh-CN"/>
+          </a:p>
+        </p:txBody>
+      </p:sp>
+      <p:sp>
+        <p:nvSpPr>
+          <p:cNvPr id="4" name="文本框 3"/>
+          <p:cNvSpPr txBox="1"/>
+          <p:nvPr/>
+        </p:nvSpPr>
+        <p:spPr>
+          <a:xfrm>
+            <a:off x="723900" y="1078230"/>
+            <a:ext cx="3288665" cy="5692775"/>
+          </a:xfrm>
+          <a:prstGeom prst="rect">
+            <a:avLst/>
+          </a:prstGeom>
+          <a:noFill/>
+        </p:spPr>
+        <p:txBody>
+          <a:bodyPr wrap="square" rtlCol="0">
+            <a:spAutoFit/>
+          </a:bodyPr>
+          <a:p>
+            <a:r>
+              <a:rPr lang="zh-CN" altLang="en-US" sz="1400"/>
+              <a:t>    1×× Informational</a:t>
+            </a:r>
+            <a:endParaRPr lang="zh-CN" altLang="en-US" sz="1400"/>
+          </a:p>
+          <a:p>
+            <a:r>
+              <a:rPr lang="zh-CN" altLang="en-US" sz="1400"/>
+              <a:t>    100 Continue</a:t>
+            </a:r>
+            <a:endParaRPr lang="zh-CN" altLang="en-US" sz="1400"/>
+          </a:p>
+          <a:p>
+            <a:r>
+              <a:rPr lang="zh-CN" altLang="en-US" sz="1400"/>
+              <a:t>    101 Switching Protocols</a:t>
+            </a:r>
+            <a:endParaRPr lang="zh-CN" altLang="en-US" sz="1400"/>
+          </a:p>
+          <a:p>
+            <a:r>
+              <a:rPr lang="zh-CN" altLang="en-US" sz="1400"/>
+              <a:t>    102 Processing</a:t>
+            </a:r>
+            <a:endParaRPr lang="zh-CN" altLang="en-US" sz="1400"/>
+          </a:p>
+          <a:p>
+            <a:endParaRPr lang="zh-CN" altLang="en-US" sz="1400"/>
+          </a:p>
+          <a:p>
+            <a:r>
+              <a:rPr lang="zh-CN" altLang="en-US" sz="1400"/>
+              <a:t>    2×× Success</a:t>
+            </a:r>
+            <a:endParaRPr lang="zh-CN" altLang="en-US" sz="1400"/>
+          </a:p>
+          <a:p>
+            <a:r>
+              <a:rPr lang="zh-CN" altLang="en-US" sz="1400"/>
+              <a:t>    200 OK</a:t>
+            </a:r>
+            <a:endParaRPr lang="zh-CN" altLang="en-US" sz="1400"/>
+          </a:p>
+          <a:p>
+            <a:r>
+              <a:rPr lang="zh-CN" altLang="en-US" sz="1400"/>
+              <a:t>    201 Created</a:t>
+            </a:r>
+            <a:endParaRPr lang="zh-CN" altLang="en-US" sz="1400"/>
+          </a:p>
+          <a:p>
+            <a:r>
+              <a:rPr lang="zh-CN" altLang="en-US" sz="1400"/>
+              <a:t>    202 Accepted</a:t>
+            </a:r>
+            <a:endParaRPr lang="zh-CN" altLang="en-US" sz="1400"/>
+          </a:p>
+          <a:p>
+            <a:r>
+              <a:rPr lang="zh-CN" altLang="en-US" sz="1400"/>
+              <a:t>    203 Non-authoritative Information</a:t>
+            </a:r>
+            <a:endParaRPr lang="zh-CN" altLang="en-US" sz="1400"/>
+          </a:p>
+          <a:p>
+            <a:r>
+              <a:rPr lang="zh-CN" altLang="en-US" sz="1400"/>
+              <a:t>    204 No Content</a:t>
+            </a:r>
+            <a:endParaRPr lang="zh-CN" altLang="en-US" sz="1400"/>
+          </a:p>
+          <a:p>
+            <a:r>
+              <a:rPr lang="zh-CN" altLang="en-US" sz="1400"/>
+              <a:t>    205 Reset Content</a:t>
+            </a:r>
+            <a:endParaRPr lang="zh-CN" altLang="en-US" sz="1400"/>
+          </a:p>
+          <a:p>
+            <a:r>
+              <a:rPr lang="zh-CN" altLang="en-US" sz="1400"/>
+              <a:t>    206 Partial Content</a:t>
+            </a:r>
+            <a:endParaRPr lang="zh-CN" altLang="en-US" sz="1400"/>
+          </a:p>
+          <a:p>
+            <a:r>
+              <a:rPr lang="zh-CN" altLang="en-US" sz="1400"/>
+              <a:t>    207 Multi-Status</a:t>
+            </a:r>
+            <a:endParaRPr lang="zh-CN" altLang="en-US" sz="1400"/>
+          </a:p>
+          <a:p>
+            <a:r>
+              <a:rPr lang="zh-CN" altLang="en-US" sz="1400"/>
+              <a:t>    208 Already Reported</a:t>
+            </a:r>
+            <a:endParaRPr lang="zh-CN" altLang="en-US" sz="1400"/>
+          </a:p>
+          <a:p>
+            <a:r>
+              <a:rPr lang="zh-CN" altLang="en-US" sz="1400"/>
+              <a:t>    226 IM Used</a:t>
+            </a:r>
+            <a:endParaRPr lang="zh-CN" altLang="en-US" sz="1400"/>
+          </a:p>
+          <a:p>
+            <a:endParaRPr lang="zh-CN" altLang="en-US" sz="1400"/>
+          </a:p>
+          <a:p>
+            <a:r>
+              <a:rPr lang="zh-CN" altLang="en-US" sz="1400"/>
+              <a:t>    3×× Redirection</a:t>
+            </a:r>
+            <a:endParaRPr lang="zh-CN" altLang="en-US" sz="1400"/>
+          </a:p>
+          <a:p>
+            <a:r>
+              <a:rPr lang="zh-CN" altLang="en-US" sz="1400"/>
+              <a:t>    300 Multiple Choices</a:t>
+            </a:r>
+            <a:endParaRPr lang="zh-CN" altLang="en-US" sz="1400"/>
+          </a:p>
+          <a:p>
+            <a:r>
+              <a:rPr lang="zh-CN" altLang="en-US" sz="1400"/>
+              <a:t>    301 Moved Permanently</a:t>
+            </a:r>
+            <a:endParaRPr lang="zh-CN" altLang="en-US" sz="1400"/>
+          </a:p>
+          <a:p>
+            <a:r>
+              <a:rPr lang="zh-CN" altLang="en-US" sz="1400"/>
+              <a:t>    302 Found</a:t>
+            </a:r>
+            <a:endParaRPr lang="zh-CN" altLang="en-US" sz="1400"/>
+          </a:p>
+          <a:p>
+            <a:r>
+              <a:rPr lang="zh-CN" altLang="en-US" sz="1400"/>
+              <a:t>    303 See Other</a:t>
+            </a:r>
+            <a:endParaRPr lang="zh-CN" altLang="en-US" sz="1400"/>
+          </a:p>
+          <a:p>
+            <a:r>
+              <a:rPr lang="zh-CN" altLang="en-US" sz="1400"/>
+              <a:t>    304 Not Modified</a:t>
+            </a:r>
+            <a:endParaRPr lang="zh-CN" altLang="en-US" sz="1400"/>
+          </a:p>
+          <a:p>
+            <a:r>
+              <a:rPr lang="zh-CN" altLang="en-US" sz="1400"/>
+              <a:t>    305 Use Proxy</a:t>
+            </a:r>
+            <a:endParaRPr lang="zh-CN" altLang="en-US" sz="1400"/>
+          </a:p>
+          <a:p>
+            <a:r>
+              <a:rPr lang="zh-CN" altLang="en-US" sz="1400"/>
+              <a:t>    307 Temporary Redirect</a:t>
+            </a:r>
+            <a:endParaRPr lang="zh-CN" altLang="en-US" sz="1400"/>
+          </a:p>
+          <a:p>
+            <a:r>
+              <a:rPr lang="zh-CN" altLang="en-US" sz="1400"/>
+              <a:t>    308 Permanent Redirect</a:t>
+            </a:r>
+            <a:endParaRPr lang="zh-CN" altLang="en-US" sz="1400"/>
+          </a:p>
+        </p:txBody>
+      </p:sp>
+      <p:sp>
+        <p:nvSpPr>
+          <p:cNvPr id="5" name="文本框 4"/>
+          <p:cNvSpPr txBox="1"/>
+          <p:nvPr/>
+        </p:nvSpPr>
+        <p:spPr>
+          <a:xfrm>
+            <a:off x="4012565" y="1078230"/>
+            <a:ext cx="3818890" cy="5815965"/>
+          </a:xfrm>
+          <a:prstGeom prst="rect">
+            <a:avLst/>
+          </a:prstGeom>
+          <a:noFill/>
+        </p:spPr>
+        <p:txBody>
+          <a:bodyPr wrap="square" rtlCol="0">
+            <a:spAutoFit/>
+          </a:bodyPr>
+          <a:p>
+            <a:r>
+              <a:rPr lang="zh-CN" altLang="en-US" sz="1200">
+                <a:sym typeface="+mn-ea"/>
+              </a:rPr>
+              <a:t>    4×× Client Error</a:t>
+            </a:r>
+            <a:endParaRPr lang="zh-CN" altLang="en-US" sz="1200"/>
+          </a:p>
+          <a:p>
+            <a:r>
+              <a:rPr lang="zh-CN" altLang="en-US" sz="1200">
+                <a:sym typeface="+mn-ea"/>
+              </a:rPr>
+              <a:t>    400 Bad Request</a:t>
+            </a:r>
+            <a:endParaRPr lang="zh-CN" altLang="en-US" sz="1200"/>
+          </a:p>
+          <a:p>
+            <a:r>
+              <a:rPr lang="zh-CN" altLang="en-US" sz="1200">
+                <a:sym typeface="+mn-ea"/>
+              </a:rPr>
+              <a:t>    401 Unauthorized</a:t>
+            </a:r>
+            <a:endParaRPr lang="zh-CN" altLang="en-US" sz="1200"/>
+          </a:p>
+          <a:p>
+            <a:r>
+              <a:rPr lang="zh-CN" altLang="en-US" sz="1200">
+                <a:sym typeface="+mn-ea"/>
+              </a:rPr>
+              <a:t>    402 Payment Required</a:t>
+            </a:r>
+            <a:endParaRPr lang="zh-CN" altLang="en-US" sz="1200"/>
+          </a:p>
+          <a:p>
+            <a:r>
+              <a:rPr lang="zh-CN" altLang="en-US" sz="1200">
+                <a:sym typeface="+mn-ea"/>
+              </a:rPr>
+              <a:t>    403 Forbidden</a:t>
+            </a:r>
+            <a:endParaRPr lang="zh-CN" altLang="en-US" sz="1200"/>
+          </a:p>
+          <a:p>
+            <a:r>
+              <a:rPr lang="zh-CN" altLang="en-US" sz="1200">
+                <a:sym typeface="+mn-ea"/>
+              </a:rPr>
+              <a:t>    404 Not Found</a:t>
+            </a:r>
+            <a:endParaRPr lang="zh-CN" altLang="en-US" sz="1200"/>
+          </a:p>
+          <a:p>
+            <a:r>
+              <a:rPr lang="zh-CN" altLang="en-US" sz="1200">
+                <a:sym typeface="+mn-ea"/>
+              </a:rPr>
+              <a:t>    405 Method Not Allowed</a:t>
+            </a:r>
+            <a:endParaRPr lang="zh-CN" altLang="en-US" sz="1200"/>
+          </a:p>
+          <a:p>
+            <a:r>
+              <a:rPr lang="zh-CN" altLang="en-US" sz="1200">
+                <a:sym typeface="+mn-ea"/>
+              </a:rPr>
+              <a:t>    406 Not Acceptable</a:t>
+            </a:r>
+            <a:endParaRPr lang="zh-CN" altLang="en-US" sz="1200"/>
+          </a:p>
+          <a:p>
+            <a:r>
+              <a:rPr lang="zh-CN" altLang="en-US" sz="1200">
+                <a:sym typeface="+mn-ea"/>
+              </a:rPr>
+              <a:t>    407 Proxy Authentication Required</a:t>
+            </a:r>
+            <a:endParaRPr lang="zh-CN" altLang="en-US" sz="1200"/>
+          </a:p>
+          <a:p>
+            <a:r>
+              <a:rPr lang="zh-CN" altLang="en-US" sz="1200">
+                <a:sym typeface="+mn-ea"/>
+              </a:rPr>
+              <a:t>    408 Request Timeout</a:t>
+            </a:r>
+            <a:endParaRPr lang="zh-CN" altLang="en-US" sz="1200"/>
+          </a:p>
+          <a:p>
+            <a:r>
+              <a:rPr lang="zh-CN" altLang="en-US" sz="1200">
+                <a:sym typeface="+mn-ea"/>
+              </a:rPr>
+              <a:t>    409 Conflict</a:t>
+            </a:r>
+            <a:endParaRPr lang="zh-CN" altLang="en-US" sz="1200"/>
+          </a:p>
+          <a:p>
+            <a:r>
+              <a:rPr lang="zh-CN" altLang="en-US" sz="1200">
+                <a:sym typeface="+mn-ea"/>
+              </a:rPr>
+              <a:t>    410 Gone</a:t>
+            </a:r>
+            <a:endParaRPr lang="zh-CN" altLang="en-US" sz="1200"/>
+          </a:p>
+          <a:p>
+            <a:r>
+              <a:rPr lang="zh-CN" altLang="en-US" sz="1200">
+                <a:sym typeface="+mn-ea"/>
+              </a:rPr>
+              <a:t>    411 Length Required</a:t>
+            </a:r>
+            <a:endParaRPr lang="zh-CN" altLang="en-US" sz="1200"/>
+          </a:p>
+          <a:p>
+            <a:r>
+              <a:rPr lang="zh-CN" altLang="en-US" sz="1200">
+                <a:sym typeface="+mn-ea"/>
+              </a:rPr>
+              <a:t>    412 Precondition Failed</a:t>
+            </a:r>
+            <a:endParaRPr lang="zh-CN" altLang="en-US" sz="1200"/>
+          </a:p>
+          <a:p>
+            <a:r>
+              <a:rPr lang="zh-CN" altLang="en-US" sz="1200">
+                <a:sym typeface="+mn-ea"/>
+              </a:rPr>
+              <a:t>    413 Payload Too Large</a:t>
+            </a:r>
+            <a:endParaRPr lang="zh-CN" altLang="en-US" sz="1200"/>
+          </a:p>
+          <a:p>
+            <a:r>
+              <a:rPr lang="zh-CN" altLang="en-US" sz="1200">
+                <a:sym typeface="+mn-ea"/>
+              </a:rPr>
+              <a:t>    414 Request-URI Too Long</a:t>
+            </a:r>
+            <a:endParaRPr lang="zh-CN" altLang="en-US" sz="1200"/>
+          </a:p>
+          <a:p>
+            <a:r>
+              <a:rPr lang="zh-CN" altLang="en-US" sz="1200">
+                <a:sym typeface="+mn-ea"/>
+              </a:rPr>
+              <a:t>    415 Unsupported Media Type</a:t>
+            </a:r>
+            <a:endParaRPr lang="zh-CN" altLang="en-US" sz="1200"/>
+          </a:p>
+          <a:p>
+            <a:r>
+              <a:rPr lang="zh-CN" altLang="en-US" sz="1200">
+                <a:sym typeface="+mn-ea"/>
+              </a:rPr>
+              <a:t>    416 Requested Range Not Satisfiable</a:t>
+            </a:r>
+            <a:endParaRPr lang="zh-CN" altLang="en-US" sz="1200"/>
+          </a:p>
+          <a:p>
+            <a:r>
+              <a:rPr lang="zh-CN" altLang="en-US" sz="1200">
+                <a:sym typeface="+mn-ea"/>
+              </a:rPr>
+              <a:t>    417 Expectation Failed</a:t>
+            </a:r>
+            <a:endParaRPr lang="zh-CN" altLang="en-US" sz="1200"/>
+          </a:p>
+          <a:p>
+            <a:r>
+              <a:rPr lang="zh-CN" altLang="en-US" sz="1200">
+                <a:sym typeface="+mn-ea"/>
+              </a:rPr>
+              <a:t>    418 I'm a teapot</a:t>
+            </a:r>
+            <a:endParaRPr lang="zh-CN" altLang="en-US" sz="1200"/>
+          </a:p>
+          <a:p>
+            <a:r>
+              <a:rPr lang="zh-CN" altLang="en-US" sz="1200">
+                <a:sym typeface="+mn-ea"/>
+              </a:rPr>
+              <a:t>    421 Misdirected Request</a:t>
+            </a:r>
+            <a:endParaRPr lang="zh-CN" altLang="en-US" sz="1200"/>
+          </a:p>
+          <a:p>
+            <a:r>
+              <a:rPr lang="zh-CN" altLang="en-US" sz="1200">
+                <a:sym typeface="+mn-ea"/>
+              </a:rPr>
+              <a:t>    422 Unprocessable Entity</a:t>
+            </a:r>
+            <a:endParaRPr lang="zh-CN" altLang="en-US" sz="1200"/>
+          </a:p>
+          <a:p>
+            <a:r>
+              <a:rPr lang="zh-CN" altLang="en-US" sz="1200">
+                <a:sym typeface="+mn-ea"/>
+              </a:rPr>
+              <a:t>    423 Locked</a:t>
+            </a:r>
+            <a:endParaRPr lang="zh-CN" altLang="en-US" sz="1200"/>
+          </a:p>
+          <a:p>
+            <a:r>
+              <a:rPr lang="zh-CN" altLang="en-US" sz="1200">
+                <a:sym typeface="+mn-ea"/>
+              </a:rPr>
+              <a:t>    424 Failed Dependency</a:t>
+            </a:r>
+            <a:endParaRPr lang="zh-CN" altLang="en-US" sz="1200"/>
+          </a:p>
+          <a:p>
+            <a:r>
+              <a:rPr lang="zh-CN" altLang="en-US" sz="1200">
+                <a:sym typeface="+mn-ea"/>
+              </a:rPr>
+              <a:t>    426 Upgrade Required</a:t>
+            </a:r>
+            <a:endParaRPr lang="zh-CN" altLang="en-US" sz="1200"/>
+          </a:p>
+          <a:p>
+            <a:r>
+              <a:rPr lang="zh-CN" altLang="en-US" sz="1200">
+                <a:sym typeface="+mn-ea"/>
+              </a:rPr>
+              <a:t>    428 Precondition Required</a:t>
+            </a:r>
+            <a:endParaRPr lang="zh-CN" altLang="en-US" sz="1200"/>
+          </a:p>
+          <a:p>
+            <a:r>
+              <a:rPr lang="zh-CN" altLang="en-US" sz="1200">
+                <a:sym typeface="+mn-ea"/>
+              </a:rPr>
+              <a:t>    429 Too Many Requests</a:t>
+            </a:r>
+            <a:endParaRPr lang="zh-CN" altLang="en-US" sz="1200"/>
+          </a:p>
+          <a:p>
+            <a:r>
+              <a:rPr lang="zh-CN" altLang="en-US" sz="1200">
+                <a:sym typeface="+mn-ea"/>
+              </a:rPr>
+              <a:t>    431 Request Header Fields Too Large</a:t>
+            </a:r>
+            <a:endParaRPr lang="zh-CN" altLang="en-US" sz="1200"/>
+          </a:p>
+          <a:p>
+            <a:r>
+              <a:rPr lang="zh-CN" altLang="en-US" sz="1200">
+                <a:sym typeface="+mn-ea"/>
+              </a:rPr>
+              <a:t>    444 Connection Closed Without Response</a:t>
+            </a:r>
+            <a:endParaRPr lang="zh-CN" altLang="en-US" sz="1200"/>
+          </a:p>
+          <a:p>
+            <a:r>
+              <a:rPr lang="zh-CN" altLang="en-US" sz="1200">
+                <a:sym typeface="+mn-ea"/>
+              </a:rPr>
+              <a:t>    451 Unavailable For Legal Reasons</a:t>
+            </a:r>
+            <a:endParaRPr lang="zh-CN" altLang="en-US" sz="1200"/>
+          </a:p>
+          <a:p>
+            <a:r>
+              <a:rPr lang="zh-CN" altLang="en-US" sz="1200">
+                <a:sym typeface="+mn-ea"/>
+              </a:rPr>
+              <a:t>    499 Client Closed Request</a:t>
+            </a:r>
+            <a:endParaRPr lang="zh-CN" altLang="en-US" sz="1200">
+              <a:sym typeface="+mn-ea"/>
+            </a:endParaRPr>
+          </a:p>
+        </p:txBody>
+      </p:sp>
+      <p:sp>
+        <p:nvSpPr>
+          <p:cNvPr id="6" name="文本框 5"/>
+          <p:cNvSpPr txBox="1"/>
+          <p:nvPr/>
+        </p:nvSpPr>
+        <p:spPr>
+          <a:xfrm>
+            <a:off x="7995920" y="1042035"/>
+            <a:ext cx="3818890" cy="2676525"/>
+          </a:xfrm>
+          <a:prstGeom prst="rect">
+            <a:avLst/>
+          </a:prstGeom>
+          <a:noFill/>
+        </p:spPr>
+        <p:txBody>
+          <a:bodyPr wrap="square" rtlCol="0">
+            <a:spAutoFit/>
+          </a:bodyPr>
+          <a:p>
+            <a:endParaRPr lang="zh-CN" altLang="en-US" sz="1200"/>
+          </a:p>
+          <a:p>
+            <a:r>
+              <a:rPr lang="zh-CN" altLang="en-US" sz="1200">
+                <a:sym typeface="+mn-ea"/>
+              </a:rPr>
+              <a:t>    5×× Server Error</a:t>
+            </a:r>
+            <a:endParaRPr lang="zh-CN" altLang="en-US" sz="1200"/>
+          </a:p>
+          <a:p>
+            <a:r>
+              <a:rPr lang="zh-CN" altLang="en-US" sz="1200">
+                <a:sym typeface="+mn-ea"/>
+              </a:rPr>
+              <a:t>    500 Internal Server Error</a:t>
+            </a:r>
+            <a:endParaRPr lang="zh-CN" altLang="en-US" sz="1200"/>
+          </a:p>
+          <a:p>
+            <a:r>
+              <a:rPr lang="zh-CN" altLang="en-US" sz="1200">
+                <a:sym typeface="+mn-ea"/>
+              </a:rPr>
+              <a:t>    501 Not Implemented</a:t>
+            </a:r>
+            <a:endParaRPr lang="zh-CN" altLang="en-US" sz="1200"/>
+          </a:p>
+          <a:p>
+            <a:r>
+              <a:rPr lang="zh-CN" altLang="en-US" sz="1200">
+                <a:sym typeface="+mn-ea"/>
+              </a:rPr>
+              <a:t>    502 Bad Gateway</a:t>
+            </a:r>
+            <a:endParaRPr lang="zh-CN" altLang="en-US" sz="1200"/>
+          </a:p>
+          <a:p>
+            <a:r>
+              <a:rPr lang="zh-CN" altLang="en-US" sz="1200">
+                <a:sym typeface="+mn-ea"/>
+              </a:rPr>
+              <a:t>    503 Service Unavailable</a:t>
+            </a:r>
+            <a:endParaRPr lang="zh-CN" altLang="en-US" sz="1200"/>
+          </a:p>
+          <a:p>
+            <a:r>
+              <a:rPr lang="zh-CN" altLang="en-US" sz="1200">
+                <a:sym typeface="+mn-ea"/>
+              </a:rPr>
+              <a:t>    504 Gateway Timeout</a:t>
+            </a:r>
+            <a:endParaRPr lang="zh-CN" altLang="en-US" sz="1200"/>
+          </a:p>
+          <a:p>
+            <a:r>
+              <a:rPr lang="zh-CN" altLang="en-US" sz="1200">
+                <a:sym typeface="+mn-ea"/>
+              </a:rPr>
+              <a:t>    505 HTTP Version Not Supported</a:t>
+            </a:r>
+            <a:endParaRPr lang="zh-CN" altLang="en-US" sz="1200"/>
+          </a:p>
+          <a:p>
+            <a:r>
+              <a:rPr lang="zh-CN" altLang="en-US" sz="1200">
+                <a:sym typeface="+mn-ea"/>
+              </a:rPr>
+              <a:t>    506 Variant Also Negotiates</a:t>
+            </a:r>
+            <a:endParaRPr lang="zh-CN" altLang="en-US" sz="1200"/>
+          </a:p>
+          <a:p>
+            <a:r>
+              <a:rPr lang="zh-CN" altLang="en-US" sz="1200">
+                <a:sym typeface="+mn-ea"/>
+              </a:rPr>
+              <a:t>    507 Insufficient Storage</a:t>
+            </a:r>
+            <a:endParaRPr lang="zh-CN" altLang="en-US" sz="1200"/>
+          </a:p>
+          <a:p>
+            <a:r>
+              <a:rPr lang="zh-CN" altLang="en-US" sz="1200">
+                <a:sym typeface="+mn-ea"/>
+              </a:rPr>
+              <a:t>    508 Loop Detected</a:t>
+            </a:r>
+            <a:endParaRPr lang="zh-CN" altLang="en-US" sz="1200"/>
+          </a:p>
+          <a:p>
+            <a:r>
+              <a:rPr lang="zh-CN" altLang="en-US" sz="1200">
+                <a:sym typeface="+mn-ea"/>
+              </a:rPr>
+              <a:t>    510 Not Extended</a:t>
+            </a:r>
+            <a:endParaRPr lang="zh-CN" altLang="en-US" sz="1200"/>
+          </a:p>
+          <a:p>
+            <a:r>
+              <a:rPr lang="zh-CN" altLang="en-US" sz="1200">
+                <a:sym typeface="+mn-ea"/>
+              </a:rPr>
+              <a:t>    511 Network Authentication Required</a:t>
+            </a:r>
+            <a:endParaRPr lang="zh-CN" altLang="en-US" sz="1200"/>
+          </a:p>
+          <a:p>
+            <a:r>
+              <a:rPr lang="zh-CN" altLang="en-US" sz="1200">
+                <a:sym typeface="+mn-ea"/>
+              </a:rPr>
+              <a:t>    599 Network Connect Timeout Error</a:t>
+            </a:r>
+            <a:endParaRPr lang="zh-CN" altLang="en-US" sz="1200">
+              <a:sym typeface="+mn-ea"/>
+            </a:endParaRPr>
+          </a:p>
+        </p:txBody>
+      </p:sp>
+    </p:spTree>
+    <p:custDataLst>
+      <p:tags r:id="rId1"/>
+    </p:custDataLst>
+  </p:cSld>
+  <p:clrMapOvr>
+    <a:masterClrMapping/>
+  </p:clrMapOvr>
+</p:sld>
+</file>
+
+<file path=ppt/slides/slide20.xml><?xml version="1.0" encoding="utf-8"?>
+<p:sld xmlns:a="http://schemas.openxmlformats.org/drawingml/2006/main" xmlns:r="http://schemas.openxmlformats.org/officeDocument/2006/relationships" xmlns:p="http://schemas.openxmlformats.org/presentationml/2006/main">
+  <p:cSld>
+    <p:spTree>
+      <p:nvGrpSpPr>
+        <p:cNvPr id="1" name=""/>
+        <p:cNvGrpSpPr/>
+        <p:nvPr/>
+      </p:nvGrpSpPr>
+      <p:grpSpPr/>
+      <p:sp>
+        <p:nvSpPr>
+          <p:cNvPr id="4" name="标题 3"/>
+          <p:cNvSpPr>
+            <a:spLocks noGrp="1"/>
+          </p:cNvSpPr>
+          <p:nvPr>
+            <p:ph type="title"/>
+          </p:nvPr>
+        </p:nvSpPr>
+        <p:spPr/>
+        <p:txBody>
+          <a:bodyPr/>
+          <a:p>
+            <a:r>
+              <a:rPr lang="en-US" altLang="zh-CN"/>
+              <a:t>Network Protocols</a:t>
+            </a:r>
+            <a:endParaRPr lang="en-US" altLang="zh-CN"/>
+          </a:p>
+        </p:txBody>
+      </p:sp>
+      <p:sp>
+        <p:nvSpPr>
+          <p:cNvPr id="5" name="文本占位符 4"/>
+          <p:cNvSpPr>
+            <a:spLocks noGrp="1"/>
+          </p:cNvSpPr>
+          <p:nvPr>
+            <p:ph type="body" idx="1"/>
+          </p:nvPr>
+        </p:nvSpPr>
+        <p:spPr/>
+        <p:txBody>
+          <a:bodyPr/>
+          <a:p>
+            <a:endParaRPr lang="zh-CN" altLang="en-US"/>
+          </a:p>
+        </p:txBody>
+      </p:sp>
+    </p:spTree>
+    <p:custDataLst>
+      <p:tags r:id="rId1"/>
+    </p:custDataLst>
+  </p:cSld>
+  <p:clrMapOvr>
+    <a:masterClrMapping/>
+  </p:clrMapOvr>
+</p:sld>
+</file>
+
+<file path=ppt/slides/slide21.xml><?xml version="1.0" encoding="utf-8"?>
+<p:sld xmlns:a="http://schemas.openxmlformats.org/drawingml/2006/main" xmlns:r="http://schemas.openxmlformats.org/officeDocument/2006/relationships" xmlns:p="http://schemas.openxmlformats.org/presentationml/2006/main">
+  <p:cSld>
+    <p:spTree>
+      <p:nvGrpSpPr>
+        <p:cNvPr id="1" name=""/>
+        <p:cNvGrpSpPr/>
+        <p:nvPr/>
+      </p:nvGrpSpPr>
+      <p:grpSpPr/>
+      <p:sp>
+        <p:nvSpPr>
+          <p:cNvPr id="2" name="标题 1"/>
+          <p:cNvSpPr>
+            <a:spLocks noGrp="1"/>
+          </p:cNvSpPr>
+          <p:nvPr>
+            <p:ph type="title"/>
+          </p:nvPr>
+        </p:nvSpPr>
+        <p:spPr/>
+        <p:txBody>
+          <a:bodyPr/>
+          <a:p>
+            <a:r>
+              <a:rPr lang="en-US" altLang="zh-CN"/>
+              <a:t>mDNS</a:t>
+            </a:r>
+            <a:endParaRPr lang="en-US" altLang="zh-CN"/>
+          </a:p>
+        </p:txBody>
+      </p:sp>
+      <p:sp>
+        <p:nvSpPr>
+          <p:cNvPr id="3" name="内容占位符 2"/>
+          <p:cNvSpPr>
+            <a:spLocks noGrp="1"/>
+          </p:cNvSpPr>
+          <p:nvPr>
+            <p:ph idx="1"/>
+          </p:nvPr>
+        </p:nvSpPr>
+        <p:spPr>
+          <a:xfrm>
+            <a:off x="838200" y="1211580"/>
+            <a:ext cx="5516245" cy="4549140"/>
+          </a:xfrm>
+        </p:spPr>
+        <p:txBody>
+          <a:bodyPr>
+            <a:normAutofit fontScale="80000"/>
+          </a:bodyPr>
+          <a:p>
+            <a:r>
+              <a:rPr lang="en-US" altLang="zh-CN"/>
+              <a:t>References</a:t>
+            </a:r>
+            <a:endParaRPr lang="en-US" altLang="zh-CN"/>
+          </a:p>
+          <a:p>
+            <a:pPr lvl="1"/>
+            <a:r>
+              <a:rPr lang="en-US" altLang="zh-CN"/>
+              <a:t>https://blog.alexsun.top/vuepress-network-notes/application-layer-protocol/dns/mdns.html</a:t>
+            </a:r>
+            <a:endParaRPr lang="en-US" altLang="zh-CN"/>
+          </a:p>
+          <a:p>
+            <a:pPr lvl="1"/>
+            <a:r>
+              <a:rPr lang="en-US" altLang="zh-CN"/>
+              <a:t>https://baike.baidu.com/item/mdns/7544078</a:t>
+            </a:r>
+            <a:endParaRPr lang="en-US" altLang="zh-CN"/>
+          </a:p>
+          <a:p>
+            <a:pPr lvl="0"/>
+            <a:r>
+              <a:rPr lang="zh-CN" altLang="en-US"/>
+              <a:t>服务发现</a:t>
+            </a:r>
+            <a:endParaRPr lang="zh-CN" altLang="en-US"/>
+          </a:p>
+          <a:p>
+            <a:pPr lvl="1"/>
+            <a:r>
+              <a:rPr lang="zh-CN" altLang="en-US"/>
+              <a:t>设备</a:t>
+            </a:r>
+            <a:r>
+              <a:rPr lang="en-US" altLang="zh-CN"/>
+              <a:t>B</a:t>
+            </a:r>
+            <a:r>
+              <a:rPr lang="zh-CN" altLang="en-US"/>
+              <a:t>广播自己提供的服务（如</a:t>
+            </a:r>
+            <a:r>
+              <a:rPr lang="en-US" altLang="zh-CN"/>
+              <a:t> _http._tcp.local</a:t>
+            </a:r>
+            <a:r>
+              <a:rPr lang="zh-CN" altLang="en-US"/>
+              <a:t>）。</a:t>
+            </a:r>
+            <a:endParaRPr lang="zh-CN" altLang="en-US"/>
+          </a:p>
+          <a:p>
+            <a:pPr lvl="1"/>
+            <a:r>
+              <a:rPr lang="zh-CN" altLang="en-US"/>
+              <a:t>设备</a:t>
+            </a:r>
+            <a:r>
+              <a:rPr lang="en-US" altLang="zh-CN"/>
+              <a:t>A</a:t>
+            </a:r>
+            <a:r>
+              <a:rPr lang="zh-CN" altLang="en-US"/>
+              <a:t>发送服务查询请求。</a:t>
+            </a:r>
+            <a:endParaRPr lang="zh-CN" altLang="en-US"/>
+          </a:p>
+          <a:p>
+            <a:pPr lvl="1"/>
+            <a:r>
+              <a:rPr lang="zh-CN" altLang="en-US"/>
+              <a:t>设备</a:t>
+            </a:r>
+            <a:r>
+              <a:rPr lang="en-US" altLang="zh-CN"/>
+              <a:t>B</a:t>
+            </a:r>
+            <a:r>
+              <a:rPr lang="zh-CN" altLang="en-US"/>
+              <a:t>响应，提供服务的详细信息（如</a:t>
+            </a:r>
+            <a:r>
+              <a:rPr lang="en-US" altLang="zh-CN"/>
+              <a:t>IP</a:t>
+            </a:r>
+            <a:r>
+              <a:rPr lang="zh-CN" altLang="en-US"/>
+              <a:t>地址、端口号等）。</a:t>
+            </a:r>
+            <a:endParaRPr lang="zh-CN" altLang="en-US"/>
+          </a:p>
+          <a:p>
+            <a:pPr lvl="0"/>
+            <a:r>
+              <a:rPr lang="zh-CN" altLang="en-US"/>
+              <a:t>嵌入式设备通常使用轻量级的</a:t>
+            </a:r>
+            <a:r>
+              <a:rPr lang="en-US" altLang="zh-CN"/>
+              <a:t> mDNS </a:t>
+            </a:r>
+            <a:r>
+              <a:rPr lang="zh-CN" altLang="en-US"/>
+              <a:t>实现库</a:t>
+            </a:r>
+            <a:endParaRPr lang="zh-CN" altLang="en-US"/>
+          </a:p>
+          <a:p>
+            <a:pPr lvl="1"/>
+            <a:r>
+              <a:rPr lang="en-US" altLang="zh-CN"/>
+              <a:t>Avahi</a:t>
+            </a:r>
+            <a:r>
+              <a:rPr lang="zh-CN" altLang="en-US"/>
+              <a:t>：</a:t>
+            </a:r>
+            <a:r>
+              <a:rPr lang="en-US" altLang="zh-CN"/>
+              <a:t>Linux </a:t>
+            </a:r>
+            <a:r>
+              <a:rPr lang="zh-CN" altLang="en-US"/>
+              <a:t>平台常用的</a:t>
+            </a:r>
+            <a:r>
+              <a:rPr lang="en-US" altLang="zh-CN"/>
+              <a:t> mDNS </a:t>
+            </a:r>
+            <a:r>
+              <a:rPr lang="zh-CN" altLang="en-US"/>
+              <a:t>实现。</a:t>
+            </a:r>
+            <a:endParaRPr lang="zh-CN" altLang="en-US"/>
+          </a:p>
+          <a:p>
+            <a:pPr lvl="1"/>
+            <a:r>
+              <a:rPr lang="en-US" altLang="zh-CN"/>
+              <a:t>Apple Bonjour</a:t>
+            </a:r>
+            <a:r>
+              <a:rPr lang="zh-CN" altLang="en-US"/>
+              <a:t>：</a:t>
+            </a:r>
+            <a:r>
+              <a:rPr lang="en-US" altLang="zh-CN"/>
+              <a:t>macOS </a:t>
+            </a:r>
+            <a:r>
+              <a:rPr lang="zh-CN" altLang="en-US"/>
+              <a:t>和</a:t>
+            </a:r>
+            <a:r>
+              <a:rPr lang="en-US" altLang="zh-CN"/>
+              <a:t> Windows </a:t>
+            </a:r>
+            <a:r>
+              <a:rPr lang="zh-CN" altLang="en-US"/>
+              <a:t>平台的支持。</a:t>
+            </a:r>
+            <a:endParaRPr lang="zh-CN" altLang="en-US"/>
+          </a:p>
+          <a:p>
+            <a:pPr lvl="1"/>
+            <a:r>
+              <a:rPr lang="en-US" altLang="zh-CN"/>
+              <a:t>ESP-IDF</a:t>
+            </a:r>
+            <a:r>
+              <a:rPr lang="zh-CN" altLang="en-US"/>
+              <a:t>：</a:t>
+            </a:r>
+            <a:r>
+              <a:rPr lang="en-US" altLang="zh-CN"/>
+              <a:t>ESP32 </a:t>
+            </a:r>
+            <a:r>
+              <a:rPr lang="zh-CN" altLang="en-US"/>
+              <a:t>开发框架中集成了</a:t>
+            </a:r>
+            <a:r>
+              <a:rPr lang="en-US" altLang="zh-CN"/>
+              <a:t> mDNS </a:t>
+            </a:r>
+            <a:r>
+              <a:rPr lang="zh-CN" altLang="en-US"/>
+              <a:t>功能。</a:t>
+            </a:r>
+            <a:endParaRPr lang="zh-CN" altLang="en-US"/>
+          </a:p>
+          <a:p>
+            <a:pPr lvl="0"/>
+            <a:endParaRPr lang="en-US" altLang="zh-CN"/>
+          </a:p>
+        </p:txBody>
+      </p:sp>
+    </p:spTree>
+    <p:custDataLst>
+      <p:tags r:id="rId1"/>
+    </p:custDataLst>
+  </p:cSld>
+  <p:clrMapOvr>
+    <a:masterClrMapping/>
+  </p:clrMapOvr>
+</p:sld>
+</file>
+
+<file path=ppt/slides/slide22.xml><?xml version="1.0" encoding="utf-8"?>
+<p:sld xmlns:a="http://schemas.openxmlformats.org/drawingml/2006/main" xmlns:r="http://schemas.openxmlformats.org/officeDocument/2006/relationships" xmlns:p="http://schemas.openxmlformats.org/presentationml/2006/main">
+  <p:cSld>
+    <p:spTree>
+      <p:nvGrpSpPr>
+        <p:cNvPr id="1" name=""/>
+        <p:cNvGrpSpPr/>
+        <p:nvPr/>
+      </p:nvGrpSpPr>
+      <p:grpSpPr/>
+      <p:sp>
+        <p:nvSpPr>
+          <p:cNvPr id="4" name="标题 3"/>
+          <p:cNvSpPr>
+            <a:spLocks noGrp="1"/>
+          </p:cNvSpPr>
+          <p:nvPr>
+            <p:ph type="title"/>
+          </p:nvPr>
+        </p:nvSpPr>
+        <p:spPr/>
+        <p:txBody>
+          <a:bodyPr/>
+          <a:p>
+            <a:r>
+              <a:rPr lang="en-US" altLang="zh-CN"/>
+              <a:t>ClearPath</a:t>
+            </a:r>
+            <a:endParaRPr lang="en-US" altLang="zh-CN"/>
+          </a:p>
+        </p:txBody>
+      </p:sp>
+      <p:sp>
+        <p:nvSpPr>
+          <p:cNvPr id="5" name="文本占位符 4"/>
+          <p:cNvSpPr>
+            <a:spLocks noGrp="1"/>
+          </p:cNvSpPr>
+          <p:nvPr>
+            <p:ph type="body" idx="1"/>
+          </p:nvPr>
+        </p:nvSpPr>
+        <p:spPr/>
+        <p:txBody>
+          <a:bodyPr/>
+          <a:p>
+            <a:endParaRPr lang="zh-CN" altLang="en-US"/>
+          </a:p>
+        </p:txBody>
+      </p:sp>
+    </p:spTree>
+    <p:custDataLst>
+      <p:tags r:id="rId1"/>
+    </p:custDataLst>
+  </p:cSld>
+  <p:clrMapOvr>
+    <a:masterClrMapping/>
+  </p:clrMapOvr>
+</p:sld>
+</file>
+
+<file path=ppt/slides/slide23.xml><?xml version="1.0" encoding="utf-8"?>
+<p:sld xmlns:a="http://schemas.openxmlformats.org/drawingml/2006/main" xmlns:r="http://schemas.openxmlformats.org/officeDocument/2006/relationships" xmlns:p="http://schemas.openxmlformats.org/presentationml/2006/main">
+  <p:cSld>
+    <p:spTree>
+      <p:nvGrpSpPr>
+        <p:cNvPr id="1" name=""/>
+        <p:cNvGrpSpPr/>
+        <p:nvPr/>
+      </p:nvGrpSpPr>
+      <p:grpSpPr/>
+      <p:sp>
+        <p:nvSpPr>
+          <p:cNvPr id="4" name="标题 3"/>
+          <p:cNvSpPr>
+            <a:spLocks noGrp="1"/>
+          </p:cNvSpPr>
+          <p:nvPr>
+            <p:ph type="title"/>
+          </p:nvPr>
+        </p:nvSpPr>
+        <p:spPr/>
+        <p:txBody>
+          <a:bodyPr/>
+          <a:p>
+            <a:r>
+              <a:rPr lang="en-US" altLang="zh-CN"/>
+              <a:t>References</a:t>
+            </a:r>
+            <a:endParaRPr lang="en-US" altLang="zh-CN"/>
+          </a:p>
+        </p:txBody>
+      </p:sp>
+      <p:sp>
+        <p:nvSpPr>
+          <p:cNvPr id="5" name="内容占位符 4"/>
+          <p:cNvSpPr>
+            <a:spLocks noGrp="1"/>
+          </p:cNvSpPr>
+          <p:nvPr>
+            <p:ph idx="1"/>
+          </p:nvPr>
+        </p:nvSpPr>
+        <p:spPr/>
+        <p:txBody>
+          <a:bodyPr/>
+          <a:p>
+            <a:r>
+              <a:rPr lang="zh-CN" altLang="en-US"/>
+              <a:t>https://www.arubanetworks.com/assets/so/SO_ClearPass.pdf</a:t>
+            </a:r>
+            <a:endParaRPr lang="zh-CN" altLang="en-US"/>
+          </a:p>
+          <a:p>
+            <a:r>
+              <a:rPr lang="zh-CN" altLang="en-US"/>
+              <a:t>https://www.arubanetworks.com/products/security/network-access-control/secure-access/</a:t>
+            </a:r>
+            <a:endParaRPr lang="zh-CN" altLang="en-US"/>
+          </a:p>
+        </p:txBody>
+      </p:sp>
+    </p:spTree>
+    <p:custDataLst>
+      <p:tags r:id="rId1"/>
+    </p:custDataLst>
+  </p:cSld>
+  <p:clrMapOvr>
+    <a:masterClrMapping/>
+  </p:clrMapOvr>
+</p:sld>
+</file>
+
+<file path=ppt/slides/slide24.xml><?xml version="1.0" encoding="utf-8"?>
 <p:sld xmlns:a="http://schemas.openxmlformats.org/drawingml/2006/main" xmlns:r="http://schemas.openxmlformats.org/officeDocument/2006/relationships" xmlns:p="http://schemas.openxmlformats.org/presentationml/2006/main">
   <p:cSld>
     <p:spTree>
@@ -5147,7 +7495,7 @@
 </p:sld>
 </file>
 
-<file path=ppt/slides/slide2.xml><?xml version="1.0" encoding="utf-8"?>
+<file path=ppt/slides/slide25.xml><?xml version="1.0" encoding="utf-8"?>
 <p:sld xmlns:a="http://schemas.openxmlformats.org/drawingml/2006/main" xmlns:r="http://schemas.openxmlformats.org/officeDocument/2006/relationships" xmlns:p="http://schemas.openxmlformats.org/presentationml/2006/main">
   <p:cSld>
     <p:spTree>
@@ -5159,7 +7507,7 @@
       <p:grpSpPr/>
       <p:sp>
         <p:nvSpPr>
-          <p:cNvPr id="2" name="标题 1"/>
+          <p:cNvPr id="4" name="标题 3"/>
           <p:cNvSpPr>
             <a:spLocks noGrp="1"/>
           </p:cNvSpPr>
@@ -5173,652 +7521,27 @@
           <a:p>
             <a:r>
               <a:rPr lang="en-US" altLang="zh-CN"/>
-              <a:t>HTTP Status Code</a:t>
-            </a:r>
-            <a:endParaRPr lang="en-US" altLang="zh-CN"/>
-          </a:p>
-        </p:txBody>
-      </p:sp>
-      <p:sp>
-        <p:nvSpPr>
-          <p:cNvPr id="4" name="文本框 3"/>
-          <p:cNvSpPr txBox="1"/>
-          <p:nvPr/>
-        </p:nvSpPr>
-        <p:spPr>
-          <a:xfrm>
-            <a:off x="723900" y="1078230"/>
-            <a:ext cx="3288665" cy="5692775"/>
-          </a:xfrm>
-          <a:prstGeom prst="rect">
-            <a:avLst/>
-          </a:prstGeom>
-          <a:noFill/>
-        </p:spPr>
-        <p:txBody>
-          <a:bodyPr wrap="square" rtlCol="0">
-            <a:spAutoFit/>
-          </a:bodyPr>
-          <a:p>
-            <a:r>
-              <a:rPr lang="zh-CN" altLang="en-US" sz="1400"/>
-              <a:t>    1×× Informational</a:t>
-            </a:r>
-            <a:endParaRPr lang="zh-CN" altLang="en-US" sz="1400"/>
-          </a:p>
-          <a:p>
-            <a:r>
-              <a:rPr lang="zh-CN" altLang="en-US" sz="1400"/>
-              <a:t>    100 Continue</a:t>
-            </a:r>
-            <a:endParaRPr lang="zh-CN" altLang="en-US" sz="1400"/>
-          </a:p>
-          <a:p>
-            <a:r>
-              <a:rPr lang="zh-CN" altLang="en-US" sz="1400"/>
-              <a:t>    101 Switching Protocols</a:t>
-            </a:r>
-            <a:endParaRPr lang="zh-CN" altLang="en-US" sz="1400"/>
-          </a:p>
-          <a:p>
-            <a:r>
-              <a:rPr lang="zh-CN" altLang="en-US" sz="1400"/>
-              <a:t>    102 Processing</a:t>
-            </a:r>
-            <a:endParaRPr lang="zh-CN" altLang="en-US" sz="1400"/>
-          </a:p>
-          <a:p>
-            <a:endParaRPr lang="zh-CN" altLang="en-US" sz="1400"/>
-          </a:p>
-          <a:p>
-            <a:r>
-              <a:rPr lang="zh-CN" altLang="en-US" sz="1400"/>
-              <a:t>    2×× Success</a:t>
-            </a:r>
-            <a:endParaRPr lang="zh-CN" altLang="en-US" sz="1400"/>
-          </a:p>
-          <a:p>
-            <a:r>
-              <a:rPr lang="zh-CN" altLang="en-US" sz="1400"/>
-              <a:t>    200 OK</a:t>
-            </a:r>
-            <a:endParaRPr lang="zh-CN" altLang="en-US" sz="1400"/>
-          </a:p>
-          <a:p>
-            <a:r>
-              <a:rPr lang="zh-CN" altLang="en-US" sz="1400"/>
-              <a:t>    201 Created</a:t>
-            </a:r>
-            <a:endParaRPr lang="zh-CN" altLang="en-US" sz="1400"/>
-          </a:p>
-          <a:p>
-            <a:r>
-              <a:rPr lang="zh-CN" altLang="en-US" sz="1400"/>
-              <a:t>    202 Accepted</a:t>
-            </a:r>
-            <a:endParaRPr lang="zh-CN" altLang="en-US" sz="1400"/>
-          </a:p>
-          <a:p>
-            <a:r>
-              <a:rPr lang="zh-CN" altLang="en-US" sz="1400"/>
-              <a:t>    203 Non-authoritative Information</a:t>
-            </a:r>
-            <a:endParaRPr lang="zh-CN" altLang="en-US" sz="1400"/>
-          </a:p>
-          <a:p>
-            <a:r>
-              <a:rPr lang="zh-CN" altLang="en-US" sz="1400"/>
-              <a:t>    204 No Content</a:t>
-            </a:r>
-            <a:endParaRPr lang="zh-CN" altLang="en-US" sz="1400"/>
-          </a:p>
-          <a:p>
-            <a:r>
-              <a:rPr lang="zh-CN" altLang="en-US" sz="1400"/>
-              <a:t>    205 Reset Content</a:t>
-            </a:r>
-            <a:endParaRPr lang="zh-CN" altLang="en-US" sz="1400"/>
-          </a:p>
-          <a:p>
-            <a:r>
-              <a:rPr lang="zh-CN" altLang="en-US" sz="1400"/>
-              <a:t>    206 Partial Content</a:t>
-            </a:r>
-            <a:endParaRPr lang="zh-CN" altLang="en-US" sz="1400"/>
-          </a:p>
-          <a:p>
-            <a:r>
-              <a:rPr lang="zh-CN" altLang="en-US" sz="1400"/>
-              <a:t>    207 Multi-Status</a:t>
-            </a:r>
-            <a:endParaRPr lang="zh-CN" altLang="en-US" sz="1400"/>
-          </a:p>
-          <a:p>
-            <a:r>
-              <a:rPr lang="zh-CN" altLang="en-US" sz="1400"/>
-              <a:t>    208 Already Reported</a:t>
-            </a:r>
-            <a:endParaRPr lang="zh-CN" altLang="en-US" sz="1400"/>
-          </a:p>
-          <a:p>
-            <a:r>
-              <a:rPr lang="zh-CN" altLang="en-US" sz="1400"/>
-              <a:t>    226 IM Used</a:t>
-            </a:r>
-            <a:endParaRPr lang="zh-CN" altLang="en-US" sz="1400"/>
-          </a:p>
-          <a:p>
-            <a:endParaRPr lang="zh-CN" altLang="en-US" sz="1400"/>
-          </a:p>
-          <a:p>
-            <a:r>
-              <a:rPr lang="zh-CN" altLang="en-US" sz="1400"/>
-              <a:t>    3×× Redirection</a:t>
-            </a:r>
-            <a:endParaRPr lang="zh-CN" altLang="en-US" sz="1400"/>
-          </a:p>
-          <a:p>
-            <a:r>
-              <a:rPr lang="zh-CN" altLang="en-US" sz="1400"/>
-              <a:t>    300 Multiple Choices</a:t>
-            </a:r>
-            <a:endParaRPr lang="zh-CN" altLang="en-US" sz="1400"/>
-          </a:p>
-          <a:p>
-            <a:r>
-              <a:rPr lang="zh-CN" altLang="en-US" sz="1400"/>
-              <a:t>    301 Moved Permanently</a:t>
-            </a:r>
-            <a:endParaRPr lang="zh-CN" altLang="en-US" sz="1400"/>
-          </a:p>
-          <a:p>
-            <a:r>
-              <a:rPr lang="zh-CN" altLang="en-US" sz="1400"/>
-              <a:t>    302 Found</a:t>
-            </a:r>
-            <a:endParaRPr lang="zh-CN" altLang="en-US" sz="1400"/>
-          </a:p>
-          <a:p>
-            <a:r>
-              <a:rPr lang="zh-CN" altLang="en-US" sz="1400"/>
-              <a:t>    303 See Other</a:t>
-            </a:r>
-            <a:endParaRPr lang="zh-CN" altLang="en-US" sz="1400"/>
-          </a:p>
-          <a:p>
-            <a:r>
-              <a:rPr lang="zh-CN" altLang="en-US" sz="1400"/>
-              <a:t>    304 Not Modified</a:t>
-            </a:r>
-            <a:endParaRPr lang="zh-CN" altLang="en-US" sz="1400"/>
-          </a:p>
-          <a:p>
-            <a:r>
-              <a:rPr lang="zh-CN" altLang="en-US" sz="1400"/>
-              <a:t>    305 Use Proxy</a:t>
-            </a:r>
-            <a:endParaRPr lang="zh-CN" altLang="en-US" sz="1400"/>
-          </a:p>
-          <a:p>
-            <a:r>
-              <a:rPr lang="zh-CN" altLang="en-US" sz="1400"/>
-              <a:t>    307 Temporary Redirect</a:t>
-            </a:r>
-            <a:endParaRPr lang="zh-CN" altLang="en-US" sz="1400"/>
-          </a:p>
-          <a:p>
-            <a:r>
-              <a:rPr lang="zh-CN" altLang="en-US" sz="1400"/>
-              <a:t>    308 Permanent Redirect</a:t>
-            </a:r>
-            <a:endParaRPr lang="zh-CN" altLang="en-US" sz="1400"/>
-          </a:p>
-        </p:txBody>
-      </p:sp>
-      <p:sp>
-        <p:nvSpPr>
-          <p:cNvPr id="5" name="文本框 4"/>
-          <p:cNvSpPr txBox="1"/>
-          <p:nvPr/>
-        </p:nvSpPr>
-        <p:spPr>
-          <a:xfrm>
-            <a:off x="4012565" y="1078230"/>
-            <a:ext cx="3818890" cy="5815965"/>
-          </a:xfrm>
-          <a:prstGeom prst="rect">
-            <a:avLst/>
-          </a:prstGeom>
-          <a:noFill/>
-        </p:spPr>
-        <p:txBody>
-          <a:bodyPr wrap="square" rtlCol="0">
-            <a:spAutoFit/>
-          </a:bodyPr>
-          <a:p>
-            <a:r>
-              <a:rPr lang="zh-CN" altLang="en-US" sz="1200">
-                <a:sym typeface="+mn-ea"/>
-              </a:rPr>
-              <a:t>    4×× Client Error</a:t>
-            </a:r>
-            <a:endParaRPr lang="zh-CN" altLang="en-US" sz="1200"/>
-          </a:p>
-          <a:p>
-            <a:r>
-              <a:rPr lang="zh-CN" altLang="en-US" sz="1200">
-                <a:sym typeface="+mn-ea"/>
-              </a:rPr>
-              <a:t>    400 Bad Request</a:t>
-            </a:r>
-            <a:endParaRPr lang="zh-CN" altLang="en-US" sz="1200"/>
-          </a:p>
-          <a:p>
-            <a:r>
-              <a:rPr lang="zh-CN" altLang="en-US" sz="1200">
-                <a:sym typeface="+mn-ea"/>
-              </a:rPr>
-              <a:t>    401 Unauthorized</a:t>
-            </a:r>
-            <a:endParaRPr lang="zh-CN" altLang="en-US" sz="1200"/>
-          </a:p>
-          <a:p>
-            <a:r>
-              <a:rPr lang="zh-CN" altLang="en-US" sz="1200">
-                <a:sym typeface="+mn-ea"/>
-              </a:rPr>
-              <a:t>    402 Payment Required</a:t>
-            </a:r>
-            <a:endParaRPr lang="zh-CN" altLang="en-US" sz="1200"/>
-          </a:p>
-          <a:p>
-            <a:r>
-              <a:rPr lang="zh-CN" altLang="en-US" sz="1200">
-                <a:sym typeface="+mn-ea"/>
-              </a:rPr>
-              <a:t>    403 Forbidden</a:t>
-            </a:r>
-            <a:endParaRPr lang="zh-CN" altLang="en-US" sz="1200"/>
-          </a:p>
-          <a:p>
-            <a:r>
-              <a:rPr lang="zh-CN" altLang="en-US" sz="1200">
-                <a:sym typeface="+mn-ea"/>
-              </a:rPr>
-              <a:t>    404 Not Found</a:t>
-            </a:r>
-            <a:endParaRPr lang="zh-CN" altLang="en-US" sz="1200"/>
-          </a:p>
-          <a:p>
-            <a:r>
-              <a:rPr lang="zh-CN" altLang="en-US" sz="1200">
-                <a:sym typeface="+mn-ea"/>
-              </a:rPr>
-              <a:t>    405 Method Not Allowed</a:t>
-            </a:r>
-            <a:endParaRPr lang="zh-CN" altLang="en-US" sz="1200"/>
-          </a:p>
-          <a:p>
-            <a:r>
-              <a:rPr lang="zh-CN" altLang="en-US" sz="1200">
-                <a:sym typeface="+mn-ea"/>
-              </a:rPr>
-              <a:t>    406 Not Acceptable</a:t>
-            </a:r>
-            <a:endParaRPr lang="zh-CN" altLang="en-US" sz="1200"/>
-          </a:p>
-          <a:p>
-            <a:r>
-              <a:rPr lang="zh-CN" altLang="en-US" sz="1200">
-                <a:sym typeface="+mn-ea"/>
-              </a:rPr>
-              <a:t>    407 Proxy Authentication Required</a:t>
-            </a:r>
-            <a:endParaRPr lang="zh-CN" altLang="en-US" sz="1200"/>
-          </a:p>
-          <a:p>
-            <a:r>
-              <a:rPr lang="zh-CN" altLang="en-US" sz="1200">
-                <a:sym typeface="+mn-ea"/>
-              </a:rPr>
-              <a:t>    408 Request Timeout</a:t>
-            </a:r>
-            <a:endParaRPr lang="zh-CN" altLang="en-US" sz="1200"/>
-          </a:p>
-          <a:p>
-            <a:r>
-              <a:rPr lang="zh-CN" altLang="en-US" sz="1200">
-                <a:sym typeface="+mn-ea"/>
-              </a:rPr>
-              <a:t>    409 Conflict</a:t>
-            </a:r>
-            <a:endParaRPr lang="zh-CN" altLang="en-US" sz="1200"/>
-          </a:p>
-          <a:p>
-            <a:r>
-              <a:rPr lang="zh-CN" altLang="en-US" sz="1200">
-                <a:sym typeface="+mn-ea"/>
-              </a:rPr>
-              <a:t>    410 Gone</a:t>
-            </a:r>
-            <a:endParaRPr lang="zh-CN" altLang="en-US" sz="1200"/>
-          </a:p>
-          <a:p>
-            <a:r>
-              <a:rPr lang="zh-CN" altLang="en-US" sz="1200">
-                <a:sym typeface="+mn-ea"/>
-              </a:rPr>
-              <a:t>    411 Length Required</a:t>
-            </a:r>
-            <a:endParaRPr lang="zh-CN" altLang="en-US" sz="1200"/>
-          </a:p>
-          <a:p>
-            <a:r>
-              <a:rPr lang="zh-CN" altLang="en-US" sz="1200">
-                <a:sym typeface="+mn-ea"/>
-              </a:rPr>
-              <a:t>    412 Precondition Failed</a:t>
-            </a:r>
-            <a:endParaRPr lang="zh-CN" altLang="en-US" sz="1200"/>
-          </a:p>
-          <a:p>
-            <a:r>
-              <a:rPr lang="zh-CN" altLang="en-US" sz="1200">
-                <a:sym typeface="+mn-ea"/>
-              </a:rPr>
-              <a:t>    413 Payload Too Large</a:t>
-            </a:r>
-            <a:endParaRPr lang="zh-CN" altLang="en-US" sz="1200"/>
-          </a:p>
-          <a:p>
-            <a:r>
-              <a:rPr lang="zh-CN" altLang="en-US" sz="1200">
-                <a:sym typeface="+mn-ea"/>
-              </a:rPr>
-              <a:t>    414 Request-URI Too Long</a:t>
-            </a:r>
-            <a:endParaRPr lang="zh-CN" altLang="en-US" sz="1200"/>
-          </a:p>
-          <a:p>
-            <a:r>
-              <a:rPr lang="zh-CN" altLang="en-US" sz="1200">
-                <a:sym typeface="+mn-ea"/>
-              </a:rPr>
-              <a:t>    415 Unsupported Media Type</a:t>
-            </a:r>
-            <a:endParaRPr lang="zh-CN" altLang="en-US" sz="1200"/>
-          </a:p>
-          <a:p>
-            <a:r>
-              <a:rPr lang="zh-CN" altLang="en-US" sz="1200">
-                <a:sym typeface="+mn-ea"/>
-              </a:rPr>
-              <a:t>    416 Requested Range Not Satisfiable</a:t>
-            </a:r>
-            <a:endParaRPr lang="zh-CN" altLang="en-US" sz="1200"/>
-          </a:p>
-          <a:p>
-            <a:r>
-              <a:rPr lang="zh-CN" altLang="en-US" sz="1200">
-                <a:sym typeface="+mn-ea"/>
-              </a:rPr>
-              <a:t>    417 Expectation Failed</a:t>
-            </a:r>
-            <a:endParaRPr lang="zh-CN" altLang="en-US" sz="1200"/>
-          </a:p>
-          <a:p>
-            <a:r>
-              <a:rPr lang="zh-CN" altLang="en-US" sz="1200">
-                <a:sym typeface="+mn-ea"/>
-              </a:rPr>
-              <a:t>    418 I'm a teapot</a:t>
-            </a:r>
-            <a:endParaRPr lang="zh-CN" altLang="en-US" sz="1200"/>
-          </a:p>
-          <a:p>
-            <a:r>
-              <a:rPr lang="zh-CN" altLang="en-US" sz="1200">
-                <a:sym typeface="+mn-ea"/>
-              </a:rPr>
-              <a:t>    421 Misdirected Request</a:t>
-            </a:r>
-            <a:endParaRPr lang="zh-CN" altLang="en-US" sz="1200"/>
-          </a:p>
-          <a:p>
-            <a:r>
-              <a:rPr lang="zh-CN" altLang="en-US" sz="1200">
-                <a:sym typeface="+mn-ea"/>
-              </a:rPr>
-              <a:t>    422 Unprocessable Entity</a:t>
-            </a:r>
-            <a:endParaRPr lang="zh-CN" altLang="en-US" sz="1200"/>
-          </a:p>
-          <a:p>
-            <a:r>
-              <a:rPr lang="zh-CN" altLang="en-US" sz="1200">
-                <a:sym typeface="+mn-ea"/>
-              </a:rPr>
-              <a:t>    423 Locked</a:t>
-            </a:r>
-            <a:endParaRPr lang="zh-CN" altLang="en-US" sz="1200"/>
-          </a:p>
-          <a:p>
-            <a:r>
-              <a:rPr lang="zh-CN" altLang="en-US" sz="1200">
-                <a:sym typeface="+mn-ea"/>
-              </a:rPr>
-              <a:t>    424 Failed Dependency</a:t>
-            </a:r>
-            <a:endParaRPr lang="zh-CN" altLang="en-US" sz="1200"/>
-          </a:p>
-          <a:p>
-            <a:r>
-              <a:rPr lang="zh-CN" altLang="en-US" sz="1200">
-                <a:sym typeface="+mn-ea"/>
-              </a:rPr>
-              <a:t>    426 Upgrade Required</a:t>
-            </a:r>
-            <a:endParaRPr lang="zh-CN" altLang="en-US" sz="1200"/>
-          </a:p>
-          <a:p>
-            <a:r>
-              <a:rPr lang="zh-CN" altLang="en-US" sz="1200">
-                <a:sym typeface="+mn-ea"/>
-              </a:rPr>
-              <a:t>    428 Precondition Required</a:t>
-            </a:r>
-            <a:endParaRPr lang="zh-CN" altLang="en-US" sz="1200"/>
-          </a:p>
-          <a:p>
-            <a:r>
-              <a:rPr lang="zh-CN" altLang="en-US" sz="1200">
-                <a:sym typeface="+mn-ea"/>
-              </a:rPr>
-              <a:t>    429 Too Many Requests</a:t>
-            </a:r>
-            <a:endParaRPr lang="zh-CN" altLang="en-US" sz="1200"/>
-          </a:p>
-          <a:p>
-            <a:r>
-              <a:rPr lang="zh-CN" altLang="en-US" sz="1200">
-                <a:sym typeface="+mn-ea"/>
-              </a:rPr>
-              <a:t>    431 Request Header Fields Too Large</a:t>
-            </a:r>
-            <a:endParaRPr lang="zh-CN" altLang="en-US" sz="1200"/>
-          </a:p>
-          <a:p>
-            <a:r>
-              <a:rPr lang="zh-CN" altLang="en-US" sz="1200">
-                <a:sym typeface="+mn-ea"/>
-              </a:rPr>
-              <a:t>    444 Connection Closed Without Response</a:t>
-            </a:r>
-            <a:endParaRPr lang="zh-CN" altLang="en-US" sz="1200"/>
-          </a:p>
-          <a:p>
-            <a:r>
-              <a:rPr lang="zh-CN" altLang="en-US" sz="1200">
-                <a:sym typeface="+mn-ea"/>
-              </a:rPr>
-              <a:t>    451 Unavailable For Legal Reasons</a:t>
-            </a:r>
-            <a:endParaRPr lang="zh-CN" altLang="en-US" sz="1200"/>
-          </a:p>
-          <a:p>
-            <a:r>
-              <a:rPr lang="zh-CN" altLang="en-US" sz="1200">
-                <a:sym typeface="+mn-ea"/>
-              </a:rPr>
-              <a:t>    499 Client Closed Request</a:t>
-            </a:r>
-            <a:endParaRPr lang="zh-CN" altLang="en-US" sz="1200">
-              <a:sym typeface="+mn-ea"/>
-            </a:endParaRPr>
-          </a:p>
-        </p:txBody>
-      </p:sp>
-      <p:sp>
-        <p:nvSpPr>
-          <p:cNvPr id="6" name="文本框 5"/>
-          <p:cNvSpPr txBox="1"/>
-          <p:nvPr/>
-        </p:nvSpPr>
-        <p:spPr>
-          <a:xfrm>
-            <a:off x="7995920" y="1042035"/>
-            <a:ext cx="3818890" cy="2676525"/>
-          </a:xfrm>
-          <a:prstGeom prst="rect">
-            <a:avLst/>
-          </a:prstGeom>
-          <a:noFill/>
-        </p:spPr>
-        <p:txBody>
-          <a:bodyPr wrap="square" rtlCol="0">
-            <a:spAutoFit/>
-          </a:bodyPr>
-          <a:p>
-            <a:endParaRPr lang="zh-CN" altLang="en-US" sz="1200"/>
-          </a:p>
-          <a:p>
-            <a:r>
-              <a:rPr lang="zh-CN" altLang="en-US" sz="1200">
-                <a:sym typeface="+mn-ea"/>
-              </a:rPr>
-              <a:t>    5×× Server Error</a:t>
-            </a:r>
-            <a:endParaRPr lang="zh-CN" altLang="en-US" sz="1200"/>
-          </a:p>
-          <a:p>
-            <a:r>
-              <a:rPr lang="zh-CN" altLang="en-US" sz="1200">
-                <a:sym typeface="+mn-ea"/>
-              </a:rPr>
-              <a:t>    500 Internal Server Error</a:t>
-            </a:r>
-            <a:endParaRPr lang="zh-CN" altLang="en-US" sz="1200"/>
-          </a:p>
-          <a:p>
-            <a:r>
-              <a:rPr lang="zh-CN" altLang="en-US" sz="1200">
-                <a:sym typeface="+mn-ea"/>
-              </a:rPr>
-              <a:t>    501 Not Implemented</a:t>
-            </a:r>
-            <a:endParaRPr lang="zh-CN" altLang="en-US" sz="1200"/>
-          </a:p>
-          <a:p>
-            <a:r>
-              <a:rPr lang="zh-CN" altLang="en-US" sz="1200">
-                <a:sym typeface="+mn-ea"/>
-              </a:rPr>
-              <a:t>    502 Bad Gateway</a:t>
-            </a:r>
-            <a:endParaRPr lang="zh-CN" altLang="en-US" sz="1200"/>
-          </a:p>
-          <a:p>
-            <a:r>
-              <a:rPr lang="zh-CN" altLang="en-US" sz="1200">
-                <a:sym typeface="+mn-ea"/>
-              </a:rPr>
-              <a:t>    503 Service Unavailable</a:t>
-            </a:r>
-            <a:endParaRPr lang="zh-CN" altLang="en-US" sz="1200"/>
-          </a:p>
-          <a:p>
-            <a:r>
-              <a:rPr lang="zh-CN" altLang="en-US" sz="1200">
-                <a:sym typeface="+mn-ea"/>
-              </a:rPr>
-              <a:t>    504 Gateway Timeout</a:t>
-            </a:r>
-            <a:endParaRPr lang="zh-CN" altLang="en-US" sz="1200"/>
-          </a:p>
-          <a:p>
-            <a:r>
-              <a:rPr lang="zh-CN" altLang="en-US" sz="1200">
-                <a:sym typeface="+mn-ea"/>
-              </a:rPr>
-              <a:t>    505 HTTP Version Not Supported</a:t>
-            </a:r>
-            <a:endParaRPr lang="zh-CN" altLang="en-US" sz="1200"/>
-          </a:p>
-          <a:p>
-            <a:r>
-              <a:rPr lang="zh-CN" altLang="en-US" sz="1200">
-                <a:sym typeface="+mn-ea"/>
-              </a:rPr>
-              <a:t>    506 Variant Also Negotiates</a:t>
-            </a:r>
-            <a:endParaRPr lang="zh-CN" altLang="en-US" sz="1200"/>
-          </a:p>
-          <a:p>
-            <a:r>
-              <a:rPr lang="zh-CN" altLang="en-US" sz="1200">
-                <a:sym typeface="+mn-ea"/>
-              </a:rPr>
-              <a:t>    507 Insufficient Storage</a:t>
-            </a:r>
-            <a:endParaRPr lang="zh-CN" altLang="en-US" sz="1200"/>
-          </a:p>
-          <a:p>
-            <a:r>
-              <a:rPr lang="zh-CN" altLang="en-US" sz="1200">
-                <a:sym typeface="+mn-ea"/>
-              </a:rPr>
-              <a:t>    508 Loop Detected</a:t>
-            </a:r>
-            <a:endParaRPr lang="zh-CN" altLang="en-US" sz="1200"/>
-          </a:p>
-          <a:p>
-            <a:r>
-              <a:rPr lang="zh-CN" altLang="en-US" sz="1200">
-                <a:sym typeface="+mn-ea"/>
-              </a:rPr>
-              <a:t>    510 Not Extended</a:t>
-            </a:r>
-            <a:endParaRPr lang="zh-CN" altLang="en-US" sz="1200"/>
-          </a:p>
-          <a:p>
-            <a:r>
-              <a:rPr lang="zh-CN" altLang="en-US" sz="1200">
-                <a:sym typeface="+mn-ea"/>
-              </a:rPr>
-              <a:t>    511 Network Authentication Required</a:t>
-            </a:r>
-            <a:endParaRPr lang="zh-CN" altLang="en-US" sz="1200"/>
-          </a:p>
-          <a:p>
-            <a:r>
-              <a:rPr lang="zh-CN" altLang="en-US" sz="1200">
-                <a:sym typeface="+mn-ea"/>
-              </a:rPr>
-              <a:t>    599 Network Connect Timeout Error</a:t>
-            </a:r>
-            <a:endParaRPr lang="zh-CN" altLang="en-US" sz="1200">
-              <a:sym typeface="+mn-ea"/>
-            </a:endParaRPr>
+              <a:t>Performance</a:t>
+            </a:r>
+            <a:endParaRPr lang="en-US" altLang="zh-CN"/>
+          </a:p>
+        </p:txBody>
+      </p:sp>
+      <p:sp>
+        <p:nvSpPr>
+          <p:cNvPr id="5" name="文本占位符 4"/>
+          <p:cNvSpPr>
+            <a:spLocks noGrp="1"/>
+          </p:cNvSpPr>
+          <p:nvPr>
+            <p:ph type="body" idx="1"/>
+          </p:nvPr>
+        </p:nvSpPr>
+        <p:spPr/>
+        <p:txBody>
+          <a:bodyPr/>
+          <a:p>
+            <a:endParaRPr lang="zh-CN" altLang="en-US"/>
           </a:p>
         </p:txBody>
       </p:sp>
@@ -5833,7 +7556,7 @@
 </p:sld>
 </file>
 
-<file path=ppt/slides/slide20.xml><?xml version="1.0" encoding="utf-8"?>
+<file path=ppt/slides/slide26.xml><?xml version="1.0" encoding="utf-8"?>
 <p:sld xmlns:a="http://schemas.openxmlformats.org/drawingml/2006/main" xmlns:r="http://schemas.openxmlformats.org/officeDocument/2006/relationships" xmlns:p="http://schemas.openxmlformats.org/presentationml/2006/main">
   <p:cSld>
     <p:spTree>
@@ -5859,27 +7582,133 @@
           <a:p>
             <a:r>
               <a:rPr lang="en-US" altLang="zh-CN"/>
-              <a:t>Performance</a:t>
-            </a:r>
-            <a:endParaRPr lang="en-US" altLang="zh-CN"/>
-          </a:p>
-        </p:txBody>
-      </p:sp>
-      <p:sp>
-        <p:nvSpPr>
-          <p:cNvPr id="5" name="文本占位符 4"/>
-          <p:cNvSpPr>
-            <a:spLocks noGrp="1"/>
-          </p:cNvSpPr>
-          <p:nvPr>
-            <p:ph type="body" idx="1"/>
+              <a:t>In General</a:t>
+            </a:r>
+            <a:endParaRPr lang="en-US" altLang="zh-CN"/>
+          </a:p>
+        </p:txBody>
+      </p:sp>
+      <p:sp>
+        <p:nvSpPr>
+          <p:cNvPr id="5" name="内容占位符 4"/>
+          <p:cNvSpPr>
+            <a:spLocks noGrp="1"/>
+          </p:cNvSpPr>
+          <p:nvPr>
+            <p:ph idx="1"/>
           </p:nvPr>
         </p:nvSpPr>
         <p:spPr/>
         <p:txBody>
-          <a:bodyPr/>
-          <a:p>
-            <a:endParaRPr lang="zh-CN" altLang="en-US"/>
+          <a:bodyPr>
+            <a:normAutofit lnSpcReduction="10000"/>
+          </a:bodyPr>
+          <a:p>
+            <a:r>
+              <a:rPr lang="en-US" altLang="zh-CN"/>
+              <a:t>References</a:t>
+            </a:r>
+            <a:endParaRPr lang="en-US" altLang="zh-CN"/>
+          </a:p>
+          <a:p>
+            <a:pPr lvl="1"/>
+            <a:r>
+              <a:rPr lang="en-US" altLang="zh-CN"/>
+              <a:t>https://www.webpagetest.org/</a:t>
+            </a:r>
+            <a:endParaRPr lang="en-US" altLang="zh-CN"/>
+          </a:p>
+          <a:p>
+            <a:pPr lvl="1"/>
+            <a:r>
+              <a:rPr lang="en-US" altLang="zh-CN"/>
+              <a:t>https://web.dev/fast/#optimize-webfonts</a:t>
+            </a:r>
+            <a:endParaRPr lang="en-US" altLang="zh-CN"/>
+          </a:p>
+          <a:p>
+            <a:pPr lvl="1"/>
+            <a:r>
+              <a:rPr lang="en-US" altLang="zh-CN"/>
+              <a:t>https://developer.mozilla.org/en-US/docs/Learn/Performance/CSS</a:t>
+            </a:r>
+            <a:endParaRPr lang="en-US" altLang="zh-CN"/>
+          </a:p>
+          <a:p>
+            <a:pPr lvl="1"/>
+            <a:r>
+              <a:rPr lang="en-US" altLang="zh-CN">
+                <a:sym typeface="+mn-ea"/>
+              </a:rPr>
+              <a:t>https://developer.mozilla.org/en-US/docs/Web/Performance/Lazy_loading</a:t>
+            </a:r>
+            <a:endParaRPr lang="en-US" altLang="zh-CN">
+              <a:sym typeface="+mn-ea"/>
+            </a:endParaRPr>
+          </a:p>
+          <a:p>
+            <a:pPr lvl="1"/>
+            <a:r>
+              <a:rPr lang="en-US" altLang="zh-CN"/>
+              <a:t>https://phoenixnap.com/kb/reduce-server-response-time</a:t>
+            </a:r>
+            <a:endParaRPr lang="en-US" altLang="zh-CN"/>
+          </a:p>
+          <a:p>
+            <a:pPr lvl="1"/>
+            <a:r>
+              <a:rPr lang="en-US" altLang="zh-CN"/>
+              <a:t>https://phoenixnap.com/kb/best-website-speed-performance-test-tools#ftoc-4-varvy-pagespeed-optimmization</a:t>
+            </a:r>
+            <a:endParaRPr lang="en-US" altLang="zh-CN"/>
+          </a:p>
+          <a:p>
+            <a:pPr lvl="0"/>
+            <a:r>
+              <a:rPr lang="en-US" altLang="zh-CN"/>
+              <a:t>Lazy loading</a:t>
+            </a:r>
+            <a:endParaRPr lang="en-US" altLang="zh-CN"/>
+          </a:p>
+          <a:p>
+            <a:pPr lvl="1"/>
+            <a:r>
+              <a:rPr lang="en-US" altLang="zh-CN"/>
+              <a:t>JS</a:t>
+            </a:r>
+            <a:endParaRPr lang="en-US" altLang="zh-CN"/>
+          </a:p>
+          <a:p>
+            <a:pPr lvl="2"/>
+            <a:r>
+              <a:rPr lang="en-US" altLang="zh-CN"/>
+              <a:t>type=”module”</a:t>
+            </a:r>
+            <a:endParaRPr lang="en-US" altLang="zh-CN"/>
+          </a:p>
+          <a:p>
+            <a:pPr lvl="1"/>
+            <a:r>
+              <a:rPr lang="en-US" altLang="zh-CN"/>
+              <a:t>CSS</a:t>
+            </a:r>
+            <a:endParaRPr lang="en-US" altLang="zh-CN"/>
+          </a:p>
+          <a:p>
+            <a:pPr lvl="1"/>
+            <a:r>
+              <a:rPr lang="en-US" altLang="zh-CN"/>
+              <a:t>Images</a:t>
+            </a:r>
+            <a:endParaRPr lang="en-US" altLang="zh-CN"/>
+          </a:p>
+          <a:p>
+            <a:pPr lvl="2"/>
+            <a:r>
+              <a:rPr lang="en-US" altLang="zh-CN"/>
+              <a:t>&lt;img loading=”lazy”&gt;</a:t>
+            </a:r>
+            <a:endParaRPr lang="en-US" altLang="zh-CN"/>
           </a:p>
         </p:txBody>
       </p:sp>
@@ -5894,7 +7723,7 @@
 </p:sld>
 </file>
 
-<file path=ppt/slides/slide21.xml><?xml version="1.0" encoding="utf-8"?>
+<file path=ppt/slides/slide27.xml><?xml version="1.0" encoding="utf-8"?>
 <p:sld xmlns:a="http://schemas.openxmlformats.org/drawingml/2006/main" xmlns:r="http://schemas.openxmlformats.org/officeDocument/2006/relationships" xmlns:p="http://schemas.openxmlformats.org/presentationml/2006/main">
   <p:cSld>
     <p:spTree>
@@ -5920,15 +7749,76 @@
           <a:p>
             <a:r>
               <a:rPr lang="en-US" altLang="zh-CN"/>
-              <a:t>In General</a:t>
-            </a:r>
-            <a:endParaRPr lang="en-US" altLang="zh-CN"/>
-          </a:p>
-        </p:txBody>
-      </p:sp>
-      <p:sp>
-        <p:nvSpPr>
-          <p:cNvPr id="5" name="内容占位符 4"/>
+              <a:t>FAQ</a:t>
+            </a:r>
+            <a:endParaRPr lang="en-US" altLang="zh-CN"/>
+          </a:p>
+        </p:txBody>
+      </p:sp>
+      <p:sp>
+        <p:nvSpPr>
+          <p:cNvPr id="5" name="文本占位符 4"/>
+          <p:cNvSpPr>
+            <a:spLocks noGrp="1"/>
+          </p:cNvSpPr>
+          <p:nvPr>
+            <p:ph type="body" idx="1"/>
+          </p:nvPr>
+        </p:nvSpPr>
+        <p:spPr/>
+        <p:txBody>
+          <a:bodyPr/>
+          <a:p>
+            <a:endParaRPr lang="zh-CN" altLang="en-US"/>
+          </a:p>
+        </p:txBody>
+      </p:sp>
+    </p:spTree>
+    <p:custDataLst>
+      <p:tags r:id="rId1"/>
+    </p:custDataLst>
+  </p:cSld>
+  <p:clrMapOvr>
+    <a:masterClrMapping/>
+  </p:clrMapOvr>
+</p:sld>
+</file>
+
+<file path=ppt/slides/slide28.xml><?xml version="1.0" encoding="utf-8"?>
+<p:sld xmlns:a="http://schemas.openxmlformats.org/drawingml/2006/main" xmlns:r="http://schemas.openxmlformats.org/officeDocument/2006/relationships" xmlns:p="http://schemas.openxmlformats.org/presentationml/2006/main">
+  <p:cSld>
+    <p:spTree>
+      <p:nvGrpSpPr>
+        <p:cNvPr id="1" name=""/>
+        <p:cNvGrpSpPr/>
+        <p:nvPr/>
+      </p:nvGrpSpPr>
+      <p:grpSpPr/>
+      <p:sp>
+        <p:nvSpPr>
+          <p:cNvPr id="2" name="标题 1"/>
+          <p:cNvSpPr>
+            <a:spLocks noGrp="1"/>
+          </p:cNvSpPr>
+          <p:nvPr>
+            <p:ph type="title"/>
+          </p:nvPr>
+        </p:nvSpPr>
+        <p:spPr/>
+        <p:txBody>
+          <a:bodyPr/>
+          <a:p>
+            <a:r>
+              <a:rPr lang="en-US" altLang="zh-CN"/>
+              <a:t>Avoid Auto Change Into HTTPS</a:t>
+            </a:r>
+            <a:endParaRPr lang="en-US" altLang="zh-CN"/>
+          </a:p>
+        </p:txBody>
+      </p:sp>
+      <p:sp>
+        <p:nvSpPr>
+          <p:cNvPr id="3" name="内容占位符 2"/>
           <p:cNvSpPr>
             <a:spLocks noGrp="1"/>
           </p:cNvSpPr>
@@ -5936,11 +7826,14 @@
             <p:ph idx="1"/>
           </p:nvPr>
         </p:nvSpPr>
-        <p:spPr/>
-        <p:txBody>
-          <a:bodyPr>
-            <a:normAutofit lnSpcReduction="10000"/>
-          </a:bodyPr>
+        <p:spPr>
+          <a:xfrm>
+            <a:off x="838200" y="1211580"/>
+            <a:ext cx="5975350" cy="4549140"/>
+          </a:xfrm>
+        </p:spPr>
+        <p:txBody>
+          <a:bodyPr/>
           <a:p>
             <a:r>
               <a:rPr lang="en-US" altLang="zh-CN"/>
@@ -5952,51 +7845,7 @@
             <a:pPr lvl="1"/>
             <a:r>
               <a:rPr lang="en-US" altLang="zh-CN"/>
-              <a:t>https://www.webpagetest.org/</a:t>
-            </a:r>
-            <a:endParaRPr lang="en-US" altLang="zh-CN"/>
-          </a:p>
-          <a:p>
-            <a:pPr lvl="1"/>
-            <a:r>
-              <a:rPr lang="en-US" altLang="zh-CN"/>
-              <a:t>https://web.dev/fast/#optimize-webfonts</a:t>
-            </a:r>
-            <a:endParaRPr lang="en-US" altLang="zh-CN"/>
-          </a:p>
-          <a:p>
-            <a:pPr lvl="1"/>
-            <a:r>
-              <a:rPr lang="en-US" altLang="zh-CN"/>
-              <a:t>https://developer.mozilla.org/en-US/docs/Learn/Performance/CSS</a:t>
-            </a:r>
-            <a:endParaRPr lang="en-US" altLang="zh-CN"/>
-          </a:p>
-          <a:p>
-            <a:pPr lvl="1"/>
-            <a:r>
-              <a:rPr lang="en-US" altLang="zh-CN">
-                <a:sym typeface="+mn-ea"/>
-              </a:rPr>
-              <a:t>https://developer.mozilla.org/en-US/docs/Web/Performance/Lazy_loading</a:t>
-            </a:r>
-            <a:endParaRPr lang="en-US" altLang="zh-CN">
-              <a:sym typeface="+mn-ea"/>
-            </a:endParaRPr>
-          </a:p>
-          <a:p>
-            <a:pPr lvl="1"/>
-            <a:r>
-              <a:rPr lang="en-US" altLang="zh-CN"/>
-              <a:t>https://phoenixnap.com/kb/reduce-server-response-time</a:t>
-            </a:r>
-            <a:endParaRPr lang="en-US" altLang="zh-CN"/>
-          </a:p>
-          <a:p>
-            <a:pPr lvl="1"/>
-            <a:r>
-              <a:rPr lang="en-US" altLang="zh-CN"/>
-              <a:t>https://phoenixnap.com/kb/best-website-speed-performance-test-tools#ftoc-4-varvy-pagespeed-optimmization</a:t>
+              <a:t>https://www.cnblogs.com/colder/p/18072929</a:t>
             </a:r>
             <a:endParaRPr lang="en-US" altLang="zh-CN"/>
           </a:p>
@@ -6004,15 +7853,15 @@
             <a:pPr lvl="0"/>
             <a:r>
               <a:rPr lang="en-US" altLang="zh-CN"/>
-              <a:t>Lazy loading</a:t>
-            </a:r>
-            <a:endParaRPr lang="en-US" altLang="zh-CN"/>
-          </a:p>
-          <a:p>
-            <a:pPr lvl="1"/>
-            <a:r>
-              <a:rPr lang="en-US" altLang="zh-CN"/>
-              <a:t>JS</a:t>
+              <a:t>Step</a:t>
+            </a:r>
+            <a:endParaRPr lang="en-US" altLang="zh-CN"/>
+          </a:p>
+          <a:p>
+            <a:pPr lvl="1"/>
+            <a:r>
+              <a:rPr lang="en-US" altLang="zh-CN"/>
+              <a:t>Chrome</a:t>
             </a:r>
             <a:endParaRPr lang="en-US" altLang="zh-CN"/>
           </a:p>
@@ -6020,23 +7869,7 @@
             <a:pPr lvl="2"/>
             <a:r>
               <a:rPr lang="en-US" altLang="zh-CN"/>
-              <a:t>type=”module”</a:t>
-            </a:r>
-            <a:endParaRPr lang="en-US" altLang="zh-CN"/>
-          </a:p>
-          <a:p>
-            <a:pPr lvl="1"/>
-            <a:r>
-              <a:rPr lang="en-US" altLang="zh-CN"/>
-              <a:t>CSS</a:t>
-            </a:r>
-            <a:endParaRPr lang="en-US" altLang="zh-CN"/>
-          </a:p>
-          <a:p>
-            <a:pPr lvl="1"/>
-            <a:r>
-              <a:rPr lang="en-US" altLang="zh-CN"/>
-              <a:t>Images</a:t>
+              <a:t>地址栏中输入chrome://net-internals/#hsts</a:t>
             </a:r>
             <a:endParaRPr lang="en-US" altLang="zh-CN"/>
           </a:p>
@@ -6044,7 +7877,31 @@
             <a:pPr lvl="2"/>
             <a:r>
               <a:rPr lang="en-US" altLang="zh-CN"/>
-              <a:t>&lt;img loading=”lazy”&gt;</a:t>
+              <a:t>在Delete domain security policies中输入项目的域名，并Delete（删除）</a:t>
+            </a:r>
+            <a:endParaRPr lang="en-US" altLang="zh-CN"/>
+          </a:p>
+          <a:p>
+            <a:pPr lvl="1"/>
+            <a:r>
+              <a:rPr lang="en-US" altLang="zh-CN"/>
+              <a:t>Edge</a:t>
+            </a:r>
+            <a:endParaRPr lang="en-US" altLang="zh-CN"/>
+          </a:p>
+          <a:p>
+            <a:pPr lvl="2"/>
+            <a:r>
+              <a:rPr lang="en-US" altLang="zh-CN"/>
+              <a:t>地址栏中输入edge://net-internals/#hsts</a:t>
+            </a:r>
+            <a:endParaRPr lang="en-US" altLang="zh-CN"/>
+          </a:p>
+          <a:p>
+            <a:pPr lvl="2"/>
+            <a:r>
+              <a:rPr lang="en-US" altLang="zh-CN"/>
+              <a:t>在Delete domain security policies中输入项目的域名，并Delete（删除）</a:t>
             </a:r>
             <a:endParaRPr lang="en-US" altLang="zh-CN"/>
           </a:p>
@@ -7798,7 +9655,17 @@
 
 <file path=ppt/tags/tag28.xml><?xml version="1.0" encoding="utf-8"?>
 <p:tagLst xmlns:p="http://schemas.openxmlformats.org/presentationml/2006/main">
-  <p:tag name="COMMONDATA" val="eyJoZGlkIjoiODcwZjc5M2RmYzUwOWE5MjVkODVjZGMyZDUwOTRjYmEifQ=="/>
+  <p:tag name="KSO_WM_BEAUTIFY_FLAG" val="#wm#"/>
+  <p:tag name="KSO_WM_TEMPLATE_CATEGORY" val="custom"/>
+  <p:tag name="KSO_WM_TEMPLATE_INDEX" val="160402"/>
+</p:tagLst>
+</file>
+
+<file path=ppt/tags/tag29.xml><?xml version="1.0" encoding="utf-8"?>
+<p:tagLst xmlns:p="http://schemas.openxmlformats.org/presentationml/2006/main">
+  <p:tag name="KSO_WM_BEAUTIFY_FLAG" val="#wm#"/>
+  <p:tag name="KSO_WM_TEMPLATE_CATEGORY" val="custom"/>
+  <p:tag name="KSO_WM_TEMPLATE_INDEX" val="160402"/>
 </p:tagLst>
 </file>
 
@@ -7809,6 +9676,53 @@
   <p:tag name="KSO_WM_TEMPLATE_INDEX" val="160402"/>
   <p:tag name="KSO_WM_TAG_VERSION" val="1.0"/>
   <p:tag name="KSO_WM_BEAUTIFY_FLAG" val="#wm#"/>
+</p:tagLst>
+</file>
+
+<file path=ppt/tags/tag30.xml><?xml version="1.0" encoding="utf-8"?>
+<p:tagLst xmlns:p="http://schemas.openxmlformats.org/presentationml/2006/main">
+  <p:tag name="KSO_WM_BEAUTIFY_FLAG" val="#wm#"/>
+  <p:tag name="KSO_WM_TEMPLATE_CATEGORY" val="custom"/>
+  <p:tag name="KSO_WM_TEMPLATE_INDEX" val="160402"/>
+</p:tagLst>
+</file>
+
+<file path=ppt/tags/tag31.xml><?xml version="1.0" encoding="utf-8"?>
+<p:tagLst xmlns:p="http://schemas.openxmlformats.org/presentationml/2006/main">
+  <p:tag name="KSO_WM_BEAUTIFY_FLAG" val="#wm#"/>
+  <p:tag name="KSO_WM_TEMPLATE_CATEGORY" val="custom"/>
+  <p:tag name="KSO_WM_TEMPLATE_INDEX" val="160402"/>
+</p:tagLst>
+</file>
+
+<file path=ppt/tags/tag32.xml><?xml version="1.0" encoding="utf-8"?>
+<p:tagLst xmlns:p="http://schemas.openxmlformats.org/presentationml/2006/main">
+  <p:tag name="KSO_WM_BEAUTIFY_FLAG" val="#wm#"/>
+  <p:tag name="KSO_WM_TEMPLATE_CATEGORY" val="custom"/>
+  <p:tag name="KSO_WM_TEMPLATE_INDEX" val="160402"/>
+</p:tagLst>
+</file>
+
+<file path=ppt/tags/tag33.xml><?xml version="1.0" encoding="utf-8"?>
+<p:tagLst xmlns:p="http://schemas.openxmlformats.org/presentationml/2006/main">
+  <p:tag name="KSO_WM_BEAUTIFY_FLAG" val="#wm#"/>
+  <p:tag name="KSO_WM_TEMPLATE_CATEGORY" val="custom"/>
+  <p:tag name="KSO_WM_TEMPLATE_INDEX" val="160402"/>
+</p:tagLst>
+</file>
+
+<file path=ppt/tags/tag34.xml><?xml version="1.0" encoding="utf-8"?>
+<p:tagLst xmlns:p="http://schemas.openxmlformats.org/presentationml/2006/main">
+  <p:tag name="KSO_WM_BEAUTIFY_FLAG" val="#wm#"/>
+  <p:tag name="KSO_WM_TEMPLATE_CATEGORY" val="custom"/>
+  <p:tag name="KSO_WM_TEMPLATE_INDEX" val="160402"/>
+</p:tagLst>
+</file>
+
+<file path=ppt/tags/tag35.xml><?xml version="1.0" encoding="utf-8"?>
+<p:tagLst xmlns:p="http://schemas.openxmlformats.org/presentationml/2006/main">
+  <p:tag name="COMMONDATA" val="eyJoZGlkIjoiODcwZjc5M2RmYzUwOWE5MjVkODVjZGMyZDUwOTRjYmEifQ=="/>
+  <p:tag name="commondata" val="eyJoZGlkIjoiYjRhZjQ5NWVmZmQxNmM3NmNkNDYxNWRmNzNmMjA1ZDAifQ=="/>
 </p:tagLst>
 </file>
 

--- a/Web/WebGeneral-Notes.pptx
+++ b/Web/WebGeneral-Notes.pptx
@@ -8,42 +8,47 @@
     <p:notesMasterId r:id="rId4"/>
   </p:notesMasterIdLst>
   <p:handoutMasterIdLst>
-    <p:handoutMasterId r:id="rId32"/>
+    <p:handoutMasterId r:id="rId37"/>
   </p:handoutMasterIdLst>
   <p:sldIdLst>
     <p:sldId id="256" r:id="rId3"/>
-    <p:sldId id="269" r:id="rId5"/>
-    <p:sldId id="281" r:id="rId6"/>
-    <p:sldId id="264" r:id="rId7"/>
-    <p:sldId id="275" r:id="rId8"/>
-    <p:sldId id="276" r:id="rId9"/>
-    <p:sldId id="261" r:id="rId10"/>
-    <p:sldId id="290" r:id="rId11"/>
-    <p:sldId id="259" r:id="rId12"/>
-    <p:sldId id="260" r:id="rId13"/>
-    <p:sldId id="280" r:id="rId14"/>
-    <p:sldId id="289" r:id="rId15"/>
-    <p:sldId id="295" r:id="rId16"/>
-    <p:sldId id="298" r:id="rId17"/>
-    <p:sldId id="297" r:id="rId18"/>
-    <p:sldId id="296" r:id="rId19"/>
-    <p:sldId id="317" r:id="rId20"/>
-    <p:sldId id="318" r:id="rId21"/>
-    <p:sldId id="319" r:id="rId22"/>
-    <p:sldId id="308" r:id="rId23"/>
-    <p:sldId id="309" r:id="rId24"/>
-    <p:sldId id="301" r:id="rId25"/>
-    <p:sldId id="302" r:id="rId26"/>
-    <p:sldId id="303" r:id="rId27"/>
-    <p:sldId id="304" r:id="rId28"/>
-    <p:sldId id="305" r:id="rId29"/>
-    <p:sldId id="306" r:id="rId30"/>
-    <p:sldId id="307" r:id="rId31"/>
+    <p:sldId id="320" r:id="rId5"/>
+    <p:sldId id="269" r:id="rId6"/>
+    <p:sldId id="281" r:id="rId7"/>
+    <p:sldId id="264" r:id="rId8"/>
+    <p:sldId id="275" r:id="rId9"/>
+    <p:sldId id="276" r:id="rId10"/>
+    <p:sldId id="261" r:id="rId11"/>
+    <p:sldId id="290" r:id="rId12"/>
+    <p:sldId id="259" r:id="rId13"/>
+    <p:sldId id="260" r:id="rId14"/>
+    <p:sldId id="280" r:id="rId15"/>
+    <p:sldId id="289" r:id="rId16"/>
+    <p:sldId id="324" r:id="rId17"/>
+    <p:sldId id="295" r:id="rId18"/>
+    <p:sldId id="298" r:id="rId19"/>
+    <p:sldId id="297" r:id="rId20"/>
+    <p:sldId id="296" r:id="rId21"/>
+    <p:sldId id="317" r:id="rId22"/>
+    <p:sldId id="318" r:id="rId23"/>
+    <p:sldId id="319" r:id="rId24"/>
+    <p:sldId id="321" r:id="rId25"/>
+    <p:sldId id="308" r:id="rId26"/>
+    <p:sldId id="309" r:id="rId27"/>
+    <p:sldId id="301" r:id="rId28"/>
+    <p:sldId id="302" r:id="rId29"/>
+    <p:sldId id="303" r:id="rId30"/>
+    <p:sldId id="322" r:id="rId31"/>
+    <p:sldId id="323" r:id="rId32"/>
+    <p:sldId id="304" r:id="rId33"/>
+    <p:sldId id="305" r:id="rId34"/>
+    <p:sldId id="306" r:id="rId35"/>
+    <p:sldId id="307" r:id="rId36"/>
   </p:sldIdLst>
   <p:sldSz cx="12192000" cy="6858000"/>
   <p:notesSz cx="6858000" cy="9144000"/>
   <p:custDataLst>
-    <p:tags r:id="rId36"/>
+    <p:tags r:id="rId41"/>
   </p:custDataLst>
   <p:defaultTextStyle>
     <a:defPPr>
@@ -3871,7 +3876,7 @@
           <a:p>
             <a:r>
               <a:rPr lang="en-US" altLang="zh-CN"/>
-              <a:t>Browser Compatibility Test</a:t>
+              <a:t>Resolution Adaptation Test</a:t>
             </a:r>
             <a:endParaRPr lang="en-US" altLang="zh-CN"/>
           </a:p>
@@ -3901,16 +3906,36 @@
             <a:pPr lvl="1"/>
             <a:r>
               <a:rPr lang="en-US" altLang="zh-CN"/>
-              <a:t>http://browsershots.org/</a:t>
-            </a:r>
-            <a:endParaRPr lang="en-US" altLang="zh-CN"/>
-          </a:p>
-          <a:p>
-            <a:pPr lvl="1"/>
-            <a:r>
-              <a:rPr lang="en-US" altLang="zh-CN"/>
-              <a:t>https://www.browserstack.com/ (paid)</a:t>
-            </a:r>
+              <a:t>http://whatismyscreenresolution.net/</a:t>
+            </a:r>
+            <a:endParaRPr lang="en-US" altLang="zh-CN"/>
+          </a:p>
+          <a:p>
+            <a:pPr lvl="1"/>
+            <a:r>
+              <a:rPr lang="en-US" altLang="zh-CN"/>
+              <a:t>http://www.responsinator.com/</a:t>
+            </a:r>
+            <a:endParaRPr lang="en-US" altLang="zh-CN"/>
+          </a:p>
+          <a:p>
+            <a:pPr lvl="1"/>
+            <a:r>
+              <a:rPr lang="en-US" altLang="zh-CN"/>
+              <a:t>http://testsize.com/</a:t>
+            </a:r>
+            <a:endParaRPr lang="en-US" altLang="zh-CN"/>
+          </a:p>
+          <a:p>
+            <a:pPr lvl="0"/>
+            <a:r>
+              <a:rPr lang="en-US" altLang="zh-CN"/>
+              <a:t>Tools</a:t>
+            </a:r>
+            <a:endParaRPr lang="en-US" altLang="zh-CN"/>
+          </a:p>
+          <a:p>
+            <a:pPr lvl="1"/>
             <a:endParaRPr lang="en-US" altLang="zh-CN"/>
           </a:p>
         </p:txBody>
@@ -3952,7 +3977,7 @@
           <a:p>
             <a:r>
               <a:rPr lang="en-US" altLang="zh-CN"/>
-              <a:t>Favicon</a:t>
+              <a:t>Browser Compatibility Test</a:t>
             </a:r>
             <a:endParaRPr lang="en-US" altLang="zh-CN"/>
           </a:p>
@@ -3974,63 +3999,23 @@
           <a:p>
             <a:r>
               <a:rPr lang="en-US" altLang="zh-CN"/>
-              <a:t>Generation</a:t>
-            </a:r>
-            <a:endParaRPr lang="en-US" altLang="zh-CN"/>
-          </a:p>
-          <a:p>
-            <a:pPr lvl="1"/>
-            <a:r>
-              <a:rPr lang="en-US" altLang="zh-CN"/>
-              <a:t>https://favicon.io/</a:t>
-            </a:r>
-            <a:endParaRPr lang="en-US" altLang="zh-CN"/>
-          </a:p>
-          <a:p>
-            <a:pPr lvl="0"/>
-            <a:r>
-              <a:rPr lang="en-US" altLang="zh-CN"/>
-              <a:t>How to use</a:t>
-            </a:r>
-            <a:endParaRPr lang="en-US" altLang="zh-CN"/>
-          </a:p>
-          <a:p>
-            <a:pPr lvl="1"/>
-            <a:r>
-              <a:rPr lang="en-US" altLang="zh-CN"/>
-              <a:t>Add to html</a:t>
-            </a:r>
-            <a:endParaRPr lang="en-US" altLang="zh-CN"/>
-          </a:p>
-          <a:p>
-            <a:pPr lvl="2"/>
-            <a:r>
-              <a:rPr lang="en-US" altLang="zh-CN"/>
-              <a:t>&lt;link rel="apple-touch-icon" sizes="180x180" href="/apple-touch-icon.png"&gt;</a:t>
-            </a:r>
-            <a:endParaRPr lang="en-US" altLang="zh-CN"/>
-          </a:p>
-          <a:p>
-            <a:pPr lvl="2"/>
-            <a:r>
-              <a:rPr lang="en-US" altLang="zh-CN"/>
-              <a:t>&lt;link rel="icon" type="image/png" sizes="32x32" href="/favicon-32x32.png"&gt;</a:t>
-            </a:r>
-            <a:endParaRPr lang="en-US" altLang="zh-CN"/>
-          </a:p>
-          <a:p>
-            <a:pPr lvl="2"/>
-            <a:r>
-              <a:rPr lang="en-US" altLang="zh-CN"/>
-              <a:t>&lt;link rel="icon" type="image/png" sizes="16x16" href="/favicon-16x16.png"&gt;</a:t>
-            </a:r>
-            <a:endParaRPr lang="en-US" altLang="zh-CN"/>
-          </a:p>
-          <a:p>
-            <a:pPr lvl="2"/>
-            <a:r>
-              <a:rPr lang="en-US" altLang="zh-CN"/>
-              <a:t>&lt;link rel="manifest" href="/site.webmanifest"&gt;</a:t>
+              <a:t>Website</a:t>
+            </a:r>
+            <a:endParaRPr lang="en-US" altLang="zh-CN"/>
+          </a:p>
+          <a:p>
+            <a:pPr lvl="1"/>
+            <a:r>
+              <a:rPr lang="en-US" altLang="zh-CN"/>
+              <a:t>http://browsershots.org/</a:t>
+            </a:r>
+            <a:endParaRPr lang="en-US" altLang="zh-CN"/>
+          </a:p>
+          <a:p>
+            <a:pPr lvl="1"/>
+            <a:r>
+              <a:rPr lang="en-US" altLang="zh-CN"/>
+              <a:t>https://www.browserstack.com/ (paid)</a:t>
             </a:r>
             <a:endParaRPr lang="en-US" altLang="zh-CN"/>
           </a:p>
@@ -4073,7 +4058,7 @@
           <a:p>
             <a:r>
               <a:rPr lang="en-US" altLang="zh-CN"/>
-              <a:t>SSH</a:t>
+              <a:t>Favicon</a:t>
             </a:r>
             <a:endParaRPr lang="en-US" altLang="zh-CN"/>
           </a:p>
@@ -4095,15 +4080,31 @@
           <a:p>
             <a:r>
               <a:rPr lang="en-US" altLang="zh-CN"/>
-              <a:t>Avoid freeze</a:t>
-            </a:r>
-            <a:endParaRPr lang="en-US" altLang="zh-CN"/>
-          </a:p>
-          <a:p>
-            <a:pPr lvl="1"/>
-            <a:r>
-              <a:rPr lang="en-US" altLang="zh-CN"/>
-              <a:t>Modify /etc/ssh/ssh_config on client</a:t>
+              <a:t>Generation</a:t>
+            </a:r>
+            <a:endParaRPr lang="en-US" altLang="zh-CN"/>
+          </a:p>
+          <a:p>
+            <a:pPr lvl="1"/>
+            <a:r>
+              <a:rPr lang="en-US" altLang="zh-CN"/>
+              <a:t>https://favicon.io/</a:t>
+            </a:r>
+            <a:endParaRPr lang="en-US" altLang="zh-CN"/>
+          </a:p>
+          <a:p>
+            <a:pPr lvl="0"/>
+            <a:r>
+              <a:rPr lang="en-US" altLang="zh-CN"/>
+              <a:t>How to use</a:t>
+            </a:r>
+            <a:endParaRPr lang="en-US" altLang="zh-CN"/>
+          </a:p>
+          <a:p>
+            <a:pPr lvl="1"/>
+            <a:r>
+              <a:rPr lang="en-US" altLang="zh-CN"/>
+              <a:t>Add to html</a:t>
             </a:r>
             <a:endParaRPr lang="en-US" altLang="zh-CN"/>
           </a:p>
@@ -4111,7 +4112,7 @@
             <a:pPr lvl="2"/>
             <a:r>
               <a:rPr lang="en-US" altLang="zh-CN"/>
-              <a:t>Host *</a:t>
+              <a:t>&lt;link rel="apple-touch-icon" sizes="180x180" href="/apple-touch-icon.png"&gt;</a:t>
             </a:r>
             <a:endParaRPr lang="en-US" altLang="zh-CN"/>
           </a:p>
@@ -4119,15 +4120,7 @@
             <a:pPr lvl="2"/>
             <a:r>
               <a:rPr lang="en-US" altLang="zh-CN"/>
-              <a:t>ServerAliveInterval 100</a:t>
-            </a:r>
-            <a:endParaRPr lang="en-US" altLang="zh-CN"/>
-          </a:p>
-          <a:p>
-            <a:pPr lvl="1"/>
-            <a:r>
-              <a:rPr lang="en-US" altLang="zh-CN"/>
-              <a:t>Modify /etc/ssh/sshd_config on server</a:t>
+              <a:t>&lt;link rel="icon" type="image/png" sizes="32x32" href="/favicon-32x32.png"&gt;</a:t>
             </a:r>
             <a:endParaRPr lang="en-US" altLang="zh-CN"/>
           </a:p>
@@ -4135,7 +4128,7 @@
             <a:pPr lvl="2"/>
             <a:r>
               <a:rPr lang="en-US" altLang="zh-CN"/>
-              <a:t>ClientAliveInterval 60</a:t>
+              <a:t>&lt;link rel="icon" type="image/png" sizes="16x16" href="/favicon-16x16.png"&gt;</a:t>
             </a:r>
             <a:endParaRPr lang="en-US" altLang="zh-CN"/>
           </a:p>
@@ -4143,23 +4136,7 @@
             <a:pPr lvl="2"/>
             <a:r>
               <a:rPr lang="en-US" altLang="zh-CN"/>
-              <a:t>TCPKeepAlive yes</a:t>
-            </a:r>
-            <a:endParaRPr lang="en-US" altLang="zh-CN"/>
-          </a:p>
-          <a:p>
-            <a:pPr lvl="2"/>
-            <a:r>
-              <a:rPr lang="en-US" altLang="zh-CN"/>
-              <a:t>ClientAliveCountMax 10000</a:t>
-            </a:r>
-            <a:endParaRPr lang="en-US" altLang="zh-CN"/>
-          </a:p>
-          <a:p>
-            <a:pPr lvl="1"/>
-            <a:r>
-              <a:rPr lang="en-US" altLang="zh-CN"/>
-              <a:t>Run 'service sshd restart' on server</a:t>
+              <a:t>&lt;link rel="manifest" href="/site.webmanifest"&gt;</a:t>
             </a:r>
             <a:endParaRPr lang="en-US" altLang="zh-CN"/>
           </a:p>
@@ -4202,7 +4179,7 @@
           <a:p>
             <a:r>
               <a:rPr lang="en-US" altLang="zh-CN"/>
-              <a:t>SEO - General</a:t>
+              <a:t>SSH</a:t>
             </a:r>
             <a:endParaRPr lang="en-US" altLang="zh-CN"/>
           </a:p>
@@ -4224,70 +4201,71 @@
           <a:p>
             <a:r>
               <a:rPr lang="en-US" altLang="zh-CN"/>
-              <a:t>References</a:t>
-            </a:r>
-            <a:endParaRPr lang="en-US" altLang="zh-CN"/>
-          </a:p>
-          <a:p>
-            <a:pPr lvl="1"/>
-            <a:r>
-              <a:rPr lang="en-US" altLang="zh-CN"/>
-              <a:t>https://zhuanlan.zhihu.com/p/335743455</a:t>
-            </a:r>
-            <a:endParaRPr lang="en-US" altLang="zh-CN"/>
-          </a:p>
-          <a:p>
-            <a:r>
-              <a:rPr lang="en-US" altLang="zh-CN"/>
-              <a:t>Title</a:t>
-            </a:r>
-            <a:endParaRPr lang="en-US" altLang="zh-CN"/>
-          </a:p>
-          <a:p>
-            <a:pPr lvl="1"/>
-            <a:r>
-              <a:rPr lang="en-US" altLang="zh-CN"/>
-              <a:t>在标题增加搜索量较高的词</a:t>
-            </a:r>
-            <a:endParaRPr lang="en-US" altLang="zh-CN" sz="2000"/>
-          </a:p>
-          <a:p>
-            <a:pPr lvl="1"/>
-            <a:r>
-              <a:rPr lang="en-US" altLang="zh-CN"/>
-              <a:t>在标题减少搜索量较低的词</a:t>
-            </a:r>
-            <a:endParaRPr lang="en-US" altLang="zh-CN"/>
-          </a:p>
-          <a:p>
-            <a:pPr lvl="0"/>
-            <a:r>
-              <a:rPr lang="zh-CN" altLang="en-US"/>
-              <a:t>丰富页面内容</a:t>
-            </a:r>
-            <a:endParaRPr lang="zh-CN" altLang="en-US"/>
-          </a:p>
-          <a:p>
-            <a:pPr lvl="0"/>
-            <a:r>
-              <a:rPr lang="zh-CN" altLang="en-US"/>
-              <a:t>添加相关链接</a:t>
-            </a:r>
-            <a:endParaRPr lang="zh-CN" altLang="en-US"/>
-          </a:p>
-          <a:p>
-            <a:pPr lvl="0"/>
-            <a:r>
-              <a:rPr lang="en-US" altLang="zh-CN"/>
-              <a:t>Register to search engine</a:t>
-            </a:r>
-            <a:endParaRPr lang="en-US" altLang="zh-CN"/>
-          </a:p>
-          <a:p>
-            <a:pPr lvl="1"/>
-            <a:r>
-              <a:rPr lang="en-US" altLang="zh-CN"/>
-              <a:t>https://www.bing.com/webmasters</a:t>
+              <a:t>Avoid freeze</a:t>
+            </a:r>
+            <a:endParaRPr lang="en-US" altLang="zh-CN"/>
+          </a:p>
+          <a:p>
+            <a:pPr lvl="1"/>
+            <a:r>
+              <a:rPr lang="en-US" altLang="zh-CN"/>
+              <a:t>Modify /etc/ssh/ssh_config on client</a:t>
+            </a:r>
+            <a:endParaRPr lang="en-US" altLang="zh-CN"/>
+          </a:p>
+          <a:p>
+            <a:pPr lvl="2"/>
+            <a:r>
+              <a:rPr lang="en-US" altLang="zh-CN"/>
+              <a:t>Host *</a:t>
+            </a:r>
+            <a:endParaRPr lang="en-US" altLang="zh-CN"/>
+          </a:p>
+          <a:p>
+            <a:pPr lvl="2"/>
+            <a:r>
+              <a:rPr lang="en-US" altLang="zh-CN"/>
+              <a:t>ServerAliveInterval 100</a:t>
+            </a:r>
+            <a:endParaRPr lang="en-US" altLang="zh-CN"/>
+          </a:p>
+          <a:p>
+            <a:pPr lvl="1"/>
+            <a:r>
+              <a:rPr lang="en-US" altLang="zh-CN"/>
+              <a:t>Modify /etc/ssh/sshd_config on server</a:t>
+            </a:r>
+            <a:endParaRPr lang="en-US" altLang="zh-CN"/>
+          </a:p>
+          <a:p>
+            <a:pPr lvl="2"/>
+            <a:r>
+              <a:rPr lang="en-US" altLang="zh-CN"/>
+              <a:t>ClientAliveInterval 60</a:t>
+            </a:r>
+            <a:endParaRPr lang="en-US" altLang="zh-CN"/>
+          </a:p>
+          <a:p>
+            <a:pPr lvl="2"/>
+            <a:r>
+              <a:rPr lang="en-US" altLang="zh-CN"/>
+              <a:t>TCPKeepAlive yes</a:t>
+            </a:r>
+            <a:endParaRPr lang="en-US" altLang="zh-CN"/>
+          </a:p>
+          <a:p>
+            <a:pPr lvl="2"/>
+            <a:r>
+              <a:rPr lang="en-US" altLang="zh-CN"/>
+              <a:t>ClientAliveCountMax 10000</a:t>
+            </a:r>
+            <a:endParaRPr lang="en-US" altLang="zh-CN"/>
+          </a:p>
+          <a:p>
+            <a:pPr lvl="1"/>
+            <a:r>
+              <a:rPr lang="en-US" altLang="zh-CN"/>
+              <a:t>Run 'service sshd restart' on server</a:t>
             </a:r>
             <a:endParaRPr lang="en-US" altLang="zh-CN"/>
           </a:p>
@@ -4330,7 +4308,7 @@
           <a:p>
             <a:r>
               <a:rPr lang="en-US" altLang="zh-CN"/>
-              <a:t>SEO - Sitemaps</a:t>
+              <a:t>Statistics</a:t>
             </a:r>
             <a:endParaRPr lang="en-US" altLang="zh-CN"/>
           </a:p>
@@ -4346,29 +4324,80 @@
             <p:ph idx="1"/>
           </p:nvPr>
         </p:nvSpPr>
-        <p:spPr/>
+        <p:spPr>
+          <a:xfrm>
+            <a:off x="838200" y="1211580"/>
+            <a:ext cx="4856480" cy="4549140"/>
+          </a:xfrm>
+        </p:spPr>
         <p:txBody>
           <a:bodyPr/>
           <a:p>
             <a:r>
               <a:rPr lang="en-US" altLang="zh-CN"/>
-              <a:t>References</a:t>
-            </a:r>
-            <a:endParaRPr lang="en-US" altLang="zh-CN"/>
-          </a:p>
-          <a:p>
-            <a:pPr lvl="1"/>
-            <a:r>
-              <a:rPr lang="en-US" altLang="zh-CN"/>
-              <a:t>https://www.sitemaps.org/index.html</a:t>
-            </a:r>
-            <a:endParaRPr lang="en-US" altLang="zh-CN"/>
-          </a:p>
-        </p:txBody>
-      </p:sp>
+              <a:t>Baidu</a:t>
+            </a:r>
+            <a:endParaRPr lang="en-US" altLang="zh-CN"/>
+          </a:p>
+          <a:p>
+            <a:pPr lvl="1"/>
+            <a:r>
+              <a:rPr lang="en-US" altLang="zh-CN"/>
+              <a:t>Mobile</a:t>
+            </a:r>
+            <a:endParaRPr lang="en-US" altLang="zh-CN"/>
+          </a:p>
+          <a:p>
+            <a:pPr lvl="2"/>
+            <a:r>
+              <a:rPr lang="en-US" altLang="zh-CN"/>
+              <a:t>https://mtj.baidu.com/web/dashboard</a:t>
+            </a:r>
+            <a:endParaRPr lang="en-US" altLang="zh-CN"/>
+          </a:p>
+          <a:p>
+            <a:pPr lvl="1"/>
+            <a:r>
+              <a:rPr lang="en-US" altLang="zh-CN"/>
+              <a:t>Web</a:t>
+            </a:r>
+            <a:endParaRPr lang="en-US" altLang="zh-CN"/>
+          </a:p>
+          <a:p>
+            <a:pPr lvl="2"/>
+            <a:r>
+              <a:rPr lang="en-US" altLang="zh-CN"/>
+              <a:t>https://tongji.baidu.com</a:t>
+            </a:r>
+            <a:endParaRPr lang="en-US" altLang="zh-CN"/>
+          </a:p>
+        </p:txBody>
+      </p:sp>
+      <p:pic>
+        <p:nvPicPr>
+          <p:cNvPr id="4" name="图片 3"/>
+          <p:cNvPicPr/>
+          <p:nvPr/>
+        </p:nvPicPr>
+        <p:blipFill>
+          <a:blip r:embed="rId1"/>
+          <a:stretch>
+            <a:fillRect/>
+          </a:stretch>
+        </p:blipFill>
+        <p:spPr>
+          <a:xfrm>
+            <a:off x="6196330" y="1501775"/>
+            <a:ext cx="5427345" cy="1927860"/>
+          </a:xfrm>
+          <a:prstGeom prst="rect">
+            <a:avLst/>
+          </a:prstGeom>
+        </p:spPr>
+      </p:pic>
     </p:spTree>
     <p:custDataLst>
-      <p:tags r:id="rId1"/>
+      <p:tags r:id="rId2"/>
     </p:custDataLst>
   </p:cSld>
   <p:clrMapOvr>
@@ -4403,7 +4432,7 @@
           <a:p>
             <a:r>
               <a:rPr lang="en-US" altLang="zh-CN"/>
-              <a:t>SEO - Robots.txt</a:t>
+              <a:t>SEO - General</a:t>
             </a:r>
             <a:endParaRPr lang="en-US" altLang="zh-CN"/>
           </a:p>
@@ -4419,16 +4448,9 @@
             <p:ph idx="1"/>
           </p:nvPr>
         </p:nvSpPr>
-        <p:spPr>
-          <a:xfrm>
-            <a:off x="838200" y="1211580"/>
-            <a:ext cx="7476490" cy="4549140"/>
-          </a:xfrm>
-        </p:spPr>
-        <p:txBody>
-          <a:bodyPr>
-            <a:normAutofit fontScale="60000"/>
-          </a:bodyPr>
+        <p:spPr/>
+        <p:txBody>
+          <a:bodyPr/>
           <a:p>
             <a:r>
               <a:rPr lang="en-US" altLang="zh-CN"/>
@@ -4440,225 +4462,64 @@
             <a:pPr lvl="1"/>
             <a:r>
               <a:rPr lang="en-US" altLang="zh-CN"/>
-              <a:t>https://seosherpa.com/robots-txt/</a:t>
+              <a:t>https://zhuanlan.zhihu.com/p/335743455</a:t>
+            </a:r>
+            <a:endParaRPr lang="en-US" altLang="zh-CN"/>
+          </a:p>
+          <a:p>
+            <a:r>
+              <a:rPr lang="en-US" altLang="zh-CN"/>
+              <a:t>Title</a:t>
+            </a:r>
+            <a:endParaRPr lang="en-US" altLang="zh-CN"/>
+          </a:p>
+          <a:p>
+            <a:pPr lvl="1"/>
+            <a:r>
+              <a:rPr lang="en-US" altLang="zh-CN"/>
+              <a:t>在标题增加搜索量较高的词</a:t>
+            </a:r>
+            <a:endParaRPr lang="en-US" altLang="zh-CN" sz="2000"/>
+          </a:p>
+          <a:p>
+            <a:pPr lvl="1"/>
+            <a:r>
+              <a:rPr lang="en-US" altLang="zh-CN"/>
+              <a:t>在标题减少搜索量较低的词</a:t>
             </a:r>
             <a:endParaRPr lang="en-US" altLang="zh-CN"/>
           </a:p>
           <a:p>
             <a:pPr lvl="0"/>
             <a:r>
-              <a:rPr lang="en-US" altLang="zh-CN"/>
-              <a:t>User agents</a:t>
-            </a:r>
-            <a:endParaRPr lang="en-US" altLang="zh-CN"/>
-          </a:p>
-          <a:p>
-            <a:pPr lvl="1"/>
-            <a:r>
-              <a:rPr lang="en-US" altLang="zh-CN"/>
-              <a:t>Google: Googlebot</a:t>
-            </a:r>
-            <a:endParaRPr lang="en-US" altLang="zh-CN"/>
-          </a:p>
-          <a:p>
-            <a:pPr lvl="1"/>
-            <a:r>
-              <a:rPr lang="en-US" altLang="zh-CN"/>
-              <a:t>Google Images: Googlebot-Image</a:t>
-            </a:r>
-            <a:endParaRPr lang="en-US" altLang="zh-CN"/>
-          </a:p>
-          <a:p>
-            <a:pPr lvl="1"/>
-            <a:r>
-              <a:rPr lang="en-US" altLang="zh-CN"/>
-              <a:t>Google Video: Googlebot-Video</a:t>
-            </a:r>
-            <a:endParaRPr lang="en-US" altLang="zh-CN"/>
-          </a:p>
-          <a:p>
-            <a:pPr lvl="1"/>
-            <a:r>
-              <a:rPr lang="en-US" altLang="zh-CN"/>
-              <a:t>Google News: Googlebot-News</a:t>
-            </a:r>
-            <a:endParaRPr lang="en-US" altLang="zh-CN"/>
-          </a:p>
-          <a:p>
-            <a:pPr lvl="1"/>
-            <a:r>
-              <a:rPr lang="en-US" altLang="zh-CN"/>
-              <a:t>Bing: Bingbot</a:t>
-            </a:r>
-            <a:endParaRPr lang="en-US" altLang="zh-CN"/>
-          </a:p>
-          <a:p>
-            <a:pPr lvl="1"/>
-            <a:r>
-              <a:rPr lang="en-US" altLang="zh-CN"/>
-              <a:t>Bing Images &amp; Videos: MSNBot-Media</a:t>
-            </a:r>
-            <a:endParaRPr lang="en-US" altLang="zh-CN"/>
-          </a:p>
-          <a:p>
-            <a:pPr lvl="1"/>
-            <a:r>
-              <a:rPr lang="en-US" altLang="zh-CN"/>
-              <a:t>Yahoo: Slurp</a:t>
-            </a:r>
-            <a:endParaRPr lang="en-US" altLang="zh-CN"/>
-          </a:p>
-          <a:p>
-            <a:pPr lvl="1"/>
-            <a:r>
-              <a:rPr lang="en-US" altLang="zh-CN"/>
-              <a:t>Yandex: YandexBot</a:t>
-            </a:r>
-            <a:endParaRPr lang="en-US" altLang="zh-CN"/>
-          </a:p>
-          <a:p>
-            <a:pPr lvl="1"/>
-            <a:r>
-              <a:rPr lang="en-US" altLang="zh-CN"/>
-              <a:t>Baidu: Baiduspider</a:t>
-            </a:r>
-            <a:endParaRPr lang="en-US" altLang="zh-CN"/>
-          </a:p>
-          <a:p>
-            <a:pPr lvl="1"/>
-            <a:r>
-              <a:rPr lang="en-US" altLang="zh-CN"/>
-              <a:t>DuckDuckGo: DuckDuckBot</a:t>
-            </a:r>
-            <a:endParaRPr lang="en-US" altLang="zh-CN"/>
+              <a:rPr lang="zh-CN" altLang="en-US"/>
+              <a:t>丰富页面内容</a:t>
+            </a:r>
+            <a:endParaRPr lang="zh-CN" altLang="en-US"/>
           </a:p>
           <a:p>
             <a:pPr lvl="0"/>
             <a:r>
-              <a:rPr lang="en-US" altLang="zh-CN"/>
-              <a:t>Directives</a:t>
-            </a:r>
-            <a:endParaRPr lang="en-US" altLang="zh-CN"/>
-          </a:p>
-          <a:p>
-            <a:pPr lvl="1"/>
-            <a:r>
-              <a:rPr lang="en-US" altLang="zh-CN"/>
-              <a:t>Disallow</a:t>
-            </a:r>
-            <a:endParaRPr lang="en-US" altLang="zh-CN"/>
-          </a:p>
-          <a:p>
-            <a:pPr lvl="1"/>
-            <a:r>
-              <a:rPr lang="en-US" altLang="zh-CN"/>
-              <a:t>Allow</a:t>
-            </a:r>
-            <a:endParaRPr lang="en-US" altLang="zh-CN"/>
-          </a:p>
-          <a:p>
-            <a:pPr lvl="1"/>
-            <a:r>
-              <a:rPr lang="en-US" altLang="zh-CN"/>
-              <a:t>Sitemap</a:t>
-            </a:r>
-            <a:endParaRPr lang="en-US" altLang="zh-CN"/>
-          </a:p>
-        </p:txBody>
-      </p:sp>
-      <p:sp>
-        <p:nvSpPr>
-          <p:cNvPr id="4" name="文本框 3"/>
-          <p:cNvSpPr txBox="1"/>
-          <p:nvPr/>
-        </p:nvSpPr>
-        <p:spPr>
-          <a:xfrm>
-            <a:off x="8578215" y="1362075"/>
-            <a:ext cx="2540000" cy="3969385"/>
-          </a:xfrm>
-          <a:prstGeom prst="rect">
-            <a:avLst/>
-          </a:prstGeom>
-          <a:noFill/>
-          <a:ln>
-            <a:solidFill>
-              <a:srgbClr val="C00000"/>
-            </a:solidFill>
-          </a:ln>
-        </p:spPr>
-        <p:txBody>
-          <a:bodyPr wrap="square" rtlCol="0" anchor="t">
-            <a:spAutoFit/>
-          </a:bodyPr>
-          <a:p>
-            <a:r>
               <a:rPr lang="zh-CN" altLang="en-US"/>
-              <a:t>Sitemap: [URL location of sitemap]</a:t>
+              <a:t>添加相关链接</a:t>
             </a:r>
             <a:endParaRPr lang="zh-CN" altLang="en-US"/>
           </a:p>
           <a:p>
-            <a:endParaRPr lang="zh-CN" altLang="en-US"/>
-          </a:p>
-          <a:p>
-            <a:r>
-              <a:rPr lang="zh-CN" altLang="en-US"/>
-              <a:t>User-agent: [bot identifier]</a:t>
-            </a:r>
-            <a:endParaRPr lang="zh-CN" altLang="en-US"/>
-          </a:p>
-          <a:p>
-            <a:r>
-              <a:rPr lang="zh-CN" altLang="en-US"/>
-              <a:t>[directive 1]</a:t>
-            </a:r>
-            <a:endParaRPr lang="zh-CN" altLang="en-US"/>
-          </a:p>
-          <a:p>
-            <a:r>
-              <a:rPr lang="zh-CN" altLang="en-US"/>
-              <a:t>[directive 2]</a:t>
-            </a:r>
-            <a:endParaRPr lang="zh-CN" altLang="en-US"/>
-          </a:p>
-          <a:p>
-            <a:r>
-              <a:rPr lang="zh-CN" altLang="en-US"/>
-              <a:t>[directive ...]</a:t>
-            </a:r>
-            <a:endParaRPr lang="zh-CN" altLang="en-US"/>
-          </a:p>
-          <a:p>
-            <a:endParaRPr lang="zh-CN" altLang="en-US"/>
-          </a:p>
-          <a:p>
-            <a:r>
-              <a:rPr lang="zh-CN" altLang="en-US"/>
-              <a:t>User-agent: [another bot identifier]</a:t>
-            </a:r>
-            <a:endParaRPr lang="zh-CN" altLang="en-US"/>
-          </a:p>
-          <a:p>
-            <a:r>
-              <a:rPr lang="zh-CN" altLang="en-US"/>
-              <a:t>[directive 1]</a:t>
-            </a:r>
-            <a:endParaRPr lang="zh-CN" altLang="en-US"/>
-          </a:p>
-          <a:p>
-            <a:r>
-              <a:rPr lang="zh-CN" altLang="en-US"/>
-              <a:t>[directive 2]</a:t>
-            </a:r>
-            <a:endParaRPr lang="zh-CN" altLang="en-US"/>
-          </a:p>
-          <a:p>
-            <a:r>
-              <a:rPr lang="zh-CN" altLang="en-US"/>
-              <a:t>[directive ...]</a:t>
-            </a:r>
-            <a:endParaRPr lang="zh-CN" altLang="en-US"/>
+            <a:pPr lvl="0"/>
+            <a:r>
+              <a:rPr lang="en-US" altLang="zh-CN"/>
+              <a:t>Register to search engine</a:t>
+            </a:r>
+            <a:endParaRPr lang="en-US" altLang="zh-CN"/>
+          </a:p>
+          <a:p>
+            <a:pPr lvl="1"/>
+            <a:r>
+              <a:rPr lang="en-US" altLang="zh-CN"/>
+              <a:t>https://www.bing.com/webmasters</a:t>
+            </a:r>
+            <a:endParaRPr lang="en-US" altLang="zh-CN"/>
           </a:p>
         </p:txBody>
       </p:sp>
@@ -4699,6 +4560,375 @@
           <a:p>
             <a:r>
               <a:rPr lang="en-US" altLang="zh-CN"/>
+              <a:t>SEO - Sitemaps</a:t>
+            </a:r>
+            <a:endParaRPr lang="en-US" altLang="zh-CN"/>
+          </a:p>
+        </p:txBody>
+      </p:sp>
+      <p:sp>
+        <p:nvSpPr>
+          <p:cNvPr id="3" name="内容占位符 2"/>
+          <p:cNvSpPr>
+            <a:spLocks noGrp="1"/>
+          </p:cNvSpPr>
+          <p:nvPr>
+            <p:ph idx="1"/>
+          </p:nvPr>
+        </p:nvSpPr>
+        <p:spPr/>
+        <p:txBody>
+          <a:bodyPr/>
+          <a:p>
+            <a:r>
+              <a:rPr lang="en-US" altLang="zh-CN"/>
+              <a:t>References</a:t>
+            </a:r>
+            <a:endParaRPr lang="en-US" altLang="zh-CN"/>
+          </a:p>
+          <a:p>
+            <a:pPr lvl="1"/>
+            <a:r>
+              <a:rPr lang="en-US" altLang="zh-CN"/>
+              <a:t>https://www.sitemaps.org/index.html</a:t>
+            </a:r>
+            <a:endParaRPr lang="en-US" altLang="zh-CN"/>
+          </a:p>
+        </p:txBody>
+      </p:sp>
+    </p:spTree>
+    <p:custDataLst>
+      <p:tags r:id="rId1"/>
+    </p:custDataLst>
+  </p:cSld>
+  <p:clrMapOvr>
+    <a:masterClrMapping/>
+  </p:clrMapOvr>
+</p:sld>
+</file>
+
+<file path=ppt/slides/slide17.xml><?xml version="1.0" encoding="utf-8"?>
+<p:sld xmlns:a="http://schemas.openxmlformats.org/drawingml/2006/main" xmlns:r="http://schemas.openxmlformats.org/officeDocument/2006/relationships" xmlns:p="http://schemas.openxmlformats.org/presentationml/2006/main">
+  <p:cSld>
+    <p:spTree>
+      <p:nvGrpSpPr>
+        <p:cNvPr id="1" name=""/>
+        <p:cNvGrpSpPr/>
+        <p:nvPr/>
+      </p:nvGrpSpPr>
+      <p:grpSpPr/>
+      <p:sp>
+        <p:nvSpPr>
+          <p:cNvPr id="2" name="标题 1"/>
+          <p:cNvSpPr>
+            <a:spLocks noGrp="1"/>
+          </p:cNvSpPr>
+          <p:nvPr>
+            <p:ph type="title"/>
+          </p:nvPr>
+        </p:nvSpPr>
+        <p:spPr/>
+        <p:txBody>
+          <a:bodyPr/>
+          <a:p>
+            <a:r>
+              <a:rPr lang="en-US" altLang="zh-CN"/>
+              <a:t>SEO - Robots.txt</a:t>
+            </a:r>
+            <a:endParaRPr lang="en-US" altLang="zh-CN"/>
+          </a:p>
+        </p:txBody>
+      </p:sp>
+      <p:sp>
+        <p:nvSpPr>
+          <p:cNvPr id="3" name="内容占位符 2"/>
+          <p:cNvSpPr>
+            <a:spLocks noGrp="1"/>
+          </p:cNvSpPr>
+          <p:nvPr>
+            <p:ph idx="1"/>
+          </p:nvPr>
+        </p:nvSpPr>
+        <p:spPr>
+          <a:xfrm>
+            <a:off x="838200" y="1211580"/>
+            <a:ext cx="7476490" cy="4549140"/>
+          </a:xfrm>
+        </p:spPr>
+        <p:txBody>
+          <a:bodyPr>
+            <a:normAutofit fontScale="60000"/>
+          </a:bodyPr>
+          <a:p>
+            <a:r>
+              <a:rPr lang="en-US" altLang="zh-CN"/>
+              <a:t>References</a:t>
+            </a:r>
+            <a:endParaRPr lang="en-US" altLang="zh-CN"/>
+          </a:p>
+          <a:p>
+            <a:pPr lvl="1"/>
+            <a:r>
+              <a:rPr lang="en-US" altLang="zh-CN"/>
+              <a:t>https://seosherpa.com/robots-txt/</a:t>
+            </a:r>
+            <a:endParaRPr lang="en-US" altLang="zh-CN"/>
+          </a:p>
+          <a:p>
+            <a:pPr lvl="0"/>
+            <a:r>
+              <a:rPr lang="en-US" altLang="zh-CN"/>
+              <a:t>User agents</a:t>
+            </a:r>
+            <a:endParaRPr lang="en-US" altLang="zh-CN"/>
+          </a:p>
+          <a:p>
+            <a:pPr lvl="1"/>
+            <a:r>
+              <a:rPr lang="en-US" altLang="zh-CN"/>
+              <a:t>Google: Googlebot</a:t>
+            </a:r>
+            <a:endParaRPr lang="en-US" altLang="zh-CN"/>
+          </a:p>
+          <a:p>
+            <a:pPr lvl="1"/>
+            <a:r>
+              <a:rPr lang="en-US" altLang="zh-CN"/>
+              <a:t>Google Images: Googlebot-Image</a:t>
+            </a:r>
+            <a:endParaRPr lang="en-US" altLang="zh-CN"/>
+          </a:p>
+          <a:p>
+            <a:pPr lvl="1"/>
+            <a:r>
+              <a:rPr lang="en-US" altLang="zh-CN"/>
+              <a:t>Google Video: Googlebot-Video</a:t>
+            </a:r>
+            <a:endParaRPr lang="en-US" altLang="zh-CN"/>
+          </a:p>
+          <a:p>
+            <a:pPr lvl="1"/>
+            <a:r>
+              <a:rPr lang="en-US" altLang="zh-CN"/>
+              <a:t>Google News: Googlebot-News</a:t>
+            </a:r>
+            <a:endParaRPr lang="en-US" altLang="zh-CN"/>
+          </a:p>
+          <a:p>
+            <a:pPr lvl="1"/>
+            <a:r>
+              <a:rPr lang="en-US" altLang="zh-CN"/>
+              <a:t>Bing: Bingbot</a:t>
+            </a:r>
+            <a:endParaRPr lang="en-US" altLang="zh-CN"/>
+          </a:p>
+          <a:p>
+            <a:pPr lvl="1"/>
+            <a:r>
+              <a:rPr lang="en-US" altLang="zh-CN"/>
+              <a:t>Bing Images &amp; Videos: MSNBot-Media</a:t>
+            </a:r>
+            <a:endParaRPr lang="en-US" altLang="zh-CN"/>
+          </a:p>
+          <a:p>
+            <a:pPr lvl="1"/>
+            <a:r>
+              <a:rPr lang="en-US" altLang="zh-CN"/>
+              <a:t>Yahoo: Slurp</a:t>
+            </a:r>
+            <a:endParaRPr lang="en-US" altLang="zh-CN"/>
+          </a:p>
+          <a:p>
+            <a:pPr lvl="1"/>
+            <a:r>
+              <a:rPr lang="en-US" altLang="zh-CN"/>
+              <a:t>Yandex: YandexBot</a:t>
+            </a:r>
+            <a:endParaRPr lang="en-US" altLang="zh-CN"/>
+          </a:p>
+          <a:p>
+            <a:pPr lvl="1"/>
+            <a:r>
+              <a:rPr lang="en-US" altLang="zh-CN"/>
+              <a:t>Baidu: Baiduspider</a:t>
+            </a:r>
+            <a:endParaRPr lang="en-US" altLang="zh-CN"/>
+          </a:p>
+          <a:p>
+            <a:pPr lvl="1"/>
+            <a:r>
+              <a:rPr lang="en-US" altLang="zh-CN"/>
+              <a:t>DuckDuckGo: DuckDuckBot</a:t>
+            </a:r>
+            <a:endParaRPr lang="en-US" altLang="zh-CN"/>
+          </a:p>
+          <a:p>
+            <a:pPr lvl="0"/>
+            <a:r>
+              <a:rPr lang="en-US" altLang="zh-CN"/>
+              <a:t>Directives</a:t>
+            </a:r>
+            <a:endParaRPr lang="en-US" altLang="zh-CN"/>
+          </a:p>
+          <a:p>
+            <a:pPr lvl="1"/>
+            <a:r>
+              <a:rPr lang="en-US" altLang="zh-CN"/>
+              <a:t>Disallow</a:t>
+            </a:r>
+            <a:endParaRPr lang="en-US" altLang="zh-CN"/>
+          </a:p>
+          <a:p>
+            <a:pPr lvl="1"/>
+            <a:r>
+              <a:rPr lang="en-US" altLang="zh-CN"/>
+              <a:t>Allow</a:t>
+            </a:r>
+            <a:endParaRPr lang="en-US" altLang="zh-CN"/>
+          </a:p>
+          <a:p>
+            <a:pPr lvl="1"/>
+            <a:r>
+              <a:rPr lang="en-US" altLang="zh-CN"/>
+              <a:t>Sitemap</a:t>
+            </a:r>
+            <a:endParaRPr lang="en-US" altLang="zh-CN"/>
+          </a:p>
+        </p:txBody>
+      </p:sp>
+      <p:sp>
+        <p:nvSpPr>
+          <p:cNvPr id="4" name="文本框 3"/>
+          <p:cNvSpPr txBox="1"/>
+          <p:nvPr/>
+        </p:nvSpPr>
+        <p:spPr>
+          <a:xfrm>
+            <a:off x="8578215" y="1362075"/>
+            <a:ext cx="2540000" cy="3969385"/>
+          </a:xfrm>
+          <a:prstGeom prst="rect">
+            <a:avLst/>
+          </a:prstGeom>
+          <a:noFill/>
+          <a:ln>
+            <a:solidFill>
+              <a:srgbClr val="C00000"/>
+            </a:solidFill>
+          </a:ln>
+        </p:spPr>
+        <p:txBody>
+          <a:bodyPr wrap="square" rtlCol="0" anchor="t">
+            <a:spAutoFit/>
+          </a:bodyPr>
+          <a:p>
+            <a:r>
+              <a:rPr lang="zh-CN" altLang="en-US"/>
+              <a:t>Sitemap: [URL location of sitemap]</a:t>
+            </a:r>
+            <a:endParaRPr lang="zh-CN" altLang="en-US"/>
+          </a:p>
+          <a:p>
+            <a:endParaRPr lang="zh-CN" altLang="en-US"/>
+          </a:p>
+          <a:p>
+            <a:r>
+              <a:rPr lang="zh-CN" altLang="en-US"/>
+              <a:t>User-agent: [bot identifier]</a:t>
+            </a:r>
+            <a:endParaRPr lang="zh-CN" altLang="en-US"/>
+          </a:p>
+          <a:p>
+            <a:r>
+              <a:rPr lang="zh-CN" altLang="en-US"/>
+              <a:t>[directive 1]</a:t>
+            </a:r>
+            <a:endParaRPr lang="zh-CN" altLang="en-US"/>
+          </a:p>
+          <a:p>
+            <a:r>
+              <a:rPr lang="zh-CN" altLang="en-US"/>
+              <a:t>[directive 2]</a:t>
+            </a:r>
+            <a:endParaRPr lang="zh-CN" altLang="en-US"/>
+          </a:p>
+          <a:p>
+            <a:r>
+              <a:rPr lang="zh-CN" altLang="en-US"/>
+              <a:t>[directive ...]</a:t>
+            </a:r>
+            <a:endParaRPr lang="zh-CN" altLang="en-US"/>
+          </a:p>
+          <a:p>
+            <a:endParaRPr lang="zh-CN" altLang="en-US"/>
+          </a:p>
+          <a:p>
+            <a:r>
+              <a:rPr lang="zh-CN" altLang="en-US"/>
+              <a:t>User-agent: [another bot identifier]</a:t>
+            </a:r>
+            <a:endParaRPr lang="zh-CN" altLang="en-US"/>
+          </a:p>
+          <a:p>
+            <a:r>
+              <a:rPr lang="zh-CN" altLang="en-US"/>
+              <a:t>[directive 1]</a:t>
+            </a:r>
+            <a:endParaRPr lang="zh-CN" altLang="en-US"/>
+          </a:p>
+          <a:p>
+            <a:r>
+              <a:rPr lang="zh-CN" altLang="en-US"/>
+              <a:t>[directive 2]</a:t>
+            </a:r>
+            <a:endParaRPr lang="zh-CN" altLang="en-US"/>
+          </a:p>
+          <a:p>
+            <a:r>
+              <a:rPr lang="zh-CN" altLang="en-US"/>
+              <a:t>[directive ...]</a:t>
+            </a:r>
+            <a:endParaRPr lang="zh-CN" altLang="en-US"/>
+          </a:p>
+        </p:txBody>
+      </p:sp>
+    </p:spTree>
+    <p:custDataLst>
+      <p:tags r:id="rId1"/>
+    </p:custDataLst>
+  </p:cSld>
+  <p:clrMapOvr>
+    <a:masterClrMapping/>
+  </p:clrMapOvr>
+</p:sld>
+</file>
+
+<file path=ppt/slides/slide18.xml><?xml version="1.0" encoding="utf-8"?>
+<p:sld xmlns:a="http://schemas.openxmlformats.org/drawingml/2006/main" xmlns:r="http://schemas.openxmlformats.org/officeDocument/2006/relationships" xmlns:p="http://schemas.openxmlformats.org/presentationml/2006/main">
+  <p:cSld>
+    <p:spTree>
+      <p:nvGrpSpPr>
+        <p:cNvPr id="1" name=""/>
+        <p:cNvGrpSpPr/>
+        <p:nvPr/>
+      </p:nvGrpSpPr>
+      <p:grpSpPr/>
+      <p:sp>
+        <p:nvSpPr>
+          <p:cNvPr id="2" name="标题 1"/>
+          <p:cNvSpPr>
+            <a:spLocks noGrp="1"/>
+          </p:cNvSpPr>
+          <p:nvPr>
+            <p:ph type="title"/>
+          </p:nvPr>
+        </p:nvSpPr>
+        <p:spPr/>
+        <p:txBody>
+          <a:bodyPr/>
+          <a:p>
+            <a:r>
+              <a:rPr lang="en-US" altLang="zh-CN"/>
               <a:t>Crawl</a:t>
             </a:r>
             <a:endParaRPr lang="en-US" altLang="zh-CN"/>
@@ -4886,7 +5116,7 @@
 </p:sld>
 </file>
 
-<file path=ppt/slides/slide17.xml><?xml version="1.0" encoding="utf-8"?>
+<file path=ppt/slides/slide19.xml><?xml version="1.0" encoding="utf-8"?>
 <p:sld xmlns:a="http://schemas.openxmlformats.org/drawingml/2006/main" xmlns:r="http://schemas.openxmlformats.org/officeDocument/2006/relationships" xmlns:p="http://schemas.openxmlformats.org/presentationml/2006/main">
   <p:cSld>
     <p:spTree>
@@ -5208,7 +5438,68 @@
 </p:sld>
 </file>
 
-<file path=ppt/slides/slide18.xml><?xml version="1.0" encoding="utf-8"?>
+<file path=ppt/slides/slide2.xml><?xml version="1.0" encoding="utf-8"?>
+<p:sld xmlns:a="http://schemas.openxmlformats.org/drawingml/2006/main" xmlns:r="http://schemas.openxmlformats.org/officeDocument/2006/relationships" xmlns:p="http://schemas.openxmlformats.org/presentationml/2006/main">
+  <p:cSld>
+    <p:spTree>
+      <p:nvGrpSpPr>
+        <p:cNvPr id="1" name=""/>
+        <p:cNvGrpSpPr/>
+        <p:nvPr/>
+      </p:nvGrpSpPr>
+      <p:grpSpPr/>
+      <p:sp>
+        <p:nvSpPr>
+          <p:cNvPr id="4" name="标题 3"/>
+          <p:cNvSpPr>
+            <a:spLocks noGrp="1"/>
+          </p:cNvSpPr>
+          <p:nvPr>
+            <p:ph type="title"/>
+          </p:nvPr>
+        </p:nvSpPr>
+        <p:spPr/>
+        <p:txBody>
+          <a:bodyPr/>
+          <a:p>
+            <a:r>
+              <a:rPr lang="en-US" altLang="zh-CN"/>
+              <a:t>General</a:t>
+            </a:r>
+            <a:endParaRPr lang="en-US" altLang="zh-CN"/>
+          </a:p>
+        </p:txBody>
+      </p:sp>
+      <p:sp>
+        <p:nvSpPr>
+          <p:cNvPr id="5" name="文本占位符 4"/>
+          <p:cNvSpPr>
+            <a:spLocks noGrp="1"/>
+          </p:cNvSpPr>
+          <p:nvPr>
+            <p:ph type="body" idx="1"/>
+          </p:nvPr>
+        </p:nvSpPr>
+        <p:spPr/>
+        <p:txBody>
+          <a:bodyPr/>
+          <a:p>
+            <a:endParaRPr lang="zh-CN" altLang="en-US"/>
+          </a:p>
+        </p:txBody>
+      </p:sp>
+    </p:spTree>
+    <p:custDataLst>
+      <p:tags r:id="rId1"/>
+    </p:custDataLst>
+  </p:cSld>
+  <p:clrMapOvr>
+    <a:masterClrMapping/>
+  </p:clrMapOvr>
+</p:sld>
+</file>
+
+<file path=ppt/slides/slide20.xml><?xml version="1.0" encoding="utf-8"?>
 <p:sld xmlns:a="http://schemas.openxmlformats.org/drawingml/2006/main" xmlns:r="http://schemas.openxmlformats.org/officeDocument/2006/relationships" xmlns:p="http://schemas.openxmlformats.org/presentationml/2006/main">
   <p:cSld>
     <p:spTree>
@@ -6100,7 +6391,7 @@
 </p:sld>
 </file>
 
-<file path=ppt/slides/slide19.xml><?xml version="1.0" encoding="utf-8"?>
+<file path=ppt/slides/slide21.xml><?xml version="1.0" encoding="utf-8"?>
 <p:sld xmlns:a="http://schemas.openxmlformats.org/drawingml/2006/main" xmlns:r="http://schemas.openxmlformats.org/officeDocument/2006/relationships" xmlns:p="http://schemas.openxmlformats.org/presentationml/2006/main">
   <p:cSld>
     <p:spTree>
@@ -6200,1017 +6491,6 @@
 </p:sld>
 </file>
 
-<file path=ppt/slides/slide2.xml><?xml version="1.0" encoding="utf-8"?>
-<p:sld xmlns:a="http://schemas.openxmlformats.org/drawingml/2006/main" xmlns:r="http://schemas.openxmlformats.org/officeDocument/2006/relationships" xmlns:p="http://schemas.openxmlformats.org/presentationml/2006/main">
-  <p:cSld>
-    <p:spTree>
-      <p:nvGrpSpPr>
-        <p:cNvPr id="1" name=""/>
-        <p:cNvGrpSpPr/>
-        <p:nvPr/>
-      </p:nvGrpSpPr>
-      <p:grpSpPr/>
-      <p:sp>
-        <p:nvSpPr>
-          <p:cNvPr id="2" name="标题 1"/>
-          <p:cNvSpPr>
-            <a:spLocks noGrp="1"/>
-          </p:cNvSpPr>
-          <p:nvPr>
-            <p:ph type="title"/>
-          </p:nvPr>
-        </p:nvSpPr>
-        <p:spPr/>
-        <p:txBody>
-          <a:bodyPr/>
-          <a:p>
-            <a:r>
-              <a:rPr lang="en-US" altLang="zh-CN"/>
-              <a:t>HTTP Status Code</a:t>
-            </a:r>
-            <a:endParaRPr lang="en-US" altLang="zh-CN"/>
-          </a:p>
-        </p:txBody>
-      </p:sp>
-      <p:sp>
-        <p:nvSpPr>
-          <p:cNvPr id="4" name="文本框 3"/>
-          <p:cNvSpPr txBox="1"/>
-          <p:nvPr/>
-        </p:nvSpPr>
-        <p:spPr>
-          <a:xfrm>
-            <a:off x="723900" y="1078230"/>
-            <a:ext cx="3288665" cy="5692775"/>
-          </a:xfrm>
-          <a:prstGeom prst="rect">
-            <a:avLst/>
-          </a:prstGeom>
-          <a:noFill/>
-        </p:spPr>
-        <p:txBody>
-          <a:bodyPr wrap="square" rtlCol="0">
-            <a:spAutoFit/>
-          </a:bodyPr>
-          <a:p>
-            <a:r>
-              <a:rPr lang="zh-CN" altLang="en-US" sz="1400"/>
-              <a:t>    1×× Informational</a:t>
-            </a:r>
-            <a:endParaRPr lang="zh-CN" altLang="en-US" sz="1400"/>
-          </a:p>
-          <a:p>
-            <a:r>
-              <a:rPr lang="zh-CN" altLang="en-US" sz="1400"/>
-              <a:t>    100 Continue</a:t>
-            </a:r>
-            <a:endParaRPr lang="zh-CN" altLang="en-US" sz="1400"/>
-          </a:p>
-          <a:p>
-            <a:r>
-              <a:rPr lang="zh-CN" altLang="en-US" sz="1400"/>
-              <a:t>    101 Switching Protocols</a:t>
-            </a:r>
-            <a:endParaRPr lang="zh-CN" altLang="en-US" sz="1400"/>
-          </a:p>
-          <a:p>
-            <a:r>
-              <a:rPr lang="zh-CN" altLang="en-US" sz="1400"/>
-              <a:t>    102 Processing</a:t>
-            </a:r>
-            <a:endParaRPr lang="zh-CN" altLang="en-US" sz="1400"/>
-          </a:p>
-          <a:p>
-            <a:endParaRPr lang="zh-CN" altLang="en-US" sz="1400"/>
-          </a:p>
-          <a:p>
-            <a:r>
-              <a:rPr lang="zh-CN" altLang="en-US" sz="1400"/>
-              <a:t>    2×× Success</a:t>
-            </a:r>
-            <a:endParaRPr lang="zh-CN" altLang="en-US" sz="1400"/>
-          </a:p>
-          <a:p>
-            <a:r>
-              <a:rPr lang="zh-CN" altLang="en-US" sz="1400"/>
-              <a:t>    200 OK</a:t>
-            </a:r>
-            <a:endParaRPr lang="zh-CN" altLang="en-US" sz="1400"/>
-          </a:p>
-          <a:p>
-            <a:r>
-              <a:rPr lang="zh-CN" altLang="en-US" sz="1400"/>
-              <a:t>    201 Created</a:t>
-            </a:r>
-            <a:endParaRPr lang="zh-CN" altLang="en-US" sz="1400"/>
-          </a:p>
-          <a:p>
-            <a:r>
-              <a:rPr lang="zh-CN" altLang="en-US" sz="1400"/>
-              <a:t>    202 Accepted</a:t>
-            </a:r>
-            <a:endParaRPr lang="zh-CN" altLang="en-US" sz="1400"/>
-          </a:p>
-          <a:p>
-            <a:r>
-              <a:rPr lang="zh-CN" altLang="en-US" sz="1400"/>
-              <a:t>    203 Non-authoritative Information</a:t>
-            </a:r>
-            <a:endParaRPr lang="zh-CN" altLang="en-US" sz="1400"/>
-          </a:p>
-          <a:p>
-            <a:r>
-              <a:rPr lang="zh-CN" altLang="en-US" sz="1400"/>
-              <a:t>    204 No Content</a:t>
-            </a:r>
-            <a:endParaRPr lang="zh-CN" altLang="en-US" sz="1400"/>
-          </a:p>
-          <a:p>
-            <a:r>
-              <a:rPr lang="zh-CN" altLang="en-US" sz="1400"/>
-              <a:t>    205 Reset Content</a:t>
-            </a:r>
-            <a:endParaRPr lang="zh-CN" altLang="en-US" sz="1400"/>
-          </a:p>
-          <a:p>
-            <a:r>
-              <a:rPr lang="zh-CN" altLang="en-US" sz="1400"/>
-              <a:t>    206 Partial Content</a:t>
-            </a:r>
-            <a:endParaRPr lang="zh-CN" altLang="en-US" sz="1400"/>
-          </a:p>
-          <a:p>
-            <a:r>
-              <a:rPr lang="zh-CN" altLang="en-US" sz="1400"/>
-              <a:t>    207 Multi-Status</a:t>
-            </a:r>
-            <a:endParaRPr lang="zh-CN" altLang="en-US" sz="1400"/>
-          </a:p>
-          <a:p>
-            <a:r>
-              <a:rPr lang="zh-CN" altLang="en-US" sz="1400"/>
-              <a:t>    208 Already Reported</a:t>
-            </a:r>
-            <a:endParaRPr lang="zh-CN" altLang="en-US" sz="1400"/>
-          </a:p>
-          <a:p>
-            <a:r>
-              <a:rPr lang="zh-CN" altLang="en-US" sz="1400"/>
-              <a:t>    226 IM Used</a:t>
-            </a:r>
-            <a:endParaRPr lang="zh-CN" altLang="en-US" sz="1400"/>
-          </a:p>
-          <a:p>
-            <a:endParaRPr lang="zh-CN" altLang="en-US" sz="1400"/>
-          </a:p>
-          <a:p>
-            <a:r>
-              <a:rPr lang="zh-CN" altLang="en-US" sz="1400"/>
-              <a:t>    3×× Redirection</a:t>
-            </a:r>
-            <a:endParaRPr lang="zh-CN" altLang="en-US" sz="1400"/>
-          </a:p>
-          <a:p>
-            <a:r>
-              <a:rPr lang="zh-CN" altLang="en-US" sz="1400"/>
-              <a:t>    300 Multiple Choices</a:t>
-            </a:r>
-            <a:endParaRPr lang="zh-CN" altLang="en-US" sz="1400"/>
-          </a:p>
-          <a:p>
-            <a:r>
-              <a:rPr lang="zh-CN" altLang="en-US" sz="1400"/>
-              <a:t>    301 Moved Permanently</a:t>
-            </a:r>
-            <a:endParaRPr lang="zh-CN" altLang="en-US" sz="1400"/>
-          </a:p>
-          <a:p>
-            <a:r>
-              <a:rPr lang="zh-CN" altLang="en-US" sz="1400"/>
-              <a:t>    302 Found</a:t>
-            </a:r>
-            <a:endParaRPr lang="zh-CN" altLang="en-US" sz="1400"/>
-          </a:p>
-          <a:p>
-            <a:r>
-              <a:rPr lang="zh-CN" altLang="en-US" sz="1400"/>
-              <a:t>    303 See Other</a:t>
-            </a:r>
-            <a:endParaRPr lang="zh-CN" altLang="en-US" sz="1400"/>
-          </a:p>
-          <a:p>
-            <a:r>
-              <a:rPr lang="zh-CN" altLang="en-US" sz="1400"/>
-              <a:t>    304 Not Modified</a:t>
-            </a:r>
-            <a:endParaRPr lang="zh-CN" altLang="en-US" sz="1400"/>
-          </a:p>
-          <a:p>
-            <a:r>
-              <a:rPr lang="zh-CN" altLang="en-US" sz="1400"/>
-              <a:t>    305 Use Proxy</a:t>
-            </a:r>
-            <a:endParaRPr lang="zh-CN" altLang="en-US" sz="1400"/>
-          </a:p>
-          <a:p>
-            <a:r>
-              <a:rPr lang="zh-CN" altLang="en-US" sz="1400"/>
-              <a:t>    307 Temporary Redirect</a:t>
-            </a:r>
-            <a:endParaRPr lang="zh-CN" altLang="en-US" sz="1400"/>
-          </a:p>
-          <a:p>
-            <a:r>
-              <a:rPr lang="zh-CN" altLang="en-US" sz="1400"/>
-              <a:t>    308 Permanent Redirect</a:t>
-            </a:r>
-            <a:endParaRPr lang="zh-CN" altLang="en-US" sz="1400"/>
-          </a:p>
-        </p:txBody>
-      </p:sp>
-      <p:sp>
-        <p:nvSpPr>
-          <p:cNvPr id="5" name="文本框 4"/>
-          <p:cNvSpPr txBox="1"/>
-          <p:nvPr/>
-        </p:nvSpPr>
-        <p:spPr>
-          <a:xfrm>
-            <a:off x="4012565" y="1078230"/>
-            <a:ext cx="3818890" cy="5815965"/>
-          </a:xfrm>
-          <a:prstGeom prst="rect">
-            <a:avLst/>
-          </a:prstGeom>
-          <a:noFill/>
-        </p:spPr>
-        <p:txBody>
-          <a:bodyPr wrap="square" rtlCol="0">
-            <a:spAutoFit/>
-          </a:bodyPr>
-          <a:p>
-            <a:r>
-              <a:rPr lang="zh-CN" altLang="en-US" sz="1200">
-                <a:sym typeface="+mn-ea"/>
-              </a:rPr>
-              <a:t>    4×× Client Error</a:t>
-            </a:r>
-            <a:endParaRPr lang="zh-CN" altLang="en-US" sz="1200"/>
-          </a:p>
-          <a:p>
-            <a:r>
-              <a:rPr lang="zh-CN" altLang="en-US" sz="1200">
-                <a:sym typeface="+mn-ea"/>
-              </a:rPr>
-              <a:t>    400 Bad Request</a:t>
-            </a:r>
-            <a:endParaRPr lang="zh-CN" altLang="en-US" sz="1200"/>
-          </a:p>
-          <a:p>
-            <a:r>
-              <a:rPr lang="zh-CN" altLang="en-US" sz="1200">
-                <a:sym typeface="+mn-ea"/>
-              </a:rPr>
-              <a:t>    401 Unauthorized</a:t>
-            </a:r>
-            <a:endParaRPr lang="zh-CN" altLang="en-US" sz="1200"/>
-          </a:p>
-          <a:p>
-            <a:r>
-              <a:rPr lang="zh-CN" altLang="en-US" sz="1200">
-                <a:sym typeface="+mn-ea"/>
-              </a:rPr>
-              <a:t>    402 Payment Required</a:t>
-            </a:r>
-            <a:endParaRPr lang="zh-CN" altLang="en-US" sz="1200"/>
-          </a:p>
-          <a:p>
-            <a:r>
-              <a:rPr lang="zh-CN" altLang="en-US" sz="1200">
-                <a:sym typeface="+mn-ea"/>
-              </a:rPr>
-              <a:t>    403 Forbidden</a:t>
-            </a:r>
-            <a:endParaRPr lang="zh-CN" altLang="en-US" sz="1200"/>
-          </a:p>
-          <a:p>
-            <a:r>
-              <a:rPr lang="zh-CN" altLang="en-US" sz="1200">
-                <a:sym typeface="+mn-ea"/>
-              </a:rPr>
-              <a:t>    404 Not Found</a:t>
-            </a:r>
-            <a:endParaRPr lang="zh-CN" altLang="en-US" sz="1200"/>
-          </a:p>
-          <a:p>
-            <a:r>
-              <a:rPr lang="zh-CN" altLang="en-US" sz="1200">
-                <a:sym typeface="+mn-ea"/>
-              </a:rPr>
-              <a:t>    405 Method Not Allowed</a:t>
-            </a:r>
-            <a:endParaRPr lang="zh-CN" altLang="en-US" sz="1200"/>
-          </a:p>
-          <a:p>
-            <a:r>
-              <a:rPr lang="zh-CN" altLang="en-US" sz="1200">
-                <a:sym typeface="+mn-ea"/>
-              </a:rPr>
-              <a:t>    406 Not Acceptable</a:t>
-            </a:r>
-            <a:endParaRPr lang="zh-CN" altLang="en-US" sz="1200"/>
-          </a:p>
-          <a:p>
-            <a:r>
-              <a:rPr lang="zh-CN" altLang="en-US" sz="1200">
-                <a:sym typeface="+mn-ea"/>
-              </a:rPr>
-              <a:t>    407 Proxy Authentication Required</a:t>
-            </a:r>
-            <a:endParaRPr lang="zh-CN" altLang="en-US" sz="1200"/>
-          </a:p>
-          <a:p>
-            <a:r>
-              <a:rPr lang="zh-CN" altLang="en-US" sz="1200">
-                <a:sym typeface="+mn-ea"/>
-              </a:rPr>
-              <a:t>    408 Request Timeout</a:t>
-            </a:r>
-            <a:endParaRPr lang="zh-CN" altLang="en-US" sz="1200"/>
-          </a:p>
-          <a:p>
-            <a:r>
-              <a:rPr lang="zh-CN" altLang="en-US" sz="1200">
-                <a:sym typeface="+mn-ea"/>
-              </a:rPr>
-              <a:t>    409 Conflict</a:t>
-            </a:r>
-            <a:endParaRPr lang="zh-CN" altLang="en-US" sz="1200"/>
-          </a:p>
-          <a:p>
-            <a:r>
-              <a:rPr lang="zh-CN" altLang="en-US" sz="1200">
-                <a:sym typeface="+mn-ea"/>
-              </a:rPr>
-              <a:t>    410 Gone</a:t>
-            </a:r>
-            <a:endParaRPr lang="zh-CN" altLang="en-US" sz="1200"/>
-          </a:p>
-          <a:p>
-            <a:r>
-              <a:rPr lang="zh-CN" altLang="en-US" sz="1200">
-                <a:sym typeface="+mn-ea"/>
-              </a:rPr>
-              <a:t>    411 Length Required</a:t>
-            </a:r>
-            <a:endParaRPr lang="zh-CN" altLang="en-US" sz="1200"/>
-          </a:p>
-          <a:p>
-            <a:r>
-              <a:rPr lang="zh-CN" altLang="en-US" sz="1200">
-                <a:sym typeface="+mn-ea"/>
-              </a:rPr>
-              <a:t>    412 Precondition Failed</a:t>
-            </a:r>
-            <a:endParaRPr lang="zh-CN" altLang="en-US" sz="1200"/>
-          </a:p>
-          <a:p>
-            <a:r>
-              <a:rPr lang="zh-CN" altLang="en-US" sz="1200">
-                <a:sym typeface="+mn-ea"/>
-              </a:rPr>
-              <a:t>    413 Payload Too Large</a:t>
-            </a:r>
-            <a:endParaRPr lang="zh-CN" altLang="en-US" sz="1200"/>
-          </a:p>
-          <a:p>
-            <a:r>
-              <a:rPr lang="zh-CN" altLang="en-US" sz="1200">
-                <a:sym typeface="+mn-ea"/>
-              </a:rPr>
-              <a:t>    414 Request-URI Too Long</a:t>
-            </a:r>
-            <a:endParaRPr lang="zh-CN" altLang="en-US" sz="1200"/>
-          </a:p>
-          <a:p>
-            <a:r>
-              <a:rPr lang="zh-CN" altLang="en-US" sz="1200">
-                <a:sym typeface="+mn-ea"/>
-              </a:rPr>
-              <a:t>    415 Unsupported Media Type</a:t>
-            </a:r>
-            <a:endParaRPr lang="zh-CN" altLang="en-US" sz="1200"/>
-          </a:p>
-          <a:p>
-            <a:r>
-              <a:rPr lang="zh-CN" altLang="en-US" sz="1200">
-                <a:sym typeface="+mn-ea"/>
-              </a:rPr>
-              <a:t>    416 Requested Range Not Satisfiable</a:t>
-            </a:r>
-            <a:endParaRPr lang="zh-CN" altLang="en-US" sz="1200"/>
-          </a:p>
-          <a:p>
-            <a:r>
-              <a:rPr lang="zh-CN" altLang="en-US" sz="1200">
-                <a:sym typeface="+mn-ea"/>
-              </a:rPr>
-              <a:t>    417 Expectation Failed</a:t>
-            </a:r>
-            <a:endParaRPr lang="zh-CN" altLang="en-US" sz="1200"/>
-          </a:p>
-          <a:p>
-            <a:r>
-              <a:rPr lang="zh-CN" altLang="en-US" sz="1200">
-                <a:sym typeface="+mn-ea"/>
-              </a:rPr>
-              <a:t>    418 I'm a teapot</a:t>
-            </a:r>
-            <a:endParaRPr lang="zh-CN" altLang="en-US" sz="1200"/>
-          </a:p>
-          <a:p>
-            <a:r>
-              <a:rPr lang="zh-CN" altLang="en-US" sz="1200">
-                <a:sym typeface="+mn-ea"/>
-              </a:rPr>
-              <a:t>    421 Misdirected Request</a:t>
-            </a:r>
-            <a:endParaRPr lang="zh-CN" altLang="en-US" sz="1200"/>
-          </a:p>
-          <a:p>
-            <a:r>
-              <a:rPr lang="zh-CN" altLang="en-US" sz="1200">
-                <a:sym typeface="+mn-ea"/>
-              </a:rPr>
-              <a:t>    422 Unprocessable Entity</a:t>
-            </a:r>
-            <a:endParaRPr lang="zh-CN" altLang="en-US" sz="1200"/>
-          </a:p>
-          <a:p>
-            <a:r>
-              <a:rPr lang="zh-CN" altLang="en-US" sz="1200">
-                <a:sym typeface="+mn-ea"/>
-              </a:rPr>
-              <a:t>    423 Locked</a:t>
-            </a:r>
-            <a:endParaRPr lang="zh-CN" altLang="en-US" sz="1200"/>
-          </a:p>
-          <a:p>
-            <a:r>
-              <a:rPr lang="zh-CN" altLang="en-US" sz="1200">
-                <a:sym typeface="+mn-ea"/>
-              </a:rPr>
-              <a:t>    424 Failed Dependency</a:t>
-            </a:r>
-            <a:endParaRPr lang="zh-CN" altLang="en-US" sz="1200"/>
-          </a:p>
-          <a:p>
-            <a:r>
-              <a:rPr lang="zh-CN" altLang="en-US" sz="1200">
-                <a:sym typeface="+mn-ea"/>
-              </a:rPr>
-              <a:t>    426 Upgrade Required</a:t>
-            </a:r>
-            <a:endParaRPr lang="zh-CN" altLang="en-US" sz="1200"/>
-          </a:p>
-          <a:p>
-            <a:r>
-              <a:rPr lang="zh-CN" altLang="en-US" sz="1200">
-                <a:sym typeface="+mn-ea"/>
-              </a:rPr>
-              <a:t>    428 Precondition Required</a:t>
-            </a:r>
-            <a:endParaRPr lang="zh-CN" altLang="en-US" sz="1200"/>
-          </a:p>
-          <a:p>
-            <a:r>
-              <a:rPr lang="zh-CN" altLang="en-US" sz="1200">
-                <a:sym typeface="+mn-ea"/>
-              </a:rPr>
-              <a:t>    429 Too Many Requests</a:t>
-            </a:r>
-            <a:endParaRPr lang="zh-CN" altLang="en-US" sz="1200"/>
-          </a:p>
-          <a:p>
-            <a:r>
-              <a:rPr lang="zh-CN" altLang="en-US" sz="1200">
-                <a:sym typeface="+mn-ea"/>
-              </a:rPr>
-              <a:t>    431 Request Header Fields Too Large</a:t>
-            </a:r>
-            <a:endParaRPr lang="zh-CN" altLang="en-US" sz="1200"/>
-          </a:p>
-          <a:p>
-            <a:r>
-              <a:rPr lang="zh-CN" altLang="en-US" sz="1200">
-                <a:sym typeface="+mn-ea"/>
-              </a:rPr>
-              <a:t>    444 Connection Closed Without Response</a:t>
-            </a:r>
-            <a:endParaRPr lang="zh-CN" altLang="en-US" sz="1200"/>
-          </a:p>
-          <a:p>
-            <a:r>
-              <a:rPr lang="zh-CN" altLang="en-US" sz="1200">
-                <a:sym typeface="+mn-ea"/>
-              </a:rPr>
-              <a:t>    451 Unavailable For Legal Reasons</a:t>
-            </a:r>
-            <a:endParaRPr lang="zh-CN" altLang="en-US" sz="1200"/>
-          </a:p>
-          <a:p>
-            <a:r>
-              <a:rPr lang="zh-CN" altLang="en-US" sz="1200">
-                <a:sym typeface="+mn-ea"/>
-              </a:rPr>
-              <a:t>    499 Client Closed Request</a:t>
-            </a:r>
-            <a:endParaRPr lang="zh-CN" altLang="en-US" sz="1200">
-              <a:sym typeface="+mn-ea"/>
-            </a:endParaRPr>
-          </a:p>
-        </p:txBody>
-      </p:sp>
-      <p:sp>
-        <p:nvSpPr>
-          <p:cNvPr id="6" name="文本框 5"/>
-          <p:cNvSpPr txBox="1"/>
-          <p:nvPr/>
-        </p:nvSpPr>
-        <p:spPr>
-          <a:xfrm>
-            <a:off x="7995920" y="1042035"/>
-            <a:ext cx="3818890" cy="2676525"/>
-          </a:xfrm>
-          <a:prstGeom prst="rect">
-            <a:avLst/>
-          </a:prstGeom>
-          <a:noFill/>
-        </p:spPr>
-        <p:txBody>
-          <a:bodyPr wrap="square" rtlCol="0">
-            <a:spAutoFit/>
-          </a:bodyPr>
-          <a:p>
-            <a:endParaRPr lang="zh-CN" altLang="en-US" sz="1200"/>
-          </a:p>
-          <a:p>
-            <a:r>
-              <a:rPr lang="zh-CN" altLang="en-US" sz="1200">
-                <a:sym typeface="+mn-ea"/>
-              </a:rPr>
-              <a:t>    5×× Server Error</a:t>
-            </a:r>
-            <a:endParaRPr lang="zh-CN" altLang="en-US" sz="1200"/>
-          </a:p>
-          <a:p>
-            <a:r>
-              <a:rPr lang="zh-CN" altLang="en-US" sz="1200">
-                <a:sym typeface="+mn-ea"/>
-              </a:rPr>
-              <a:t>    500 Internal Server Error</a:t>
-            </a:r>
-            <a:endParaRPr lang="zh-CN" altLang="en-US" sz="1200"/>
-          </a:p>
-          <a:p>
-            <a:r>
-              <a:rPr lang="zh-CN" altLang="en-US" sz="1200">
-                <a:sym typeface="+mn-ea"/>
-              </a:rPr>
-              <a:t>    501 Not Implemented</a:t>
-            </a:r>
-            <a:endParaRPr lang="zh-CN" altLang="en-US" sz="1200"/>
-          </a:p>
-          <a:p>
-            <a:r>
-              <a:rPr lang="zh-CN" altLang="en-US" sz="1200">
-                <a:sym typeface="+mn-ea"/>
-              </a:rPr>
-              <a:t>    502 Bad Gateway</a:t>
-            </a:r>
-            <a:endParaRPr lang="zh-CN" altLang="en-US" sz="1200"/>
-          </a:p>
-          <a:p>
-            <a:r>
-              <a:rPr lang="zh-CN" altLang="en-US" sz="1200">
-                <a:sym typeface="+mn-ea"/>
-              </a:rPr>
-              <a:t>    503 Service Unavailable</a:t>
-            </a:r>
-            <a:endParaRPr lang="zh-CN" altLang="en-US" sz="1200"/>
-          </a:p>
-          <a:p>
-            <a:r>
-              <a:rPr lang="zh-CN" altLang="en-US" sz="1200">
-                <a:sym typeface="+mn-ea"/>
-              </a:rPr>
-              <a:t>    504 Gateway Timeout</a:t>
-            </a:r>
-            <a:endParaRPr lang="zh-CN" altLang="en-US" sz="1200"/>
-          </a:p>
-          <a:p>
-            <a:r>
-              <a:rPr lang="zh-CN" altLang="en-US" sz="1200">
-                <a:sym typeface="+mn-ea"/>
-              </a:rPr>
-              <a:t>    505 HTTP Version Not Supported</a:t>
-            </a:r>
-            <a:endParaRPr lang="zh-CN" altLang="en-US" sz="1200"/>
-          </a:p>
-          <a:p>
-            <a:r>
-              <a:rPr lang="zh-CN" altLang="en-US" sz="1200">
-                <a:sym typeface="+mn-ea"/>
-              </a:rPr>
-              <a:t>    506 Variant Also Negotiates</a:t>
-            </a:r>
-            <a:endParaRPr lang="zh-CN" altLang="en-US" sz="1200"/>
-          </a:p>
-          <a:p>
-            <a:r>
-              <a:rPr lang="zh-CN" altLang="en-US" sz="1200">
-                <a:sym typeface="+mn-ea"/>
-              </a:rPr>
-              <a:t>    507 Insufficient Storage</a:t>
-            </a:r>
-            <a:endParaRPr lang="zh-CN" altLang="en-US" sz="1200"/>
-          </a:p>
-          <a:p>
-            <a:r>
-              <a:rPr lang="zh-CN" altLang="en-US" sz="1200">
-                <a:sym typeface="+mn-ea"/>
-              </a:rPr>
-              <a:t>    508 Loop Detected</a:t>
-            </a:r>
-            <a:endParaRPr lang="zh-CN" altLang="en-US" sz="1200"/>
-          </a:p>
-          <a:p>
-            <a:r>
-              <a:rPr lang="zh-CN" altLang="en-US" sz="1200">
-                <a:sym typeface="+mn-ea"/>
-              </a:rPr>
-              <a:t>    510 Not Extended</a:t>
-            </a:r>
-            <a:endParaRPr lang="zh-CN" altLang="en-US" sz="1200"/>
-          </a:p>
-          <a:p>
-            <a:r>
-              <a:rPr lang="zh-CN" altLang="en-US" sz="1200">
-                <a:sym typeface="+mn-ea"/>
-              </a:rPr>
-              <a:t>    511 Network Authentication Required</a:t>
-            </a:r>
-            <a:endParaRPr lang="zh-CN" altLang="en-US" sz="1200"/>
-          </a:p>
-          <a:p>
-            <a:r>
-              <a:rPr lang="zh-CN" altLang="en-US" sz="1200">
-                <a:sym typeface="+mn-ea"/>
-              </a:rPr>
-              <a:t>    599 Network Connect Timeout Error</a:t>
-            </a:r>
-            <a:endParaRPr lang="zh-CN" altLang="en-US" sz="1200">
-              <a:sym typeface="+mn-ea"/>
-            </a:endParaRPr>
-          </a:p>
-        </p:txBody>
-      </p:sp>
-    </p:spTree>
-    <p:custDataLst>
-      <p:tags r:id="rId1"/>
-    </p:custDataLst>
-  </p:cSld>
-  <p:clrMapOvr>
-    <a:masterClrMapping/>
-  </p:clrMapOvr>
-</p:sld>
-</file>
-
-<file path=ppt/slides/slide20.xml><?xml version="1.0" encoding="utf-8"?>
-<p:sld xmlns:a="http://schemas.openxmlformats.org/drawingml/2006/main" xmlns:r="http://schemas.openxmlformats.org/officeDocument/2006/relationships" xmlns:p="http://schemas.openxmlformats.org/presentationml/2006/main">
-  <p:cSld>
-    <p:spTree>
-      <p:nvGrpSpPr>
-        <p:cNvPr id="1" name=""/>
-        <p:cNvGrpSpPr/>
-        <p:nvPr/>
-      </p:nvGrpSpPr>
-      <p:grpSpPr/>
-      <p:sp>
-        <p:nvSpPr>
-          <p:cNvPr id="4" name="标题 3"/>
-          <p:cNvSpPr>
-            <a:spLocks noGrp="1"/>
-          </p:cNvSpPr>
-          <p:nvPr>
-            <p:ph type="title"/>
-          </p:nvPr>
-        </p:nvSpPr>
-        <p:spPr/>
-        <p:txBody>
-          <a:bodyPr/>
-          <a:p>
-            <a:r>
-              <a:rPr lang="en-US" altLang="zh-CN"/>
-              <a:t>Network Protocols</a:t>
-            </a:r>
-            <a:endParaRPr lang="en-US" altLang="zh-CN"/>
-          </a:p>
-        </p:txBody>
-      </p:sp>
-      <p:sp>
-        <p:nvSpPr>
-          <p:cNvPr id="5" name="文本占位符 4"/>
-          <p:cNvSpPr>
-            <a:spLocks noGrp="1"/>
-          </p:cNvSpPr>
-          <p:nvPr>
-            <p:ph type="body" idx="1"/>
-          </p:nvPr>
-        </p:nvSpPr>
-        <p:spPr/>
-        <p:txBody>
-          <a:bodyPr/>
-          <a:p>
-            <a:endParaRPr lang="zh-CN" altLang="en-US"/>
-          </a:p>
-        </p:txBody>
-      </p:sp>
-    </p:spTree>
-    <p:custDataLst>
-      <p:tags r:id="rId1"/>
-    </p:custDataLst>
-  </p:cSld>
-  <p:clrMapOvr>
-    <a:masterClrMapping/>
-  </p:clrMapOvr>
-</p:sld>
-</file>
-
-<file path=ppt/slides/slide21.xml><?xml version="1.0" encoding="utf-8"?>
-<p:sld xmlns:a="http://schemas.openxmlformats.org/drawingml/2006/main" xmlns:r="http://schemas.openxmlformats.org/officeDocument/2006/relationships" xmlns:p="http://schemas.openxmlformats.org/presentationml/2006/main">
-  <p:cSld>
-    <p:spTree>
-      <p:nvGrpSpPr>
-        <p:cNvPr id="1" name=""/>
-        <p:cNvGrpSpPr/>
-        <p:nvPr/>
-      </p:nvGrpSpPr>
-      <p:grpSpPr/>
-      <p:sp>
-        <p:nvSpPr>
-          <p:cNvPr id="2" name="标题 1"/>
-          <p:cNvSpPr>
-            <a:spLocks noGrp="1"/>
-          </p:cNvSpPr>
-          <p:nvPr>
-            <p:ph type="title"/>
-          </p:nvPr>
-        </p:nvSpPr>
-        <p:spPr/>
-        <p:txBody>
-          <a:bodyPr/>
-          <a:p>
-            <a:r>
-              <a:rPr lang="en-US" altLang="zh-CN"/>
-              <a:t>mDNS</a:t>
-            </a:r>
-            <a:endParaRPr lang="en-US" altLang="zh-CN"/>
-          </a:p>
-        </p:txBody>
-      </p:sp>
-      <p:sp>
-        <p:nvSpPr>
-          <p:cNvPr id="3" name="内容占位符 2"/>
-          <p:cNvSpPr>
-            <a:spLocks noGrp="1"/>
-          </p:cNvSpPr>
-          <p:nvPr>
-            <p:ph idx="1"/>
-          </p:nvPr>
-        </p:nvSpPr>
-        <p:spPr>
-          <a:xfrm>
-            <a:off x="838200" y="1211580"/>
-            <a:ext cx="5516245" cy="4549140"/>
-          </a:xfrm>
-        </p:spPr>
-        <p:txBody>
-          <a:bodyPr>
-            <a:normAutofit fontScale="80000"/>
-          </a:bodyPr>
-          <a:p>
-            <a:r>
-              <a:rPr lang="en-US" altLang="zh-CN"/>
-              <a:t>References</a:t>
-            </a:r>
-            <a:endParaRPr lang="en-US" altLang="zh-CN"/>
-          </a:p>
-          <a:p>
-            <a:pPr lvl="1"/>
-            <a:r>
-              <a:rPr lang="en-US" altLang="zh-CN"/>
-              <a:t>https://blog.alexsun.top/vuepress-network-notes/application-layer-protocol/dns/mdns.html</a:t>
-            </a:r>
-            <a:endParaRPr lang="en-US" altLang="zh-CN"/>
-          </a:p>
-          <a:p>
-            <a:pPr lvl="1"/>
-            <a:r>
-              <a:rPr lang="en-US" altLang="zh-CN"/>
-              <a:t>https://baike.baidu.com/item/mdns/7544078</a:t>
-            </a:r>
-            <a:endParaRPr lang="en-US" altLang="zh-CN"/>
-          </a:p>
-          <a:p>
-            <a:pPr lvl="0"/>
-            <a:r>
-              <a:rPr lang="zh-CN" altLang="en-US"/>
-              <a:t>服务发现</a:t>
-            </a:r>
-            <a:endParaRPr lang="zh-CN" altLang="en-US"/>
-          </a:p>
-          <a:p>
-            <a:pPr lvl="1"/>
-            <a:r>
-              <a:rPr lang="zh-CN" altLang="en-US"/>
-              <a:t>设备</a:t>
-            </a:r>
-            <a:r>
-              <a:rPr lang="en-US" altLang="zh-CN"/>
-              <a:t>B</a:t>
-            </a:r>
-            <a:r>
-              <a:rPr lang="zh-CN" altLang="en-US"/>
-              <a:t>广播自己提供的服务（如</a:t>
-            </a:r>
-            <a:r>
-              <a:rPr lang="en-US" altLang="zh-CN"/>
-              <a:t> _http._tcp.local</a:t>
-            </a:r>
-            <a:r>
-              <a:rPr lang="zh-CN" altLang="en-US"/>
-              <a:t>）。</a:t>
-            </a:r>
-            <a:endParaRPr lang="zh-CN" altLang="en-US"/>
-          </a:p>
-          <a:p>
-            <a:pPr lvl="1"/>
-            <a:r>
-              <a:rPr lang="zh-CN" altLang="en-US"/>
-              <a:t>设备</a:t>
-            </a:r>
-            <a:r>
-              <a:rPr lang="en-US" altLang="zh-CN"/>
-              <a:t>A</a:t>
-            </a:r>
-            <a:r>
-              <a:rPr lang="zh-CN" altLang="en-US"/>
-              <a:t>发送服务查询请求。</a:t>
-            </a:r>
-            <a:endParaRPr lang="zh-CN" altLang="en-US"/>
-          </a:p>
-          <a:p>
-            <a:pPr lvl="1"/>
-            <a:r>
-              <a:rPr lang="zh-CN" altLang="en-US"/>
-              <a:t>设备</a:t>
-            </a:r>
-            <a:r>
-              <a:rPr lang="en-US" altLang="zh-CN"/>
-              <a:t>B</a:t>
-            </a:r>
-            <a:r>
-              <a:rPr lang="zh-CN" altLang="en-US"/>
-              <a:t>响应，提供服务的详细信息（如</a:t>
-            </a:r>
-            <a:r>
-              <a:rPr lang="en-US" altLang="zh-CN"/>
-              <a:t>IP</a:t>
-            </a:r>
-            <a:r>
-              <a:rPr lang="zh-CN" altLang="en-US"/>
-              <a:t>地址、端口号等）。</a:t>
-            </a:r>
-            <a:endParaRPr lang="zh-CN" altLang="en-US"/>
-          </a:p>
-          <a:p>
-            <a:pPr lvl="0"/>
-            <a:r>
-              <a:rPr lang="zh-CN" altLang="en-US"/>
-              <a:t>嵌入式设备通常使用轻量级的</a:t>
-            </a:r>
-            <a:r>
-              <a:rPr lang="en-US" altLang="zh-CN"/>
-              <a:t> mDNS </a:t>
-            </a:r>
-            <a:r>
-              <a:rPr lang="zh-CN" altLang="en-US"/>
-              <a:t>实现库</a:t>
-            </a:r>
-            <a:endParaRPr lang="zh-CN" altLang="en-US"/>
-          </a:p>
-          <a:p>
-            <a:pPr lvl="1"/>
-            <a:r>
-              <a:rPr lang="en-US" altLang="zh-CN"/>
-              <a:t>Avahi</a:t>
-            </a:r>
-            <a:r>
-              <a:rPr lang="zh-CN" altLang="en-US"/>
-              <a:t>：</a:t>
-            </a:r>
-            <a:r>
-              <a:rPr lang="en-US" altLang="zh-CN"/>
-              <a:t>Linux </a:t>
-            </a:r>
-            <a:r>
-              <a:rPr lang="zh-CN" altLang="en-US"/>
-              <a:t>平台常用的</a:t>
-            </a:r>
-            <a:r>
-              <a:rPr lang="en-US" altLang="zh-CN"/>
-              <a:t> mDNS </a:t>
-            </a:r>
-            <a:r>
-              <a:rPr lang="zh-CN" altLang="en-US"/>
-              <a:t>实现。</a:t>
-            </a:r>
-            <a:endParaRPr lang="zh-CN" altLang="en-US"/>
-          </a:p>
-          <a:p>
-            <a:pPr lvl="1"/>
-            <a:r>
-              <a:rPr lang="en-US" altLang="zh-CN"/>
-              <a:t>Apple Bonjour</a:t>
-            </a:r>
-            <a:r>
-              <a:rPr lang="zh-CN" altLang="en-US"/>
-              <a:t>：</a:t>
-            </a:r>
-            <a:r>
-              <a:rPr lang="en-US" altLang="zh-CN"/>
-              <a:t>macOS </a:t>
-            </a:r>
-            <a:r>
-              <a:rPr lang="zh-CN" altLang="en-US"/>
-              <a:t>和</a:t>
-            </a:r>
-            <a:r>
-              <a:rPr lang="en-US" altLang="zh-CN"/>
-              <a:t> Windows </a:t>
-            </a:r>
-            <a:r>
-              <a:rPr lang="zh-CN" altLang="en-US"/>
-              <a:t>平台的支持。</a:t>
-            </a:r>
-            <a:endParaRPr lang="zh-CN" altLang="en-US"/>
-          </a:p>
-          <a:p>
-            <a:pPr lvl="1"/>
-            <a:r>
-              <a:rPr lang="en-US" altLang="zh-CN"/>
-              <a:t>ESP-IDF</a:t>
-            </a:r>
-            <a:r>
-              <a:rPr lang="zh-CN" altLang="en-US"/>
-              <a:t>：</a:t>
-            </a:r>
-            <a:r>
-              <a:rPr lang="en-US" altLang="zh-CN"/>
-              <a:t>ESP32 </a:t>
-            </a:r>
-            <a:r>
-              <a:rPr lang="zh-CN" altLang="en-US"/>
-              <a:t>开发框架中集成了</a:t>
-            </a:r>
-            <a:r>
-              <a:rPr lang="en-US" altLang="zh-CN"/>
-              <a:t> mDNS </a:t>
-            </a:r>
-            <a:r>
-              <a:rPr lang="zh-CN" altLang="en-US"/>
-              <a:t>功能。</a:t>
-            </a:r>
-            <a:endParaRPr lang="zh-CN" altLang="en-US"/>
-          </a:p>
-          <a:p>
-            <a:pPr lvl="0"/>
-            <a:endParaRPr lang="en-US" altLang="zh-CN"/>
-          </a:p>
-        </p:txBody>
-      </p:sp>
-    </p:spTree>
-    <p:custDataLst>
-      <p:tags r:id="rId1"/>
-    </p:custDataLst>
-  </p:cSld>
-  <p:clrMapOvr>
-    <a:masterClrMapping/>
-  </p:clrMapOvr>
-</p:sld>
-</file>
-
 <file path=ppt/slides/slide22.xml><?xml version="1.0" encoding="utf-8"?>
 <p:sld xmlns:a="http://schemas.openxmlformats.org/drawingml/2006/main" xmlns:r="http://schemas.openxmlformats.org/officeDocument/2006/relationships" xmlns:p="http://schemas.openxmlformats.org/presentationml/2006/main">
   <p:cSld>
@@ -7223,7 +6503,7 @@
       <p:grpSpPr/>
       <p:sp>
         <p:nvSpPr>
-          <p:cNvPr id="4" name="标题 3"/>
+          <p:cNvPr id="2" name="标题 1"/>
           <p:cNvSpPr>
             <a:spLocks noGrp="1"/>
           </p:cNvSpPr>
@@ -7237,27 +6517,47 @@
           <a:p>
             <a:r>
               <a:rPr lang="en-US" altLang="zh-CN"/>
-              <a:t>ClearPath</a:t>
-            </a:r>
-            <a:endParaRPr lang="en-US" altLang="zh-CN"/>
-          </a:p>
-        </p:txBody>
-      </p:sp>
-      <p:sp>
-        <p:nvSpPr>
-          <p:cNvPr id="5" name="文本占位符 4"/>
-          <p:cNvSpPr>
-            <a:spLocks noGrp="1"/>
-          </p:cNvSpPr>
-          <p:nvPr>
-            <p:ph type="body" idx="1"/>
+              <a:t>Edge Browser</a:t>
+            </a:r>
+            <a:endParaRPr lang="en-US" altLang="zh-CN"/>
+          </a:p>
+        </p:txBody>
+      </p:sp>
+      <p:sp>
+        <p:nvSpPr>
+          <p:cNvPr id="3" name="内容占位符 2"/>
+          <p:cNvSpPr>
+            <a:spLocks noGrp="1"/>
+          </p:cNvSpPr>
+          <p:nvPr>
+            <p:ph idx="1"/>
           </p:nvPr>
         </p:nvSpPr>
         <p:spPr/>
         <p:txBody>
           <a:bodyPr/>
           <a:p>
-            <a:endParaRPr lang="zh-CN" altLang="en-US"/>
+            <a:r>
+              <a:rPr lang="en-US" altLang="zh-CN"/>
+              <a:t>edge://net-internals/#dns</a:t>
+            </a:r>
+            <a:endParaRPr lang="en-US" altLang="zh-CN"/>
+          </a:p>
+          <a:p>
+            <a:pPr lvl="1"/>
+            <a:r>
+              <a:rPr lang="en-US" altLang="zh-CN"/>
+              <a:t>Check DNS lookup result</a:t>
+            </a:r>
+            <a:endParaRPr lang="en-US" altLang="zh-CN"/>
+          </a:p>
+          <a:p>
+            <a:pPr lvl="1"/>
+            <a:r>
+              <a:rPr lang="en-US" altLang="zh-CN"/>
+              <a:t>Clear host cache</a:t>
+            </a:r>
+            <a:endParaRPr lang="en-US" altLang="zh-CN"/>
           </a:p>
         </p:txBody>
       </p:sp>
@@ -7298,37 +6598,26 @@
           <a:p>
             <a:r>
               <a:rPr lang="en-US" altLang="zh-CN"/>
-              <a:t>References</a:t>
-            </a:r>
-            <a:endParaRPr lang="en-US" altLang="zh-CN"/>
-          </a:p>
-        </p:txBody>
-      </p:sp>
-      <p:sp>
-        <p:nvSpPr>
-          <p:cNvPr id="5" name="内容占位符 4"/>
-          <p:cNvSpPr>
-            <a:spLocks noGrp="1"/>
-          </p:cNvSpPr>
-          <p:nvPr>
-            <p:ph idx="1"/>
+              <a:t>Network Protocols</a:t>
+            </a:r>
+            <a:endParaRPr lang="en-US" altLang="zh-CN"/>
+          </a:p>
+        </p:txBody>
+      </p:sp>
+      <p:sp>
+        <p:nvSpPr>
+          <p:cNvPr id="5" name="文本占位符 4"/>
+          <p:cNvSpPr>
+            <a:spLocks noGrp="1"/>
+          </p:cNvSpPr>
+          <p:nvPr>
+            <p:ph type="body" idx="1"/>
           </p:nvPr>
         </p:nvSpPr>
         <p:spPr/>
         <p:txBody>
           <a:bodyPr/>
           <a:p>
-            <a:r>
-              <a:rPr lang="zh-CN" altLang="en-US"/>
-              <a:t>https://www.arubanetworks.com/assets/so/SO_ClearPass.pdf</a:t>
-            </a:r>
-            <a:endParaRPr lang="zh-CN" altLang="en-US"/>
-          </a:p>
-          <a:p>
-            <a:r>
-              <a:rPr lang="zh-CN" altLang="en-US"/>
-              <a:t>https://www.arubanetworks.com/products/security/network-access-control/secure-access/</a:t>
-            </a:r>
             <a:endParaRPr lang="zh-CN" altLang="en-US"/>
           </a:p>
         </p:txBody>
@@ -7345,6 +6634,403 @@
 </file>
 
 <file path=ppt/slides/slide24.xml><?xml version="1.0" encoding="utf-8"?>
+<p:sld xmlns:a="http://schemas.openxmlformats.org/drawingml/2006/main" xmlns:r="http://schemas.openxmlformats.org/officeDocument/2006/relationships" xmlns:p="http://schemas.openxmlformats.org/presentationml/2006/main">
+  <p:cSld>
+    <p:spTree>
+      <p:nvGrpSpPr>
+        <p:cNvPr id="1" name=""/>
+        <p:cNvGrpSpPr/>
+        <p:nvPr/>
+      </p:nvGrpSpPr>
+      <p:grpSpPr/>
+      <p:sp>
+        <p:nvSpPr>
+          <p:cNvPr id="2" name="标题 1"/>
+          <p:cNvSpPr>
+            <a:spLocks noGrp="1"/>
+          </p:cNvSpPr>
+          <p:nvPr>
+            <p:ph type="title"/>
+          </p:nvPr>
+        </p:nvSpPr>
+        <p:spPr/>
+        <p:txBody>
+          <a:bodyPr/>
+          <a:p>
+            <a:r>
+              <a:rPr lang="en-US" altLang="zh-CN"/>
+              <a:t>mDNS</a:t>
+            </a:r>
+            <a:endParaRPr lang="en-US" altLang="zh-CN"/>
+          </a:p>
+        </p:txBody>
+      </p:sp>
+      <p:sp>
+        <p:nvSpPr>
+          <p:cNvPr id="3" name="内容占位符 2"/>
+          <p:cNvSpPr>
+            <a:spLocks noGrp="1"/>
+          </p:cNvSpPr>
+          <p:nvPr>
+            <p:ph idx="1"/>
+          </p:nvPr>
+        </p:nvSpPr>
+        <p:spPr>
+          <a:xfrm>
+            <a:off x="838200" y="1211580"/>
+            <a:ext cx="5516245" cy="4549140"/>
+          </a:xfrm>
+        </p:spPr>
+        <p:txBody>
+          <a:bodyPr>
+            <a:normAutofit fontScale="80000"/>
+          </a:bodyPr>
+          <a:p>
+            <a:r>
+              <a:rPr lang="en-US" altLang="zh-CN"/>
+              <a:t>References</a:t>
+            </a:r>
+            <a:endParaRPr lang="en-US" altLang="zh-CN"/>
+          </a:p>
+          <a:p>
+            <a:pPr lvl="1"/>
+            <a:r>
+              <a:rPr lang="en-US" altLang="zh-CN"/>
+              <a:t>https://blog.alexsun.top/vuepress-network-notes/application-layer-protocol/dns/mdns.html</a:t>
+            </a:r>
+            <a:endParaRPr lang="en-US" altLang="zh-CN"/>
+          </a:p>
+          <a:p>
+            <a:pPr lvl="1"/>
+            <a:r>
+              <a:rPr lang="en-US" altLang="zh-CN"/>
+              <a:t>https://baike.baidu.com/item/mdns/7544078</a:t>
+            </a:r>
+            <a:endParaRPr lang="en-US" altLang="zh-CN"/>
+          </a:p>
+          <a:p>
+            <a:pPr lvl="0"/>
+            <a:r>
+              <a:rPr lang="zh-CN" altLang="en-US"/>
+              <a:t>服务发现</a:t>
+            </a:r>
+            <a:endParaRPr lang="zh-CN" altLang="en-US"/>
+          </a:p>
+          <a:p>
+            <a:pPr lvl="1"/>
+            <a:r>
+              <a:rPr lang="zh-CN" altLang="en-US"/>
+              <a:t>设备</a:t>
+            </a:r>
+            <a:r>
+              <a:rPr lang="en-US" altLang="zh-CN"/>
+              <a:t>B</a:t>
+            </a:r>
+            <a:r>
+              <a:rPr lang="zh-CN" altLang="en-US"/>
+              <a:t>广播自己提供的服务（如</a:t>
+            </a:r>
+            <a:r>
+              <a:rPr lang="en-US" altLang="zh-CN"/>
+              <a:t> _http._tcp.local</a:t>
+            </a:r>
+            <a:r>
+              <a:rPr lang="zh-CN" altLang="en-US"/>
+              <a:t>）。</a:t>
+            </a:r>
+            <a:endParaRPr lang="zh-CN" altLang="en-US"/>
+          </a:p>
+          <a:p>
+            <a:pPr lvl="1"/>
+            <a:r>
+              <a:rPr lang="zh-CN" altLang="en-US"/>
+              <a:t>设备</a:t>
+            </a:r>
+            <a:r>
+              <a:rPr lang="en-US" altLang="zh-CN"/>
+              <a:t>A</a:t>
+            </a:r>
+            <a:r>
+              <a:rPr lang="zh-CN" altLang="en-US"/>
+              <a:t>发送服务查询请求。</a:t>
+            </a:r>
+            <a:endParaRPr lang="zh-CN" altLang="en-US"/>
+          </a:p>
+          <a:p>
+            <a:pPr lvl="1"/>
+            <a:r>
+              <a:rPr lang="zh-CN" altLang="en-US"/>
+              <a:t>设备</a:t>
+            </a:r>
+            <a:r>
+              <a:rPr lang="en-US" altLang="zh-CN"/>
+              <a:t>B</a:t>
+            </a:r>
+            <a:r>
+              <a:rPr lang="zh-CN" altLang="en-US"/>
+              <a:t>响应，提供服务的详细信息（如</a:t>
+            </a:r>
+            <a:r>
+              <a:rPr lang="en-US" altLang="zh-CN"/>
+              <a:t>IP</a:t>
+            </a:r>
+            <a:r>
+              <a:rPr lang="zh-CN" altLang="en-US"/>
+              <a:t>地址、端口号等）。</a:t>
+            </a:r>
+            <a:endParaRPr lang="zh-CN" altLang="en-US"/>
+          </a:p>
+          <a:p>
+            <a:pPr lvl="0"/>
+            <a:r>
+              <a:rPr lang="zh-CN" altLang="en-US"/>
+              <a:t>嵌入式设备通常使用轻量级的</a:t>
+            </a:r>
+            <a:r>
+              <a:rPr lang="en-US" altLang="zh-CN"/>
+              <a:t> mDNS </a:t>
+            </a:r>
+            <a:r>
+              <a:rPr lang="zh-CN" altLang="en-US"/>
+              <a:t>实现库</a:t>
+            </a:r>
+            <a:endParaRPr lang="zh-CN" altLang="en-US"/>
+          </a:p>
+          <a:p>
+            <a:pPr lvl="1"/>
+            <a:r>
+              <a:rPr lang="en-US" altLang="zh-CN"/>
+              <a:t>Avahi</a:t>
+            </a:r>
+            <a:r>
+              <a:rPr lang="zh-CN" altLang="en-US"/>
+              <a:t>：</a:t>
+            </a:r>
+            <a:r>
+              <a:rPr lang="en-US" altLang="zh-CN"/>
+              <a:t>Linux </a:t>
+            </a:r>
+            <a:r>
+              <a:rPr lang="zh-CN" altLang="en-US"/>
+              <a:t>平台常用的</a:t>
+            </a:r>
+            <a:r>
+              <a:rPr lang="en-US" altLang="zh-CN"/>
+              <a:t> mDNS </a:t>
+            </a:r>
+            <a:r>
+              <a:rPr lang="zh-CN" altLang="en-US"/>
+              <a:t>实现。</a:t>
+            </a:r>
+            <a:endParaRPr lang="zh-CN" altLang="en-US"/>
+          </a:p>
+          <a:p>
+            <a:pPr lvl="1"/>
+            <a:r>
+              <a:rPr lang="en-US" altLang="zh-CN"/>
+              <a:t>Apple Bonjour</a:t>
+            </a:r>
+            <a:r>
+              <a:rPr lang="zh-CN" altLang="en-US"/>
+              <a:t>：</a:t>
+            </a:r>
+            <a:r>
+              <a:rPr lang="en-US" altLang="zh-CN"/>
+              <a:t>macOS </a:t>
+            </a:r>
+            <a:r>
+              <a:rPr lang="zh-CN" altLang="en-US"/>
+              <a:t>和</a:t>
+            </a:r>
+            <a:r>
+              <a:rPr lang="en-US" altLang="zh-CN"/>
+              <a:t> Windows </a:t>
+            </a:r>
+            <a:r>
+              <a:rPr lang="zh-CN" altLang="en-US"/>
+              <a:t>平台的支持。</a:t>
+            </a:r>
+            <a:endParaRPr lang="zh-CN" altLang="en-US"/>
+          </a:p>
+          <a:p>
+            <a:pPr lvl="1"/>
+            <a:r>
+              <a:rPr lang="en-US" altLang="zh-CN"/>
+              <a:t>ESP-IDF</a:t>
+            </a:r>
+            <a:r>
+              <a:rPr lang="zh-CN" altLang="en-US"/>
+              <a:t>：</a:t>
+            </a:r>
+            <a:r>
+              <a:rPr lang="en-US" altLang="zh-CN"/>
+              <a:t>ESP32 </a:t>
+            </a:r>
+            <a:r>
+              <a:rPr lang="zh-CN" altLang="en-US"/>
+              <a:t>开发框架中集成了</a:t>
+            </a:r>
+            <a:r>
+              <a:rPr lang="en-US" altLang="zh-CN"/>
+              <a:t> mDNS </a:t>
+            </a:r>
+            <a:r>
+              <a:rPr lang="zh-CN" altLang="en-US"/>
+              <a:t>功能。</a:t>
+            </a:r>
+            <a:endParaRPr lang="zh-CN" altLang="en-US"/>
+          </a:p>
+          <a:p>
+            <a:pPr lvl="0"/>
+            <a:endParaRPr lang="en-US" altLang="zh-CN"/>
+          </a:p>
+        </p:txBody>
+      </p:sp>
+    </p:spTree>
+    <p:custDataLst>
+      <p:tags r:id="rId1"/>
+    </p:custDataLst>
+  </p:cSld>
+  <p:clrMapOvr>
+    <a:masterClrMapping/>
+  </p:clrMapOvr>
+</p:sld>
+</file>
+
+<file path=ppt/slides/slide25.xml><?xml version="1.0" encoding="utf-8"?>
+<p:sld xmlns:a="http://schemas.openxmlformats.org/drawingml/2006/main" xmlns:r="http://schemas.openxmlformats.org/officeDocument/2006/relationships" xmlns:p="http://schemas.openxmlformats.org/presentationml/2006/main">
+  <p:cSld>
+    <p:spTree>
+      <p:nvGrpSpPr>
+        <p:cNvPr id="1" name=""/>
+        <p:cNvGrpSpPr/>
+        <p:nvPr/>
+      </p:nvGrpSpPr>
+      <p:grpSpPr/>
+      <p:sp>
+        <p:nvSpPr>
+          <p:cNvPr id="4" name="标题 3"/>
+          <p:cNvSpPr>
+            <a:spLocks noGrp="1"/>
+          </p:cNvSpPr>
+          <p:nvPr>
+            <p:ph type="title"/>
+          </p:nvPr>
+        </p:nvSpPr>
+        <p:spPr/>
+        <p:txBody>
+          <a:bodyPr/>
+          <a:p>
+            <a:r>
+              <a:rPr lang="en-US" altLang="zh-CN"/>
+              <a:t>ClearPath</a:t>
+            </a:r>
+            <a:endParaRPr lang="en-US" altLang="zh-CN"/>
+          </a:p>
+        </p:txBody>
+      </p:sp>
+      <p:sp>
+        <p:nvSpPr>
+          <p:cNvPr id="5" name="文本占位符 4"/>
+          <p:cNvSpPr>
+            <a:spLocks noGrp="1"/>
+          </p:cNvSpPr>
+          <p:nvPr>
+            <p:ph type="body" idx="1"/>
+          </p:nvPr>
+        </p:nvSpPr>
+        <p:spPr/>
+        <p:txBody>
+          <a:bodyPr/>
+          <a:p>
+            <a:endParaRPr lang="zh-CN" altLang="en-US"/>
+          </a:p>
+        </p:txBody>
+      </p:sp>
+    </p:spTree>
+    <p:custDataLst>
+      <p:tags r:id="rId1"/>
+    </p:custDataLst>
+  </p:cSld>
+  <p:clrMapOvr>
+    <a:masterClrMapping/>
+  </p:clrMapOvr>
+</p:sld>
+</file>
+
+<file path=ppt/slides/slide26.xml><?xml version="1.0" encoding="utf-8"?>
+<p:sld xmlns:a="http://schemas.openxmlformats.org/drawingml/2006/main" xmlns:r="http://schemas.openxmlformats.org/officeDocument/2006/relationships" xmlns:p="http://schemas.openxmlformats.org/presentationml/2006/main">
+  <p:cSld>
+    <p:spTree>
+      <p:nvGrpSpPr>
+        <p:cNvPr id="1" name=""/>
+        <p:cNvGrpSpPr/>
+        <p:nvPr/>
+      </p:nvGrpSpPr>
+      <p:grpSpPr/>
+      <p:sp>
+        <p:nvSpPr>
+          <p:cNvPr id="4" name="标题 3"/>
+          <p:cNvSpPr>
+            <a:spLocks noGrp="1"/>
+          </p:cNvSpPr>
+          <p:nvPr>
+            <p:ph type="title"/>
+          </p:nvPr>
+        </p:nvSpPr>
+        <p:spPr/>
+        <p:txBody>
+          <a:bodyPr/>
+          <a:p>
+            <a:r>
+              <a:rPr lang="en-US" altLang="zh-CN"/>
+              <a:t>References</a:t>
+            </a:r>
+            <a:endParaRPr lang="en-US" altLang="zh-CN"/>
+          </a:p>
+        </p:txBody>
+      </p:sp>
+      <p:sp>
+        <p:nvSpPr>
+          <p:cNvPr id="5" name="内容占位符 4"/>
+          <p:cNvSpPr>
+            <a:spLocks noGrp="1"/>
+          </p:cNvSpPr>
+          <p:nvPr>
+            <p:ph idx="1"/>
+          </p:nvPr>
+        </p:nvSpPr>
+        <p:spPr/>
+        <p:txBody>
+          <a:bodyPr/>
+          <a:p>
+            <a:r>
+              <a:rPr lang="zh-CN" altLang="en-US"/>
+              <a:t>https://www.arubanetworks.com/assets/so/SO_ClearPass.pdf</a:t>
+            </a:r>
+            <a:endParaRPr lang="zh-CN" altLang="en-US"/>
+          </a:p>
+          <a:p>
+            <a:r>
+              <a:rPr lang="zh-CN" altLang="en-US"/>
+              <a:t>https://www.arubanetworks.com/products/security/network-access-control/secure-access/</a:t>
+            </a:r>
+            <a:endParaRPr lang="zh-CN" altLang="en-US"/>
+          </a:p>
+        </p:txBody>
+      </p:sp>
+    </p:spTree>
+    <p:custDataLst>
+      <p:tags r:id="rId1"/>
+    </p:custDataLst>
+  </p:cSld>
+  <p:clrMapOvr>
+    <a:masterClrMapping/>
+  </p:clrMapOvr>
+</p:sld>
+</file>
+
+<file path=ppt/slides/slide27.xml><?xml version="1.0" encoding="utf-8"?>
 <p:sld xmlns:a="http://schemas.openxmlformats.org/drawingml/2006/main" xmlns:r="http://schemas.openxmlformats.org/officeDocument/2006/relationships" xmlns:p="http://schemas.openxmlformats.org/presentationml/2006/main">
   <p:cSld>
     <p:spTree>
@@ -7495,7 +7181,7 @@
 </p:sld>
 </file>
 
-<file path=ppt/slides/slide25.xml><?xml version="1.0" encoding="utf-8"?>
+<file path=ppt/slides/slide28.xml><?xml version="1.0" encoding="utf-8"?>
 <p:sld xmlns:a="http://schemas.openxmlformats.org/drawingml/2006/main" xmlns:r="http://schemas.openxmlformats.org/officeDocument/2006/relationships" xmlns:p="http://schemas.openxmlformats.org/presentationml/2006/main">
   <p:cSld>
     <p:spTree>
@@ -7521,7 +7207,7 @@
           <a:p>
             <a:r>
               <a:rPr lang="en-US" altLang="zh-CN"/>
-              <a:t>Performance</a:t>
+              <a:t>Apps</a:t>
             </a:r>
             <a:endParaRPr lang="en-US" altLang="zh-CN"/>
           </a:p>
@@ -7556,7 +7242,7 @@
 </p:sld>
 </file>
 
-<file path=ppt/slides/slide26.xml><?xml version="1.0" encoding="utf-8"?>
+<file path=ppt/slides/slide29.xml><?xml version="1.0" encoding="utf-8"?>
 <p:sld xmlns:a="http://schemas.openxmlformats.org/drawingml/2006/main" xmlns:r="http://schemas.openxmlformats.org/officeDocument/2006/relationships" xmlns:p="http://schemas.openxmlformats.org/presentationml/2006/main">
   <p:cSld>
     <p:spTree>
@@ -7568,7 +7254,7 @@
       <p:grpSpPr/>
       <p:sp>
         <p:nvSpPr>
-          <p:cNvPr id="4" name="标题 3"/>
+          <p:cNvPr id="2" name="标题 1"/>
           <p:cNvSpPr>
             <a:spLocks noGrp="1"/>
           </p:cNvSpPr>
@@ -7582,235 +7268,7 @@
           <a:p>
             <a:r>
               <a:rPr lang="en-US" altLang="zh-CN"/>
-              <a:t>In General</a:t>
-            </a:r>
-            <a:endParaRPr lang="en-US" altLang="zh-CN"/>
-          </a:p>
-        </p:txBody>
-      </p:sp>
-      <p:sp>
-        <p:nvSpPr>
-          <p:cNvPr id="5" name="内容占位符 4"/>
-          <p:cNvSpPr>
-            <a:spLocks noGrp="1"/>
-          </p:cNvSpPr>
-          <p:nvPr>
-            <p:ph idx="1"/>
-          </p:nvPr>
-        </p:nvSpPr>
-        <p:spPr/>
-        <p:txBody>
-          <a:bodyPr>
-            <a:normAutofit lnSpcReduction="10000"/>
-          </a:bodyPr>
-          <a:p>
-            <a:r>
-              <a:rPr lang="en-US" altLang="zh-CN"/>
-              <a:t>References</a:t>
-            </a:r>
-            <a:endParaRPr lang="en-US" altLang="zh-CN"/>
-          </a:p>
-          <a:p>
-            <a:pPr lvl="1"/>
-            <a:r>
-              <a:rPr lang="en-US" altLang="zh-CN"/>
-              <a:t>https://www.webpagetest.org/</a:t>
-            </a:r>
-            <a:endParaRPr lang="en-US" altLang="zh-CN"/>
-          </a:p>
-          <a:p>
-            <a:pPr lvl="1"/>
-            <a:r>
-              <a:rPr lang="en-US" altLang="zh-CN"/>
-              <a:t>https://web.dev/fast/#optimize-webfonts</a:t>
-            </a:r>
-            <a:endParaRPr lang="en-US" altLang="zh-CN"/>
-          </a:p>
-          <a:p>
-            <a:pPr lvl="1"/>
-            <a:r>
-              <a:rPr lang="en-US" altLang="zh-CN"/>
-              <a:t>https://developer.mozilla.org/en-US/docs/Learn/Performance/CSS</a:t>
-            </a:r>
-            <a:endParaRPr lang="en-US" altLang="zh-CN"/>
-          </a:p>
-          <a:p>
-            <a:pPr lvl="1"/>
-            <a:r>
-              <a:rPr lang="en-US" altLang="zh-CN">
-                <a:sym typeface="+mn-ea"/>
-              </a:rPr>
-              <a:t>https://developer.mozilla.org/en-US/docs/Web/Performance/Lazy_loading</a:t>
-            </a:r>
-            <a:endParaRPr lang="en-US" altLang="zh-CN">
-              <a:sym typeface="+mn-ea"/>
-            </a:endParaRPr>
-          </a:p>
-          <a:p>
-            <a:pPr lvl="1"/>
-            <a:r>
-              <a:rPr lang="en-US" altLang="zh-CN"/>
-              <a:t>https://phoenixnap.com/kb/reduce-server-response-time</a:t>
-            </a:r>
-            <a:endParaRPr lang="en-US" altLang="zh-CN"/>
-          </a:p>
-          <a:p>
-            <a:pPr lvl="1"/>
-            <a:r>
-              <a:rPr lang="en-US" altLang="zh-CN"/>
-              <a:t>https://phoenixnap.com/kb/best-website-speed-performance-test-tools#ftoc-4-varvy-pagespeed-optimmization</a:t>
-            </a:r>
-            <a:endParaRPr lang="en-US" altLang="zh-CN"/>
-          </a:p>
-          <a:p>
-            <a:pPr lvl="0"/>
-            <a:r>
-              <a:rPr lang="en-US" altLang="zh-CN"/>
-              <a:t>Lazy loading</a:t>
-            </a:r>
-            <a:endParaRPr lang="en-US" altLang="zh-CN"/>
-          </a:p>
-          <a:p>
-            <a:pPr lvl="1"/>
-            <a:r>
-              <a:rPr lang="en-US" altLang="zh-CN"/>
-              <a:t>JS</a:t>
-            </a:r>
-            <a:endParaRPr lang="en-US" altLang="zh-CN"/>
-          </a:p>
-          <a:p>
-            <a:pPr lvl="2"/>
-            <a:r>
-              <a:rPr lang="en-US" altLang="zh-CN"/>
-              <a:t>type=”module”</a:t>
-            </a:r>
-            <a:endParaRPr lang="en-US" altLang="zh-CN"/>
-          </a:p>
-          <a:p>
-            <a:pPr lvl="1"/>
-            <a:r>
-              <a:rPr lang="en-US" altLang="zh-CN"/>
-              <a:t>CSS</a:t>
-            </a:r>
-            <a:endParaRPr lang="en-US" altLang="zh-CN"/>
-          </a:p>
-          <a:p>
-            <a:pPr lvl="1"/>
-            <a:r>
-              <a:rPr lang="en-US" altLang="zh-CN"/>
-              <a:t>Images</a:t>
-            </a:r>
-            <a:endParaRPr lang="en-US" altLang="zh-CN"/>
-          </a:p>
-          <a:p>
-            <a:pPr lvl="2"/>
-            <a:r>
-              <a:rPr lang="en-US" altLang="zh-CN"/>
-              <a:t>&lt;img loading=”lazy”&gt;</a:t>
-            </a:r>
-            <a:endParaRPr lang="en-US" altLang="zh-CN"/>
-          </a:p>
-        </p:txBody>
-      </p:sp>
-    </p:spTree>
-    <p:custDataLst>
-      <p:tags r:id="rId1"/>
-    </p:custDataLst>
-  </p:cSld>
-  <p:clrMapOvr>
-    <a:masterClrMapping/>
-  </p:clrMapOvr>
-</p:sld>
-</file>
-
-<file path=ppt/slides/slide27.xml><?xml version="1.0" encoding="utf-8"?>
-<p:sld xmlns:a="http://schemas.openxmlformats.org/drawingml/2006/main" xmlns:r="http://schemas.openxmlformats.org/officeDocument/2006/relationships" xmlns:p="http://schemas.openxmlformats.org/presentationml/2006/main">
-  <p:cSld>
-    <p:spTree>
-      <p:nvGrpSpPr>
-        <p:cNvPr id="1" name=""/>
-        <p:cNvGrpSpPr/>
-        <p:nvPr/>
-      </p:nvGrpSpPr>
-      <p:grpSpPr/>
-      <p:sp>
-        <p:nvSpPr>
-          <p:cNvPr id="4" name="标题 3"/>
-          <p:cNvSpPr>
-            <a:spLocks noGrp="1"/>
-          </p:cNvSpPr>
-          <p:nvPr>
-            <p:ph type="title"/>
-          </p:nvPr>
-        </p:nvSpPr>
-        <p:spPr/>
-        <p:txBody>
-          <a:bodyPr/>
-          <a:p>
-            <a:r>
-              <a:rPr lang="en-US" altLang="zh-CN"/>
-              <a:t>FAQ</a:t>
-            </a:r>
-            <a:endParaRPr lang="en-US" altLang="zh-CN"/>
-          </a:p>
-        </p:txBody>
-      </p:sp>
-      <p:sp>
-        <p:nvSpPr>
-          <p:cNvPr id="5" name="文本占位符 4"/>
-          <p:cNvSpPr>
-            <a:spLocks noGrp="1"/>
-          </p:cNvSpPr>
-          <p:nvPr>
-            <p:ph type="body" idx="1"/>
-          </p:nvPr>
-        </p:nvSpPr>
-        <p:spPr/>
-        <p:txBody>
-          <a:bodyPr/>
-          <a:p>
-            <a:endParaRPr lang="zh-CN" altLang="en-US"/>
-          </a:p>
-        </p:txBody>
-      </p:sp>
-    </p:spTree>
-    <p:custDataLst>
-      <p:tags r:id="rId1"/>
-    </p:custDataLst>
-  </p:cSld>
-  <p:clrMapOvr>
-    <a:masterClrMapping/>
-  </p:clrMapOvr>
-</p:sld>
-</file>
-
-<file path=ppt/slides/slide28.xml><?xml version="1.0" encoding="utf-8"?>
-<p:sld xmlns:a="http://schemas.openxmlformats.org/drawingml/2006/main" xmlns:r="http://schemas.openxmlformats.org/officeDocument/2006/relationships" xmlns:p="http://schemas.openxmlformats.org/presentationml/2006/main">
-  <p:cSld>
-    <p:spTree>
-      <p:nvGrpSpPr>
-        <p:cNvPr id="1" name=""/>
-        <p:cNvGrpSpPr/>
-        <p:nvPr/>
-      </p:nvGrpSpPr>
-      <p:grpSpPr/>
-      <p:sp>
-        <p:nvSpPr>
-          <p:cNvPr id="2" name="标题 1"/>
-          <p:cNvSpPr>
-            <a:spLocks noGrp="1"/>
-          </p:cNvSpPr>
-          <p:nvPr>
-            <p:ph type="title"/>
-          </p:nvPr>
-        </p:nvSpPr>
-        <p:spPr/>
-        <p:txBody>
-          <a:bodyPr/>
-          <a:p>
-            <a:r>
-              <a:rPr lang="en-US" altLang="zh-CN"/>
-              <a:t>Avoid Auto Change Into HTTPS</a:t>
+              <a:t>Telegram</a:t>
             </a:r>
             <a:endParaRPr lang="en-US" altLang="zh-CN"/>
           </a:p>
@@ -7829,7 +7287,7 @@
         <p:spPr>
           <a:xfrm>
             <a:off x="838200" y="1211580"/>
-            <a:ext cx="5975350" cy="4549140"/>
+            <a:ext cx="5661025" cy="4549140"/>
           </a:xfrm>
         </p:spPr>
         <p:txBody>
@@ -7837,31 +7295,23 @@
           <a:p>
             <a:r>
               <a:rPr lang="en-US" altLang="zh-CN"/>
-              <a:t>References</a:t>
-            </a:r>
-            <a:endParaRPr lang="en-US" altLang="zh-CN"/>
-          </a:p>
-          <a:p>
-            <a:pPr lvl="1"/>
-            <a:r>
-              <a:rPr lang="en-US" altLang="zh-CN"/>
-              <a:t>https://www.cnblogs.com/colder/p/18072929</a:t>
-            </a:r>
-            <a:endParaRPr lang="en-US" altLang="zh-CN"/>
-          </a:p>
-          <a:p>
-            <a:pPr lvl="0"/>
-            <a:r>
-              <a:rPr lang="en-US" altLang="zh-CN"/>
-              <a:t>Step</a:t>
-            </a:r>
-            <a:endParaRPr lang="en-US" altLang="zh-CN"/>
-          </a:p>
-          <a:p>
-            <a:pPr lvl="1"/>
-            <a:r>
-              <a:rPr lang="en-US" altLang="zh-CN"/>
-              <a:t>Chrome</a:t>
+              <a:t>APIs</a:t>
+            </a:r>
+            <a:endParaRPr lang="en-US" altLang="zh-CN"/>
+          </a:p>
+          <a:p>
+            <a:pPr lvl="1"/>
+            <a:r>
+              <a:rPr lang="en-US" altLang="zh-CN"/>
+              <a:t>https://core.telegram.org/api</a:t>
+            </a:r>
+            <a:endParaRPr lang="en-US" altLang="zh-CN"/>
+          </a:p>
+          <a:p>
+            <a:pPr lvl="1"/>
+            <a:r>
+              <a:rPr lang="en-US" altLang="zh-CN"/>
+              <a:t>3 ways</a:t>
             </a:r>
             <a:endParaRPr lang="en-US" altLang="zh-CN"/>
           </a:p>
@@ -7869,7 +7319,15 @@
             <a:pPr lvl="2"/>
             <a:r>
               <a:rPr lang="en-US" altLang="zh-CN"/>
-              <a:t>地址栏中输入chrome://net-internals/#hsts</a:t>
+              <a:t>Bot APIs</a:t>
+            </a:r>
+            <a:endParaRPr lang="en-US" altLang="zh-CN"/>
+          </a:p>
+          <a:p>
+            <a:pPr lvl="3"/>
+            <a:r>
+              <a:rPr lang="en-US" altLang="zh-CN"/>
+              <a:t>bots are small applications that run entirely within the Telegram app.</a:t>
             </a:r>
             <a:endParaRPr lang="en-US" altLang="zh-CN"/>
           </a:p>
@@ -7877,31 +7335,15 @@
             <a:pPr lvl="2"/>
             <a:r>
               <a:rPr lang="en-US" altLang="zh-CN"/>
-              <a:t>在Delete domain security policies中输入项目的域名，并Delete（删除）</a:t>
-            </a:r>
-            <a:endParaRPr lang="en-US" altLang="zh-CN"/>
-          </a:p>
-          <a:p>
-            <a:pPr lvl="1"/>
-            <a:r>
-              <a:rPr lang="en-US" altLang="zh-CN"/>
-              <a:t>Edge</a:t>
-            </a:r>
-            <a:endParaRPr lang="en-US" altLang="zh-CN"/>
-          </a:p>
-          <a:p>
-            <a:pPr lvl="2"/>
-            <a:r>
-              <a:rPr lang="en-US" altLang="zh-CN"/>
-              <a:t>地址栏中输入edge://net-internals/#hsts</a:t>
-            </a:r>
-            <a:endParaRPr lang="en-US" altLang="zh-CN"/>
-          </a:p>
-          <a:p>
-            <a:pPr lvl="2"/>
-            <a:r>
-              <a:rPr lang="en-US" altLang="zh-CN"/>
-              <a:t>在Delete domain security policies中输入项目的域名，并Delete（删除）</a:t>
+              <a:t>TDLib &amp; Telegram APIs</a:t>
+            </a:r>
+            <a:endParaRPr lang="en-US" altLang="zh-CN"/>
+          </a:p>
+          <a:p>
+            <a:pPr lvl="3"/>
+            <a:r>
+              <a:rPr lang="en-US" altLang="zh-CN"/>
+              <a:t>a tool for third-party developers that makes it easy to build fast, secure and feature-rich Telegram apps</a:t>
             </a:r>
             <a:endParaRPr lang="en-US" altLang="zh-CN"/>
           </a:p>
@@ -7944,7 +7386,982 @@
           <a:p>
             <a:r>
               <a:rPr lang="en-US" altLang="zh-CN"/>
-              <a:t>Common Errors</a:t>
+              <a:t>HTTP Status Code</a:t>
+            </a:r>
+            <a:endParaRPr lang="en-US" altLang="zh-CN"/>
+          </a:p>
+        </p:txBody>
+      </p:sp>
+      <p:sp>
+        <p:nvSpPr>
+          <p:cNvPr id="4" name="文本框 3"/>
+          <p:cNvSpPr txBox="1"/>
+          <p:nvPr/>
+        </p:nvSpPr>
+        <p:spPr>
+          <a:xfrm>
+            <a:off x="723900" y="1078230"/>
+            <a:ext cx="3288665" cy="5692775"/>
+          </a:xfrm>
+          <a:prstGeom prst="rect">
+            <a:avLst/>
+          </a:prstGeom>
+          <a:noFill/>
+        </p:spPr>
+        <p:txBody>
+          <a:bodyPr wrap="square" rtlCol="0">
+            <a:spAutoFit/>
+          </a:bodyPr>
+          <a:p>
+            <a:r>
+              <a:rPr lang="zh-CN" altLang="en-US" sz="1400"/>
+              <a:t>    1×× Informational</a:t>
+            </a:r>
+            <a:endParaRPr lang="zh-CN" altLang="en-US" sz="1400"/>
+          </a:p>
+          <a:p>
+            <a:r>
+              <a:rPr lang="zh-CN" altLang="en-US" sz="1400"/>
+              <a:t>    100 Continue</a:t>
+            </a:r>
+            <a:endParaRPr lang="zh-CN" altLang="en-US" sz="1400"/>
+          </a:p>
+          <a:p>
+            <a:r>
+              <a:rPr lang="zh-CN" altLang="en-US" sz="1400"/>
+              <a:t>    101 Switching Protocols</a:t>
+            </a:r>
+            <a:endParaRPr lang="zh-CN" altLang="en-US" sz="1400"/>
+          </a:p>
+          <a:p>
+            <a:r>
+              <a:rPr lang="zh-CN" altLang="en-US" sz="1400"/>
+              <a:t>    102 Processing</a:t>
+            </a:r>
+            <a:endParaRPr lang="zh-CN" altLang="en-US" sz="1400"/>
+          </a:p>
+          <a:p>
+            <a:endParaRPr lang="zh-CN" altLang="en-US" sz="1400"/>
+          </a:p>
+          <a:p>
+            <a:r>
+              <a:rPr lang="zh-CN" altLang="en-US" sz="1400"/>
+              <a:t>    2×× Success</a:t>
+            </a:r>
+            <a:endParaRPr lang="zh-CN" altLang="en-US" sz="1400"/>
+          </a:p>
+          <a:p>
+            <a:r>
+              <a:rPr lang="zh-CN" altLang="en-US" sz="1400"/>
+              <a:t>    200 OK</a:t>
+            </a:r>
+            <a:endParaRPr lang="zh-CN" altLang="en-US" sz="1400"/>
+          </a:p>
+          <a:p>
+            <a:r>
+              <a:rPr lang="zh-CN" altLang="en-US" sz="1400"/>
+              <a:t>    201 Created</a:t>
+            </a:r>
+            <a:endParaRPr lang="zh-CN" altLang="en-US" sz="1400"/>
+          </a:p>
+          <a:p>
+            <a:r>
+              <a:rPr lang="zh-CN" altLang="en-US" sz="1400"/>
+              <a:t>    202 Accepted</a:t>
+            </a:r>
+            <a:endParaRPr lang="zh-CN" altLang="en-US" sz="1400"/>
+          </a:p>
+          <a:p>
+            <a:r>
+              <a:rPr lang="zh-CN" altLang="en-US" sz="1400"/>
+              <a:t>    203 Non-authoritative Information</a:t>
+            </a:r>
+            <a:endParaRPr lang="zh-CN" altLang="en-US" sz="1400"/>
+          </a:p>
+          <a:p>
+            <a:r>
+              <a:rPr lang="zh-CN" altLang="en-US" sz="1400"/>
+              <a:t>    204 No Content</a:t>
+            </a:r>
+            <a:endParaRPr lang="zh-CN" altLang="en-US" sz="1400"/>
+          </a:p>
+          <a:p>
+            <a:r>
+              <a:rPr lang="zh-CN" altLang="en-US" sz="1400"/>
+              <a:t>    205 Reset Content</a:t>
+            </a:r>
+            <a:endParaRPr lang="zh-CN" altLang="en-US" sz="1400"/>
+          </a:p>
+          <a:p>
+            <a:r>
+              <a:rPr lang="zh-CN" altLang="en-US" sz="1400"/>
+              <a:t>    206 Partial Content</a:t>
+            </a:r>
+            <a:endParaRPr lang="zh-CN" altLang="en-US" sz="1400"/>
+          </a:p>
+          <a:p>
+            <a:r>
+              <a:rPr lang="zh-CN" altLang="en-US" sz="1400"/>
+              <a:t>    207 Multi-Status</a:t>
+            </a:r>
+            <a:endParaRPr lang="zh-CN" altLang="en-US" sz="1400"/>
+          </a:p>
+          <a:p>
+            <a:r>
+              <a:rPr lang="zh-CN" altLang="en-US" sz="1400"/>
+              <a:t>    208 Already Reported</a:t>
+            </a:r>
+            <a:endParaRPr lang="zh-CN" altLang="en-US" sz="1400"/>
+          </a:p>
+          <a:p>
+            <a:r>
+              <a:rPr lang="zh-CN" altLang="en-US" sz="1400"/>
+              <a:t>    226 IM Used</a:t>
+            </a:r>
+            <a:endParaRPr lang="zh-CN" altLang="en-US" sz="1400"/>
+          </a:p>
+          <a:p>
+            <a:endParaRPr lang="zh-CN" altLang="en-US" sz="1400"/>
+          </a:p>
+          <a:p>
+            <a:r>
+              <a:rPr lang="zh-CN" altLang="en-US" sz="1400"/>
+              <a:t>    3×× Redirection</a:t>
+            </a:r>
+            <a:endParaRPr lang="zh-CN" altLang="en-US" sz="1400"/>
+          </a:p>
+          <a:p>
+            <a:r>
+              <a:rPr lang="zh-CN" altLang="en-US" sz="1400"/>
+              <a:t>    300 Multiple Choices</a:t>
+            </a:r>
+            <a:endParaRPr lang="zh-CN" altLang="en-US" sz="1400"/>
+          </a:p>
+          <a:p>
+            <a:r>
+              <a:rPr lang="zh-CN" altLang="en-US" sz="1400"/>
+              <a:t>    301 Moved Permanently</a:t>
+            </a:r>
+            <a:endParaRPr lang="zh-CN" altLang="en-US" sz="1400"/>
+          </a:p>
+          <a:p>
+            <a:r>
+              <a:rPr lang="zh-CN" altLang="en-US" sz="1400"/>
+              <a:t>    302 Found</a:t>
+            </a:r>
+            <a:endParaRPr lang="zh-CN" altLang="en-US" sz="1400"/>
+          </a:p>
+          <a:p>
+            <a:r>
+              <a:rPr lang="zh-CN" altLang="en-US" sz="1400"/>
+              <a:t>    303 See Other</a:t>
+            </a:r>
+            <a:endParaRPr lang="zh-CN" altLang="en-US" sz="1400"/>
+          </a:p>
+          <a:p>
+            <a:r>
+              <a:rPr lang="zh-CN" altLang="en-US" sz="1400"/>
+              <a:t>    304 Not Modified</a:t>
+            </a:r>
+            <a:endParaRPr lang="zh-CN" altLang="en-US" sz="1400"/>
+          </a:p>
+          <a:p>
+            <a:r>
+              <a:rPr lang="zh-CN" altLang="en-US" sz="1400"/>
+              <a:t>    305 Use Proxy</a:t>
+            </a:r>
+            <a:endParaRPr lang="zh-CN" altLang="en-US" sz="1400"/>
+          </a:p>
+          <a:p>
+            <a:r>
+              <a:rPr lang="zh-CN" altLang="en-US" sz="1400"/>
+              <a:t>    307 Temporary Redirect</a:t>
+            </a:r>
+            <a:endParaRPr lang="zh-CN" altLang="en-US" sz="1400"/>
+          </a:p>
+          <a:p>
+            <a:r>
+              <a:rPr lang="zh-CN" altLang="en-US" sz="1400"/>
+              <a:t>    308 Permanent Redirect</a:t>
+            </a:r>
+            <a:endParaRPr lang="zh-CN" altLang="en-US" sz="1400"/>
+          </a:p>
+        </p:txBody>
+      </p:sp>
+      <p:sp>
+        <p:nvSpPr>
+          <p:cNvPr id="5" name="文本框 4"/>
+          <p:cNvSpPr txBox="1"/>
+          <p:nvPr/>
+        </p:nvSpPr>
+        <p:spPr>
+          <a:xfrm>
+            <a:off x="4012565" y="1078230"/>
+            <a:ext cx="3818890" cy="5815965"/>
+          </a:xfrm>
+          <a:prstGeom prst="rect">
+            <a:avLst/>
+          </a:prstGeom>
+          <a:noFill/>
+        </p:spPr>
+        <p:txBody>
+          <a:bodyPr wrap="square" rtlCol="0">
+            <a:spAutoFit/>
+          </a:bodyPr>
+          <a:p>
+            <a:r>
+              <a:rPr lang="zh-CN" altLang="en-US" sz="1200">
+                <a:sym typeface="+mn-ea"/>
+              </a:rPr>
+              <a:t>    4×× Client Error</a:t>
+            </a:r>
+            <a:endParaRPr lang="zh-CN" altLang="en-US" sz="1200"/>
+          </a:p>
+          <a:p>
+            <a:r>
+              <a:rPr lang="zh-CN" altLang="en-US" sz="1200">
+                <a:sym typeface="+mn-ea"/>
+              </a:rPr>
+              <a:t>    400 Bad Request</a:t>
+            </a:r>
+            <a:endParaRPr lang="zh-CN" altLang="en-US" sz="1200"/>
+          </a:p>
+          <a:p>
+            <a:r>
+              <a:rPr lang="zh-CN" altLang="en-US" sz="1200">
+                <a:sym typeface="+mn-ea"/>
+              </a:rPr>
+              <a:t>    401 Unauthorized</a:t>
+            </a:r>
+            <a:endParaRPr lang="zh-CN" altLang="en-US" sz="1200"/>
+          </a:p>
+          <a:p>
+            <a:r>
+              <a:rPr lang="zh-CN" altLang="en-US" sz="1200">
+                <a:sym typeface="+mn-ea"/>
+              </a:rPr>
+              <a:t>    402 Payment Required</a:t>
+            </a:r>
+            <a:endParaRPr lang="zh-CN" altLang="en-US" sz="1200"/>
+          </a:p>
+          <a:p>
+            <a:r>
+              <a:rPr lang="zh-CN" altLang="en-US" sz="1200">
+                <a:sym typeface="+mn-ea"/>
+              </a:rPr>
+              <a:t>    403 Forbidden</a:t>
+            </a:r>
+            <a:endParaRPr lang="zh-CN" altLang="en-US" sz="1200"/>
+          </a:p>
+          <a:p>
+            <a:r>
+              <a:rPr lang="zh-CN" altLang="en-US" sz="1200">
+                <a:sym typeface="+mn-ea"/>
+              </a:rPr>
+              <a:t>    404 Not Found</a:t>
+            </a:r>
+            <a:endParaRPr lang="zh-CN" altLang="en-US" sz="1200"/>
+          </a:p>
+          <a:p>
+            <a:r>
+              <a:rPr lang="zh-CN" altLang="en-US" sz="1200">
+                <a:sym typeface="+mn-ea"/>
+              </a:rPr>
+              <a:t>    405 Method Not Allowed</a:t>
+            </a:r>
+            <a:endParaRPr lang="zh-CN" altLang="en-US" sz="1200"/>
+          </a:p>
+          <a:p>
+            <a:r>
+              <a:rPr lang="zh-CN" altLang="en-US" sz="1200">
+                <a:sym typeface="+mn-ea"/>
+              </a:rPr>
+              <a:t>    406 Not Acceptable</a:t>
+            </a:r>
+            <a:endParaRPr lang="zh-CN" altLang="en-US" sz="1200"/>
+          </a:p>
+          <a:p>
+            <a:r>
+              <a:rPr lang="zh-CN" altLang="en-US" sz="1200">
+                <a:sym typeface="+mn-ea"/>
+              </a:rPr>
+              <a:t>    407 Proxy Authentication Required</a:t>
+            </a:r>
+            <a:endParaRPr lang="zh-CN" altLang="en-US" sz="1200"/>
+          </a:p>
+          <a:p>
+            <a:r>
+              <a:rPr lang="zh-CN" altLang="en-US" sz="1200">
+                <a:sym typeface="+mn-ea"/>
+              </a:rPr>
+              <a:t>    408 Request Timeout</a:t>
+            </a:r>
+            <a:endParaRPr lang="zh-CN" altLang="en-US" sz="1200"/>
+          </a:p>
+          <a:p>
+            <a:r>
+              <a:rPr lang="zh-CN" altLang="en-US" sz="1200">
+                <a:sym typeface="+mn-ea"/>
+              </a:rPr>
+              <a:t>    409 Conflict</a:t>
+            </a:r>
+            <a:endParaRPr lang="zh-CN" altLang="en-US" sz="1200"/>
+          </a:p>
+          <a:p>
+            <a:r>
+              <a:rPr lang="zh-CN" altLang="en-US" sz="1200">
+                <a:sym typeface="+mn-ea"/>
+              </a:rPr>
+              <a:t>    410 Gone</a:t>
+            </a:r>
+            <a:endParaRPr lang="zh-CN" altLang="en-US" sz="1200"/>
+          </a:p>
+          <a:p>
+            <a:r>
+              <a:rPr lang="zh-CN" altLang="en-US" sz="1200">
+                <a:sym typeface="+mn-ea"/>
+              </a:rPr>
+              <a:t>    411 Length Required</a:t>
+            </a:r>
+            <a:endParaRPr lang="zh-CN" altLang="en-US" sz="1200"/>
+          </a:p>
+          <a:p>
+            <a:r>
+              <a:rPr lang="zh-CN" altLang="en-US" sz="1200">
+                <a:sym typeface="+mn-ea"/>
+              </a:rPr>
+              <a:t>    412 Precondition Failed</a:t>
+            </a:r>
+            <a:endParaRPr lang="zh-CN" altLang="en-US" sz="1200"/>
+          </a:p>
+          <a:p>
+            <a:r>
+              <a:rPr lang="zh-CN" altLang="en-US" sz="1200">
+                <a:sym typeface="+mn-ea"/>
+              </a:rPr>
+              <a:t>    413 Payload Too Large</a:t>
+            </a:r>
+            <a:endParaRPr lang="zh-CN" altLang="en-US" sz="1200"/>
+          </a:p>
+          <a:p>
+            <a:r>
+              <a:rPr lang="zh-CN" altLang="en-US" sz="1200">
+                <a:sym typeface="+mn-ea"/>
+              </a:rPr>
+              <a:t>    414 Request-URI Too Long</a:t>
+            </a:r>
+            <a:endParaRPr lang="zh-CN" altLang="en-US" sz="1200"/>
+          </a:p>
+          <a:p>
+            <a:r>
+              <a:rPr lang="zh-CN" altLang="en-US" sz="1200">
+                <a:sym typeface="+mn-ea"/>
+              </a:rPr>
+              <a:t>    415 Unsupported Media Type</a:t>
+            </a:r>
+            <a:endParaRPr lang="zh-CN" altLang="en-US" sz="1200"/>
+          </a:p>
+          <a:p>
+            <a:r>
+              <a:rPr lang="zh-CN" altLang="en-US" sz="1200">
+                <a:sym typeface="+mn-ea"/>
+              </a:rPr>
+              <a:t>    416 Requested Range Not Satisfiable</a:t>
+            </a:r>
+            <a:endParaRPr lang="zh-CN" altLang="en-US" sz="1200"/>
+          </a:p>
+          <a:p>
+            <a:r>
+              <a:rPr lang="zh-CN" altLang="en-US" sz="1200">
+                <a:sym typeface="+mn-ea"/>
+              </a:rPr>
+              <a:t>    417 Expectation Failed</a:t>
+            </a:r>
+            <a:endParaRPr lang="zh-CN" altLang="en-US" sz="1200"/>
+          </a:p>
+          <a:p>
+            <a:r>
+              <a:rPr lang="zh-CN" altLang="en-US" sz="1200">
+                <a:sym typeface="+mn-ea"/>
+              </a:rPr>
+              <a:t>    418 I'm a teapot</a:t>
+            </a:r>
+            <a:endParaRPr lang="zh-CN" altLang="en-US" sz="1200"/>
+          </a:p>
+          <a:p>
+            <a:r>
+              <a:rPr lang="zh-CN" altLang="en-US" sz="1200">
+                <a:sym typeface="+mn-ea"/>
+              </a:rPr>
+              <a:t>    421 Misdirected Request</a:t>
+            </a:r>
+            <a:endParaRPr lang="zh-CN" altLang="en-US" sz="1200"/>
+          </a:p>
+          <a:p>
+            <a:r>
+              <a:rPr lang="zh-CN" altLang="en-US" sz="1200">
+                <a:sym typeface="+mn-ea"/>
+              </a:rPr>
+              <a:t>    422 Unprocessable Entity</a:t>
+            </a:r>
+            <a:endParaRPr lang="zh-CN" altLang="en-US" sz="1200"/>
+          </a:p>
+          <a:p>
+            <a:r>
+              <a:rPr lang="zh-CN" altLang="en-US" sz="1200">
+                <a:sym typeface="+mn-ea"/>
+              </a:rPr>
+              <a:t>    423 Locked</a:t>
+            </a:r>
+            <a:endParaRPr lang="zh-CN" altLang="en-US" sz="1200"/>
+          </a:p>
+          <a:p>
+            <a:r>
+              <a:rPr lang="zh-CN" altLang="en-US" sz="1200">
+                <a:sym typeface="+mn-ea"/>
+              </a:rPr>
+              <a:t>    424 Failed Dependency</a:t>
+            </a:r>
+            <a:endParaRPr lang="zh-CN" altLang="en-US" sz="1200"/>
+          </a:p>
+          <a:p>
+            <a:r>
+              <a:rPr lang="zh-CN" altLang="en-US" sz="1200">
+                <a:sym typeface="+mn-ea"/>
+              </a:rPr>
+              <a:t>    426 Upgrade Required</a:t>
+            </a:r>
+            <a:endParaRPr lang="zh-CN" altLang="en-US" sz="1200"/>
+          </a:p>
+          <a:p>
+            <a:r>
+              <a:rPr lang="zh-CN" altLang="en-US" sz="1200">
+                <a:sym typeface="+mn-ea"/>
+              </a:rPr>
+              <a:t>    428 Precondition Required</a:t>
+            </a:r>
+            <a:endParaRPr lang="zh-CN" altLang="en-US" sz="1200"/>
+          </a:p>
+          <a:p>
+            <a:r>
+              <a:rPr lang="zh-CN" altLang="en-US" sz="1200">
+                <a:sym typeface="+mn-ea"/>
+              </a:rPr>
+              <a:t>    429 Too Many Requests</a:t>
+            </a:r>
+            <a:endParaRPr lang="zh-CN" altLang="en-US" sz="1200"/>
+          </a:p>
+          <a:p>
+            <a:r>
+              <a:rPr lang="zh-CN" altLang="en-US" sz="1200">
+                <a:sym typeface="+mn-ea"/>
+              </a:rPr>
+              <a:t>    431 Request Header Fields Too Large</a:t>
+            </a:r>
+            <a:endParaRPr lang="zh-CN" altLang="en-US" sz="1200"/>
+          </a:p>
+          <a:p>
+            <a:r>
+              <a:rPr lang="zh-CN" altLang="en-US" sz="1200">
+                <a:sym typeface="+mn-ea"/>
+              </a:rPr>
+              <a:t>    444 Connection Closed Without Response</a:t>
+            </a:r>
+            <a:endParaRPr lang="zh-CN" altLang="en-US" sz="1200"/>
+          </a:p>
+          <a:p>
+            <a:r>
+              <a:rPr lang="zh-CN" altLang="en-US" sz="1200">
+                <a:sym typeface="+mn-ea"/>
+              </a:rPr>
+              <a:t>    451 Unavailable For Legal Reasons</a:t>
+            </a:r>
+            <a:endParaRPr lang="zh-CN" altLang="en-US" sz="1200"/>
+          </a:p>
+          <a:p>
+            <a:r>
+              <a:rPr lang="zh-CN" altLang="en-US" sz="1200">
+                <a:sym typeface="+mn-ea"/>
+              </a:rPr>
+              <a:t>    499 Client Closed Request</a:t>
+            </a:r>
+            <a:endParaRPr lang="zh-CN" altLang="en-US" sz="1200">
+              <a:sym typeface="+mn-ea"/>
+            </a:endParaRPr>
+          </a:p>
+        </p:txBody>
+      </p:sp>
+      <p:sp>
+        <p:nvSpPr>
+          <p:cNvPr id="6" name="文本框 5"/>
+          <p:cNvSpPr txBox="1"/>
+          <p:nvPr/>
+        </p:nvSpPr>
+        <p:spPr>
+          <a:xfrm>
+            <a:off x="7995920" y="1042035"/>
+            <a:ext cx="3818890" cy="2676525"/>
+          </a:xfrm>
+          <a:prstGeom prst="rect">
+            <a:avLst/>
+          </a:prstGeom>
+          <a:noFill/>
+        </p:spPr>
+        <p:txBody>
+          <a:bodyPr wrap="square" rtlCol="0">
+            <a:spAutoFit/>
+          </a:bodyPr>
+          <a:p>
+            <a:endParaRPr lang="zh-CN" altLang="en-US" sz="1200"/>
+          </a:p>
+          <a:p>
+            <a:r>
+              <a:rPr lang="zh-CN" altLang="en-US" sz="1200">
+                <a:sym typeface="+mn-ea"/>
+              </a:rPr>
+              <a:t>    5×× Server Error</a:t>
+            </a:r>
+            <a:endParaRPr lang="zh-CN" altLang="en-US" sz="1200"/>
+          </a:p>
+          <a:p>
+            <a:r>
+              <a:rPr lang="zh-CN" altLang="en-US" sz="1200">
+                <a:sym typeface="+mn-ea"/>
+              </a:rPr>
+              <a:t>    500 Internal Server Error</a:t>
+            </a:r>
+            <a:endParaRPr lang="zh-CN" altLang="en-US" sz="1200"/>
+          </a:p>
+          <a:p>
+            <a:r>
+              <a:rPr lang="zh-CN" altLang="en-US" sz="1200">
+                <a:sym typeface="+mn-ea"/>
+              </a:rPr>
+              <a:t>    501 Not Implemented</a:t>
+            </a:r>
+            <a:endParaRPr lang="zh-CN" altLang="en-US" sz="1200"/>
+          </a:p>
+          <a:p>
+            <a:r>
+              <a:rPr lang="zh-CN" altLang="en-US" sz="1200">
+                <a:sym typeface="+mn-ea"/>
+              </a:rPr>
+              <a:t>    502 Bad Gateway</a:t>
+            </a:r>
+            <a:endParaRPr lang="zh-CN" altLang="en-US" sz="1200"/>
+          </a:p>
+          <a:p>
+            <a:r>
+              <a:rPr lang="zh-CN" altLang="en-US" sz="1200">
+                <a:sym typeface="+mn-ea"/>
+              </a:rPr>
+              <a:t>    503 Service Unavailable</a:t>
+            </a:r>
+            <a:endParaRPr lang="zh-CN" altLang="en-US" sz="1200"/>
+          </a:p>
+          <a:p>
+            <a:r>
+              <a:rPr lang="zh-CN" altLang="en-US" sz="1200">
+                <a:sym typeface="+mn-ea"/>
+              </a:rPr>
+              <a:t>    504 Gateway Timeout</a:t>
+            </a:r>
+            <a:endParaRPr lang="zh-CN" altLang="en-US" sz="1200"/>
+          </a:p>
+          <a:p>
+            <a:r>
+              <a:rPr lang="zh-CN" altLang="en-US" sz="1200">
+                <a:sym typeface="+mn-ea"/>
+              </a:rPr>
+              <a:t>    505 HTTP Version Not Supported</a:t>
+            </a:r>
+            <a:endParaRPr lang="zh-CN" altLang="en-US" sz="1200"/>
+          </a:p>
+          <a:p>
+            <a:r>
+              <a:rPr lang="zh-CN" altLang="en-US" sz="1200">
+                <a:sym typeface="+mn-ea"/>
+              </a:rPr>
+              <a:t>    506 Variant Also Negotiates</a:t>
+            </a:r>
+            <a:endParaRPr lang="zh-CN" altLang="en-US" sz="1200"/>
+          </a:p>
+          <a:p>
+            <a:r>
+              <a:rPr lang="zh-CN" altLang="en-US" sz="1200">
+                <a:sym typeface="+mn-ea"/>
+              </a:rPr>
+              <a:t>    507 Insufficient Storage</a:t>
+            </a:r>
+            <a:endParaRPr lang="zh-CN" altLang="en-US" sz="1200"/>
+          </a:p>
+          <a:p>
+            <a:r>
+              <a:rPr lang="zh-CN" altLang="en-US" sz="1200">
+                <a:sym typeface="+mn-ea"/>
+              </a:rPr>
+              <a:t>    508 Loop Detected</a:t>
+            </a:r>
+            <a:endParaRPr lang="zh-CN" altLang="en-US" sz="1200"/>
+          </a:p>
+          <a:p>
+            <a:r>
+              <a:rPr lang="zh-CN" altLang="en-US" sz="1200">
+                <a:sym typeface="+mn-ea"/>
+              </a:rPr>
+              <a:t>    510 Not Extended</a:t>
+            </a:r>
+            <a:endParaRPr lang="zh-CN" altLang="en-US" sz="1200"/>
+          </a:p>
+          <a:p>
+            <a:r>
+              <a:rPr lang="zh-CN" altLang="en-US" sz="1200">
+                <a:sym typeface="+mn-ea"/>
+              </a:rPr>
+              <a:t>    511 Network Authentication Required</a:t>
+            </a:r>
+            <a:endParaRPr lang="zh-CN" altLang="en-US" sz="1200"/>
+          </a:p>
+          <a:p>
+            <a:r>
+              <a:rPr lang="zh-CN" altLang="en-US" sz="1200">
+                <a:sym typeface="+mn-ea"/>
+              </a:rPr>
+              <a:t>    599 Network Connect Timeout Error</a:t>
+            </a:r>
+            <a:endParaRPr lang="zh-CN" altLang="en-US" sz="1200">
+              <a:sym typeface="+mn-ea"/>
+            </a:endParaRPr>
+          </a:p>
+        </p:txBody>
+      </p:sp>
+    </p:spTree>
+    <p:custDataLst>
+      <p:tags r:id="rId1"/>
+    </p:custDataLst>
+  </p:cSld>
+  <p:clrMapOvr>
+    <a:masterClrMapping/>
+  </p:clrMapOvr>
+</p:sld>
+</file>
+
+<file path=ppt/slides/slide30.xml><?xml version="1.0" encoding="utf-8"?>
+<p:sld xmlns:a="http://schemas.openxmlformats.org/drawingml/2006/main" xmlns:r="http://schemas.openxmlformats.org/officeDocument/2006/relationships" xmlns:p="http://schemas.openxmlformats.org/presentationml/2006/main">
+  <p:cSld>
+    <p:spTree>
+      <p:nvGrpSpPr>
+        <p:cNvPr id="1" name=""/>
+        <p:cNvGrpSpPr/>
+        <p:nvPr/>
+      </p:nvGrpSpPr>
+      <p:grpSpPr/>
+      <p:sp>
+        <p:nvSpPr>
+          <p:cNvPr id="4" name="标题 3"/>
+          <p:cNvSpPr>
+            <a:spLocks noGrp="1"/>
+          </p:cNvSpPr>
+          <p:nvPr>
+            <p:ph type="title"/>
+          </p:nvPr>
+        </p:nvSpPr>
+        <p:spPr/>
+        <p:txBody>
+          <a:bodyPr/>
+          <a:p>
+            <a:r>
+              <a:rPr lang="en-US" altLang="zh-CN"/>
+              <a:t>Performance</a:t>
+            </a:r>
+            <a:endParaRPr lang="en-US" altLang="zh-CN"/>
+          </a:p>
+        </p:txBody>
+      </p:sp>
+      <p:sp>
+        <p:nvSpPr>
+          <p:cNvPr id="5" name="文本占位符 4"/>
+          <p:cNvSpPr>
+            <a:spLocks noGrp="1"/>
+          </p:cNvSpPr>
+          <p:nvPr>
+            <p:ph type="body" idx="1"/>
+          </p:nvPr>
+        </p:nvSpPr>
+        <p:spPr/>
+        <p:txBody>
+          <a:bodyPr/>
+          <a:p>
+            <a:endParaRPr lang="zh-CN" altLang="en-US"/>
+          </a:p>
+        </p:txBody>
+      </p:sp>
+    </p:spTree>
+    <p:custDataLst>
+      <p:tags r:id="rId1"/>
+    </p:custDataLst>
+  </p:cSld>
+  <p:clrMapOvr>
+    <a:masterClrMapping/>
+  </p:clrMapOvr>
+</p:sld>
+</file>
+
+<file path=ppt/slides/slide31.xml><?xml version="1.0" encoding="utf-8"?>
+<p:sld xmlns:a="http://schemas.openxmlformats.org/drawingml/2006/main" xmlns:r="http://schemas.openxmlformats.org/officeDocument/2006/relationships" xmlns:p="http://schemas.openxmlformats.org/presentationml/2006/main">
+  <p:cSld>
+    <p:spTree>
+      <p:nvGrpSpPr>
+        <p:cNvPr id="1" name=""/>
+        <p:cNvGrpSpPr/>
+        <p:nvPr/>
+      </p:nvGrpSpPr>
+      <p:grpSpPr/>
+      <p:sp>
+        <p:nvSpPr>
+          <p:cNvPr id="4" name="标题 3"/>
+          <p:cNvSpPr>
+            <a:spLocks noGrp="1"/>
+          </p:cNvSpPr>
+          <p:nvPr>
+            <p:ph type="title"/>
+          </p:nvPr>
+        </p:nvSpPr>
+        <p:spPr/>
+        <p:txBody>
+          <a:bodyPr/>
+          <a:p>
+            <a:r>
+              <a:rPr lang="en-US" altLang="zh-CN"/>
+              <a:t>In General</a:t>
+            </a:r>
+            <a:endParaRPr lang="en-US" altLang="zh-CN"/>
+          </a:p>
+        </p:txBody>
+      </p:sp>
+      <p:sp>
+        <p:nvSpPr>
+          <p:cNvPr id="5" name="内容占位符 4"/>
+          <p:cNvSpPr>
+            <a:spLocks noGrp="1"/>
+          </p:cNvSpPr>
+          <p:nvPr>
+            <p:ph idx="1"/>
+          </p:nvPr>
+        </p:nvSpPr>
+        <p:spPr/>
+        <p:txBody>
+          <a:bodyPr>
+            <a:normAutofit lnSpcReduction="10000"/>
+          </a:bodyPr>
+          <a:p>
+            <a:r>
+              <a:rPr lang="en-US" altLang="zh-CN"/>
+              <a:t>References</a:t>
+            </a:r>
+            <a:endParaRPr lang="en-US" altLang="zh-CN"/>
+          </a:p>
+          <a:p>
+            <a:pPr lvl="1"/>
+            <a:r>
+              <a:rPr lang="en-US" altLang="zh-CN"/>
+              <a:t>https://www.webpagetest.org/</a:t>
+            </a:r>
+            <a:endParaRPr lang="en-US" altLang="zh-CN"/>
+          </a:p>
+          <a:p>
+            <a:pPr lvl="1"/>
+            <a:r>
+              <a:rPr lang="en-US" altLang="zh-CN"/>
+              <a:t>https://web.dev/fast/#optimize-webfonts</a:t>
+            </a:r>
+            <a:endParaRPr lang="en-US" altLang="zh-CN"/>
+          </a:p>
+          <a:p>
+            <a:pPr lvl="1"/>
+            <a:r>
+              <a:rPr lang="en-US" altLang="zh-CN"/>
+              <a:t>https://developer.mozilla.org/en-US/docs/Learn/Performance/CSS</a:t>
+            </a:r>
+            <a:endParaRPr lang="en-US" altLang="zh-CN"/>
+          </a:p>
+          <a:p>
+            <a:pPr lvl="1"/>
+            <a:r>
+              <a:rPr lang="en-US" altLang="zh-CN">
+                <a:sym typeface="+mn-ea"/>
+              </a:rPr>
+              <a:t>https://developer.mozilla.org/en-US/docs/Web/Performance/Lazy_loading</a:t>
+            </a:r>
+            <a:endParaRPr lang="en-US" altLang="zh-CN">
+              <a:sym typeface="+mn-ea"/>
+            </a:endParaRPr>
+          </a:p>
+          <a:p>
+            <a:pPr lvl="1"/>
+            <a:r>
+              <a:rPr lang="en-US" altLang="zh-CN"/>
+              <a:t>https://phoenixnap.com/kb/reduce-server-response-time</a:t>
+            </a:r>
+            <a:endParaRPr lang="en-US" altLang="zh-CN"/>
+          </a:p>
+          <a:p>
+            <a:pPr lvl="1"/>
+            <a:r>
+              <a:rPr lang="en-US" altLang="zh-CN"/>
+              <a:t>https://phoenixnap.com/kb/best-website-speed-performance-test-tools#ftoc-4-varvy-pagespeed-optimmization</a:t>
+            </a:r>
+            <a:endParaRPr lang="en-US" altLang="zh-CN"/>
+          </a:p>
+          <a:p>
+            <a:pPr lvl="0"/>
+            <a:r>
+              <a:rPr lang="en-US" altLang="zh-CN"/>
+              <a:t>Lazy loading</a:t>
+            </a:r>
+            <a:endParaRPr lang="en-US" altLang="zh-CN"/>
+          </a:p>
+          <a:p>
+            <a:pPr lvl="1"/>
+            <a:r>
+              <a:rPr lang="en-US" altLang="zh-CN"/>
+              <a:t>JS</a:t>
+            </a:r>
+            <a:endParaRPr lang="en-US" altLang="zh-CN"/>
+          </a:p>
+          <a:p>
+            <a:pPr lvl="2"/>
+            <a:r>
+              <a:rPr lang="en-US" altLang="zh-CN"/>
+              <a:t>type=”module”</a:t>
+            </a:r>
+            <a:endParaRPr lang="en-US" altLang="zh-CN"/>
+          </a:p>
+          <a:p>
+            <a:pPr lvl="1"/>
+            <a:r>
+              <a:rPr lang="en-US" altLang="zh-CN"/>
+              <a:t>CSS</a:t>
+            </a:r>
+            <a:endParaRPr lang="en-US" altLang="zh-CN"/>
+          </a:p>
+          <a:p>
+            <a:pPr lvl="1"/>
+            <a:r>
+              <a:rPr lang="en-US" altLang="zh-CN"/>
+              <a:t>Images</a:t>
+            </a:r>
+            <a:endParaRPr lang="en-US" altLang="zh-CN"/>
+          </a:p>
+          <a:p>
+            <a:pPr lvl="2"/>
+            <a:r>
+              <a:rPr lang="en-US" altLang="zh-CN"/>
+              <a:t>&lt;img loading=”lazy”&gt;</a:t>
+            </a:r>
+            <a:endParaRPr lang="en-US" altLang="zh-CN"/>
+          </a:p>
+        </p:txBody>
+      </p:sp>
+    </p:spTree>
+    <p:custDataLst>
+      <p:tags r:id="rId1"/>
+    </p:custDataLst>
+  </p:cSld>
+  <p:clrMapOvr>
+    <a:masterClrMapping/>
+  </p:clrMapOvr>
+</p:sld>
+</file>
+
+<file path=ppt/slides/slide32.xml><?xml version="1.0" encoding="utf-8"?>
+<p:sld xmlns:a="http://schemas.openxmlformats.org/drawingml/2006/main" xmlns:r="http://schemas.openxmlformats.org/officeDocument/2006/relationships" xmlns:p="http://schemas.openxmlformats.org/presentationml/2006/main">
+  <p:cSld>
+    <p:spTree>
+      <p:nvGrpSpPr>
+        <p:cNvPr id="1" name=""/>
+        <p:cNvGrpSpPr/>
+        <p:nvPr/>
+      </p:nvGrpSpPr>
+      <p:grpSpPr/>
+      <p:sp>
+        <p:nvSpPr>
+          <p:cNvPr id="4" name="标题 3"/>
+          <p:cNvSpPr>
+            <a:spLocks noGrp="1"/>
+          </p:cNvSpPr>
+          <p:nvPr>
+            <p:ph type="title"/>
+          </p:nvPr>
+        </p:nvSpPr>
+        <p:spPr/>
+        <p:txBody>
+          <a:bodyPr/>
+          <a:p>
+            <a:r>
+              <a:rPr lang="en-US" altLang="zh-CN"/>
+              <a:t>FAQ</a:t>
+            </a:r>
+            <a:endParaRPr lang="en-US" altLang="zh-CN"/>
+          </a:p>
+        </p:txBody>
+      </p:sp>
+      <p:sp>
+        <p:nvSpPr>
+          <p:cNvPr id="5" name="文本占位符 4"/>
+          <p:cNvSpPr>
+            <a:spLocks noGrp="1"/>
+          </p:cNvSpPr>
+          <p:nvPr>
+            <p:ph type="body" idx="1"/>
+          </p:nvPr>
+        </p:nvSpPr>
+        <p:spPr/>
+        <p:txBody>
+          <a:bodyPr/>
+          <a:p>
+            <a:endParaRPr lang="zh-CN" altLang="en-US"/>
+          </a:p>
+        </p:txBody>
+      </p:sp>
+    </p:spTree>
+    <p:custDataLst>
+      <p:tags r:id="rId1"/>
+    </p:custDataLst>
+  </p:cSld>
+  <p:clrMapOvr>
+    <a:masterClrMapping/>
+  </p:clrMapOvr>
+</p:sld>
+</file>
+
+<file path=ppt/slides/slide33.xml><?xml version="1.0" encoding="utf-8"?>
+<p:sld xmlns:a="http://schemas.openxmlformats.org/drawingml/2006/main" xmlns:r="http://schemas.openxmlformats.org/officeDocument/2006/relationships" xmlns:p="http://schemas.openxmlformats.org/presentationml/2006/main">
+  <p:cSld>
+    <p:spTree>
+      <p:nvGrpSpPr>
+        <p:cNvPr id="1" name=""/>
+        <p:cNvGrpSpPr/>
+        <p:nvPr/>
+      </p:nvGrpSpPr>
+      <p:grpSpPr/>
+      <p:sp>
+        <p:nvSpPr>
+          <p:cNvPr id="2" name="标题 1"/>
+          <p:cNvSpPr>
+            <a:spLocks noGrp="1"/>
+          </p:cNvSpPr>
+          <p:nvPr>
+            <p:ph type="title"/>
+          </p:nvPr>
+        </p:nvSpPr>
+        <p:spPr/>
+        <p:txBody>
+          <a:bodyPr/>
+          <a:p>
+            <a:r>
+              <a:rPr lang="en-US" altLang="zh-CN"/>
+              <a:t>Avoid Auto Change Into HTTPS</a:t>
             </a:r>
             <a:endParaRPr lang="en-US" altLang="zh-CN"/>
           </a:p>
@@ -7960,21 +8377,42 @@
             <p:ph idx="1"/>
           </p:nvPr>
         </p:nvSpPr>
-        <p:spPr/>
+        <p:spPr>
+          <a:xfrm>
+            <a:off x="838200" y="1211580"/>
+            <a:ext cx="5975350" cy="4549140"/>
+          </a:xfrm>
+        </p:spPr>
         <p:txBody>
           <a:bodyPr/>
           <a:p>
             <a:r>
-              <a:rPr lang="zh-CN" altLang="en-US"/>
-              <a:t>net::ERR_CONNECTION_RESET</a:t>
-            </a:r>
-            <a:endParaRPr lang="zh-CN" altLang="en-US"/>
-          </a:p>
-          <a:p>
-            <a:pPr lvl="1"/>
-            <a:r>
-              <a:rPr lang="en-US" altLang="zh-CN"/>
-              <a:t>Maybe setting of max upload file size</a:t>
+              <a:rPr lang="en-US" altLang="zh-CN"/>
+              <a:t>References</a:t>
+            </a:r>
+            <a:endParaRPr lang="en-US" altLang="zh-CN"/>
+          </a:p>
+          <a:p>
+            <a:pPr lvl="1"/>
+            <a:r>
+              <a:rPr lang="en-US" altLang="zh-CN"/>
+              <a:t>https://www.cnblogs.com/colder/p/18072929</a:t>
+            </a:r>
+            <a:endParaRPr lang="en-US" altLang="zh-CN"/>
+          </a:p>
+          <a:p>
+            <a:pPr lvl="0"/>
+            <a:r>
+              <a:rPr lang="en-US" altLang="zh-CN"/>
+              <a:t>Step</a:t>
+            </a:r>
+            <a:endParaRPr lang="en-US" altLang="zh-CN"/>
+          </a:p>
+          <a:p>
+            <a:pPr lvl="1"/>
+            <a:r>
+              <a:rPr lang="en-US" altLang="zh-CN"/>
+              <a:t>Chrome</a:t>
             </a:r>
             <a:endParaRPr lang="en-US" altLang="zh-CN"/>
           </a:p>
@@ -7982,7 +8420,39 @@
             <a:pPr lvl="2"/>
             <a:r>
               <a:rPr lang="en-US" altLang="zh-CN"/>
-              <a:t>e.g. nginx/sites-enabled/flask-project</a:t>
+              <a:t>地址栏中输入chrome://net-internals/#hsts</a:t>
+            </a:r>
+            <a:endParaRPr lang="en-US" altLang="zh-CN"/>
+          </a:p>
+          <a:p>
+            <a:pPr lvl="2"/>
+            <a:r>
+              <a:rPr lang="en-US" altLang="zh-CN"/>
+              <a:t>在Delete domain security policies中输入项目的域名，并Delete（删除）</a:t>
+            </a:r>
+            <a:endParaRPr lang="en-US" altLang="zh-CN"/>
+          </a:p>
+          <a:p>
+            <a:pPr lvl="1"/>
+            <a:r>
+              <a:rPr lang="en-US" altLang="zh-CN"/>
+              <a:t>Edge</a:t>
+            </a:r>
+            <a:endParaRPr lang="en-US" altLang="zh-CN"/>
+          </a:p>
+          <a:p>
+            <a:pPr lvl="2"/>
+            <a:r>
+              <a:rPr lang="en-US" altLang="zh-CN"/>
+              <a:t>地址栏中输入edge://net-internals/#hsts</a:t>
+            </a:r>
+            <a:endParaRPr lang="en-US" altLang="zh-CN"/>
+          </a:p>
+          <a:p>
+            <a:pPr lvl="2"/>
+            <a:r>
+              <a:rPr lang="en-US" altLang="zh-CN"/>
+              <a:t>在Delete domain security policies中输入项目的域名，并Delete（删除）</a:t>
             </a:r>
             <a:endParaRPr lang="en-US" altLang="zh-CN"/>
           </a:p>
@@ -8000,6 +8470,87 @@
 </file>
 
 <file path=ppt/slides/slide4.xml><?xml version="1.0" encoding="utf-8"?>
+<p:sld xmlns:a="http://schemas.openxmlformats.org/drawingml/2006/main" xmlns:r="http://schemas.openxmlformats.org/officeDocument/2006/relationships" xmlns:p="http://schemas.openxmlformats.org/presentationml/2006/main">
+  <p:cSld>
+    <p:spTree>
+      <p:nvGrpSpPr>
+        <p:cNvPr id="1" name=""/>
+        <p:cNvGrpSpPr/>
+        <p:nvPr/>
+      </p:nvGrpSpPr>
+      <p:grpSpPr/>
+      <p:sp>
+        <p:nvSpPr>
+          <p:cNvPr id="2" name="标题 1"/>
+          <p:cNvSpPr>
+            <a:spLocks noGrp="1"/>
+          </p:cNvSpPr>
+          <p:nvPr>
+            <p:ph type="title"/>
+          </p:nvPr>
+        </p:nvSpPr>
+        <p:spPr/>
+        <p:txBody>
+          <a:bodyPr/>
+          <a:p>
+            <a:r>
+              <a:rPr lang="en-US" altLang="zh-CN"/>
+              <a:t>Common Errors</a:t>
+            </a:r>
+            <a:endParaRPr lang="en-US" altLang="zh-CN"/>
+          </a:p>
+        </p:txBody>
+      </p:sp>
+      <p:sp>
+        <p:nvSpPr>
+          <p:cNvPr id="3" name="内容占位符 2"/>
+          <p:cNvSpPr>
+            <a:spLocks noGrp="1"/>
+          </p:cNvSpPr>
+          <p:nvPr>
+            <p:ph idx="1"/>
+          </p:nvPr>
+        </p:nvSpPr>
+        <p:spPr/>
+        <p:txBody>
+          <a:bodyPr/>
+          <a:p>
+            <a:r>
+              <a:rPr lang="zh-CN" altLang="en-US"/>
+              <a:t>net::ERR_CONNECTION_RESET</a:t>
+            </a:r>
+            <a:endParaRPr lang="zh-CN" altLang="en-US"/>
+          </a:p>
+          <a:p>
+            <a:pPr lvl="1"/>
+            <a:r>
+              <a:rPr lang="en-US" altLang="zh-CN"/>
+              <a:t>Maybe setting of max upload file size</a:t>
+            </a:r>
+            <a:endParaRPr lang="en-US" altLang="zh-CN"/>
+          </a:p>
+          <a:p>
+            <a:pPr lvl="2"/>
+            <a:r>
+              <a:rPr lang="en-US" altLang="zh-CN"/>
+              <a:t>e.g. nginx/sites-enabled/flask-project</a:t>
+            </a:r>
+            <a:endParaRPr lang="en-US" altLang="zh-CN"/>
+          </a:p>
+        </p:txBody>
+      </p:sp>
+    </p:spTree>
+    <p:custDataLst>
+      <p:tags r:id="rId1"/>
+    </p:custDataLst>
+  </p:cSld>
+  <p:clrMapOvr>
+    <a:masterClrMapping/>
+  </p:clrMapOvr>
+</p:sld>
+</file>
+
+<file path=ppt/slides/slide5.xml><?xml version="1.0" encoding="utf-8"?>
 <p:sld xmlns:a="http://schemas.openxmlformats.org/drawingml/2006/main" xmlns:r="http://schemas.openxmlformats.org/officeDocument/2006/relationships" xmlns:p="http://schemas.openxmlformats.org/presentationml/2006/main">
   <p:cSld>
     <p:spTree>
@@ -8418,7 +8969,7 @@
 </p:sld>
 </file>
 
-<file path=ppt/slides/slide5.xml><?xml version="1.0" encoding="utf-8"?>
+<file path=ppt/slides/slide6.xml><?xml version="1.0" encoding="utf-8"?>
 <p:sld xmlns:a="http://schemas.openxmlformats.org/drawingml/2006/main" xmlns:r="http://schemas.openxmlformats.org/officeDocument/2006/relationships" xmlns:p="http://schemas.openxmlformats.org/presentationml/2006/main">
   <p:cSld>
     <p:spTree>
@@ -8928,7 +9479,7 @@
 </p:sld>
 </file>
 
-<file path=ppt/slides/slide6.xml><?xml version="1.0" encoding="utf-8"?>
+<file path=ppt/slides/slide7.xml><?xml version="1.0" encoding="utf-8"?>
 <p:sld xmlns:a="http://schemas.openxmlformats.org/drawingml/2006/main" xmlns:r="http://schemas.openxmlformats.org/officeDocument/2006/relationships" xmlns:p="http://schemas.openxmlformats.org/presentationml/2006/main">
   <p:cSld>
     <p:spTree>
@@ -9041,7 +9592,7 @@
 </p:sld>
 </file>
 
-<file path=ppt/slides/slide7.xml><?xml version="1.0" encoding="utf-8"?>
+<file path=ppt/slides/slide8.xml><?xml version="1.0" encoding="utf-8"?>
 <p:sld xmlns:a="http://schemas.openxmlformats.org/drawingml/2006/main" xmlns:r="http://schemas.openxmlformats.org/officeDocument/2006/relationships" xmlns:p="http://schemas.openxmlformats.org/presentationml/2006/main">
   <p:cSld>
     <p:spTree>
@@ -9281,119 +9832,6 @@
 </p:sld>
 </file>
 
-<file path=ppt/slides/slide8.xml><?xml version="1.0" encoding="utf-8"?>
-<p:sld xmlns:a="http://schemas.openxmlformats.org/drawingml/2006/main" xmlns:r="http://schemas.openxmlformats.org/officeDocument/2006/relationships" xmlns:p="http://schemas.openxmlformats.org/presentationml/2006/main">
-  <p:cSld>
-    <p:spTree>
-      <p:nvGrpSpPr>
-        <p:cNvPr id="1" name=""/>
-        <p:cNvGrpSpPr/>
-        <p:nvPr/>
-      </p:nvGrpSpPr>
-      <p:grpSpPr/>
-      <p:sp>
-        <p:nvSpPr>
-          <p:cNvPr id="2" name="标题 1"/>
-          <p:cNvSpPr>
-            <a:spLocks noGrp="1"/>
-          </p:cNvSpPr>
-          <p:nvPr>
-            <p:ph type="title"/>
-          </p:nvPr>
-        </p:nvSpPr>
-        <p:spPr/>
-        <p:txBody>
-          <a:bodyPr/>
-          <a:p>
-            <a:r>
-              <a:rPr lang="en-US" altLang="zh-CN"/>
-              <a:t>CSS - 2</a:t>
-            </a:r>
-            <a:endParaRPr lang="en-US" altLang="zh-CN"/>
-          </a:p>
-        </p:txBody>
-      </p:sp>
-      <p:sp>
-        <p:nvSpPr>
-          <p:cNvPr id="3" name="内容占位符 2"/>
-          <p:cNvSpPr>
-            <a:spLocks noGrp="1"/>
-          </p:cNvSpPr>
-          <p:nvPr>
-            <p:ph idx="1"/>
-          </p:nvPr>
-        </p:nvSpPr>
-        <p:spPr/>
-        <p:txBody>
-          <a:bodyPr/>
-          <a:p>
-            <a:r>
-              <a:rPr lang="en-US" altLang="zh-CN"/>
-              <a:t>Units</a:t>
-            </a:r>
-            <a:endParaRPr lang="en-US" altLang="zh-CN"/>
-          </a:p>
-          <a:p>
-            <a:pPr lvl="1"/>
-            <a:r>
-              <a:rPr lang="en-US" altLang="zh-CN"/>
-              <a:t>rem	font size of root element (&lt;html&gt;)</a:t>
-            </a:r>
-            <a:endParaRPr lang="en-US" altLang="zh-CN"/>
-          </a:p>
-          <a:p>
-            <a:pPr lvl="1"/>
-            <a:r>
-              <a:rPr lang="en-US" altLang="zh-CN"/>
-              <a:t>vh	1/100 of the height of the viewport</a:t>
-            </a:r>
-            <a:endParaRPr lang="en-US" altLang="zh-CN"/>
-          </a:p>
-          <a:p>
-            <a:pPr lvl="1"/>
-            <a:r>
-              <a:rPr lang="en-US" altLang="zh-CN"/>
-              <a:t>vw	1/100 of the width of the viewport</a:t>
-            </a:r>
-            <a:endParaRPr lang="en-US" altLang="zh-CN"/>
-          </a:p>
-          <a:p>
-            <a:pPr lvl="1"/>
-            <a:r>
-              <a:rPr lang="en-US" altLang="zh-CN"/>
-              <a:t>vmin	min(vh, vw)</a:t>
-            </a:r>
-            <a:endParaRPr lang="en-US" altLang="zh-CN"/>
-          </a:p>
-          <a:p>
-            <a:pPr lvl="1"/>
-            <a:r>
-              <a:rPr lang="en-US" altLang="zh-CN"/>
-              <a:t>vmax	max(vh, vw)</a:t>
-            </a:r>
-            <a:endParaRPr lang="en-US" altLang="zh-CN"/>
-          </a:p>
-          <a:p>
-            <a:pPr lvl="1"/>
-            <a:r>
-              <a:rPr lang="en-US" altLang="zh-CN"/>
-              <a:t>em	width of ‘M’ of the font size of current element</a:t>
-            </a:r>
-            <a:endParaRPr lang="en-US" altLang="zh-CN"/>
-          </a:p>
-        </p:txBody>
-      </p:sp>
-    </p:spTree>
-    <p:custDataLst>
-      <p:tags r:id="rId1"/>
-    </p:custDataLst>
-  </p:cSld>
-  <p:clrMapOvr>
-    <a:masterClrMapping/>
-  </p:clrMapOvr>
-</p:sld>
-</file>
-
 <file path=ppt/slides/slide9.xml><?xml version="1.0" encoding="utf-8"?>
 <p:sld xmlns:a="http://schemas.openxmlformats.org/drawingml/2006/main" xmlns:r="http://schemas.openxmlformats.org/officeDocument/2006/relationships" xmlns:p="http://schemas.openxmlformats.org/presentationml/2006/main">
   <p:cSld>
@@ -9420,7 +9858,7 @@
           <a:p>
             <a:r>
               <a:rPr lang="en-US" altLang="zh-CN"/>
-              <a:t>Resolution Adaptation Test</a:t>
+              <a:t>CSS - 2</a:t>
             </a:r>
             <a:endParaRPr lang="en-US" altLang="zh-CN"/>
           </a:p>
@@ -9442,44 +9880,56 @@
           <a:p>
             <a:r>
               <a:rPr lang="en-US" altLang="zh-CN"/>
-              <a:t>Website</a:t>
-            </a:r>
-            <a:endParaRPr lang="en-US" altLang="zh-CN"/>
-          </a:p>
-          <a:p>
-            <a:pPr lvl="1"/>
-            <a:r>
-              <a:rPr lang="en-US" altLang="zh-CN"/>
-              <a:t>http://whatismyscreenresolution.net/</a:t>
-            </a:r>
-            <a:endParaRPr lang="en-US" altLang="zh-CN"/>
-          </a:p>
-          <a:p>
-            <a:pPr lvl="1"/>
-            <a:r>
-              <a:rPr lang="en-US" altLang="zh-CN"/>
-              <a:t>http://www.responsinator.com/</a:t>
-            </a:r>
-            <a:endParaRPr lang="en-US" altLang="zh-CN"/>
-          </a:p>
-          <a:p>
-            <a:pPr lvl="1"/>
-            <a:r>
-              <a:rPr lang="en-US" altLang="zh-CN"/>
-              <a:t>http://testsize.com/</a:t>
-            </a:r>
-            <a:endParaRPr lang="en-US" altLang="zh-CN"/>
-          </a:p>
-          <a:p>
-            <a:pPr lvl="0"/>
-            <a:r>
-              <a:rPr lang="en-US" altLang="zh-CN"/>
-              <a:t>Tools</a:t>
-            </a:r>
-            <a:endParaRPr lang="en-US" altLang="zh-CN"/>
-          </a:p>
-          <a:p>
-            <a:pPr lvl="1"/>
+              <a:t>Units</a:t>
+            </a:r>
+            <a:endParaRPr lang="en-US" altLang="zh-CN"/>
+          </a:p>
+          <a:p>
+            <a:pPr lvl="1"/>
+            <a:r>
+              <a:rPr lang="en-US" altLang="zh-CN"/>
+              <a:t>rem	font size of root element (&lt;html&gt;)</a:t>
+            </a:r>
+            <a:endParaRPr lang="en-US" altLang="zh-CN"/>
+          </a:p>
+          <a:p>
+            <a:pPr lvl="1"/>
+            <a:r>
+              <a:rPr lang="en-US" altLang="zh-CN"/>
+              <a:t>vh	1/100 of the height of the viewport</a:t>
+            </a:r>
+            <a:endParaRPr lang="en-US" altLang="zh-CN"/>
+          </a:p>
+          <a:p>
+            <a:pPr lvl="1"/>
+            <a:r>
+              <a:rPr lang="en-US" altLang="zh-CN"/>
+              <a:t>vw	1/100 of the width of the viewport</a:t>
+            </a:r>
+            <a:endParaRPr lang="en-US" altLang="zh-CN"/>
+          </a:p>
+          <a:p>
+            <a:pPr lvl="1"/>
+            <a:r>
+              <a:rPr lang="en-US" altLang="zh-CN"/>
+              <a:t>vmin	min(vh, vw)</a:t>
+            </a:r>
+            <a:endParaRPr lang="en-US" altLang="zh-CN"/>
+          </a:p>
+          <a:p>
+            <a:pPr lvl="1"/>
+            <a:r>
+              <a:rPr lang="en-US" altLang="zh-CN"/>
+              <a:t>vmax	max(vh, vw)</a:t>
+            </a:r>
+            <a:endParaRPr lang="en-US" altLang="zh-CN"/>
+          </a:p>
+          <a:p>
+            <a:pPr lvl="1"/>
+            <a:r>
+              <a:rPr lang="en-US" altLang="zh-CN"/>
+              <a:t>em	width of ‘M’ of the font size of current element</a:t>
+            </a:r>
             <a:endParaRPr lang="en-US" altLang="zh-CN"/>
           </a:p>
         </p:txBody>
@@ -9505,15 +9955,15 @@
 
 <file path=ppt/tags/tag10.xml><?xml version="1.0" encoding="utf-8"?>
 <p:tagLst xmlns:p="http://schemas.openxmlformats.org/presentationml/2006/main">
-  <p:tag name="KSO_WM_UNIT_TABLE_BEAUTIFY" val="smartTable{1e735b3f-35b7-4e21-9007-a310f3ead156}"/>
+  <p:tag name="KSO_WM_BEAUTIFY_FLAG" val="#wm#"/>
+  <p:tag name="KSO_WM_TEMPLATE_CATEGORY" val="custom"/>
+  <p:tag name="KSO_WM_TEMPLATE_INDEX" val="160402"/>
 </p:tagLst>
 </file>
 
 <file path=ppt/tags/tag11.xml><?xml version="1.0" encoding="utf-8"?>
 <p:tagLst xmlns:p="http://schemas.openxmlformats.org/presentationml/2006/main">
-  <p:tag name="KSO_WM_BEAUTIFY_FLAG" val="#wm#"/>
-  <p:tag name="KSO_WM_TEMPLATE_CATEGORY" val="custom"/>
-  <p:tag name="KSO_WM_TEMPLATE_INDEX" val="160402"/>
+  <p:tag name="KSO_WM_UNIT_TABLE_BEAUTIFY" val="smartTable{1e735b3f-35b7-4e21-9007-a310f3ead156}"/>
 </p:tagLst>
 </file>
 
@@ -9721,8 +10171,41 @@
 
 <file path=ppt/tags/tag35.xml><?xml version="1.0" encoding="utf-8"?>
 <p:tagLst xmlns:p="http://schemas.openxmlformats.org/presentationml/2006/main">
-  <p:tag name="COMMONDATA" val="eyJoZGlkIjoiODcwZjc5M2RmYzUwOWE5MjVkODVjZGMyZDUwOTRjYmEifQ=="/>
-  <p:tag name="commondata" val="eyJoZGlkIjoiYjRhZjQ5NWVmZmQxNmM3NmNkNDYxNWRmNzNmMjA1ZDAifQ=="/>
+  <p:tag name="KSO_WM_BEAUTIFY_FLAG" val="#wm#"/>
+  <p:tag name="KSO_WM_TEMPLATE_CATEGORY" val="custom"/>
+  <p:tag name="KSO_WM_TEMPLATE_INDEX" val="160402"/>
+</p:tagLst>
+</file>
+
+<file path=ppt/tags/tag36.xml><?xml version="1.0" encoding="utf-8"?>
+<p:tagLst xmlns:p="http://schemas.openxmlformats.org/presentationml/2006/main">
+  <p:tag name="KSO_WM_BEAUTIFY_FLAG" val="#wm#"/>
+  <p:tag name="KSO_WM_TEMPLATE_CATEGORY" val="custom"/>
+  <p:tag name="KSO_WM_TEMPLATE_INDEX" val="160402"/>
+</p:tagLst>
+</file>
+
+<file path=ppt/tags/tag37.xml><?xml version="1.0" encoding="utf-8"?>
+<p:tagLst xmlns:p="http://schemas.openxmlformats.org/presentationml/2006/main">
+  <p:tag name="KSO_WM_BEAUTIFY_FLAG" val="#wm#"/>
+  <p:tag name="KSO_WM_TEMPLATE_CATEGORY" val="custom"/>
+  <p:tag name="KSO_WM_TEMPLATE_INDEX" val="160402"/>
+</p:tagLst>
+</file>
+
+<file path=ppt/tags/tag38.xml><?xml version="1.0" encoding="utf-8"?>
+<p:tagLst xmlns:p="http://schemas.openxmlformats.org/presentationml/2006/main">
+  <p:tag name="KSO_WM_BEAUTIFY_FLAG" val="#wm#"/>
+  <p:tag name="KSO_WM_TEMPLATE_CATEGORY" val="custom"/>
+  <p:tag name="KSO_WM_TEMPLATE_INDEX" val="160402"/>
+</p:tagLst>
+</file>
+
+<file path=ppt/tags/tag39.xml><?xml version="1.0" encoding="utf-8"?>
+<p:tagLst xmlns:p="http://schemas.openxmlformats.org/presentationml/2006/main">
+  <p:tag name="KSO_WM_BEAUTIFY_FLAG" val="#wm#"/>
+  <p:tag name="KSO_WM_TEMPLATE_CATEGORY" val="custom"/>
+  <p:tag name="KSO_WM_TEMPLATE_INDEX" val="160402"/>
 </p:tagLst>
 </file>
 
@@ -9743,6 +10226,13 @@
   <p:tag name="KSO_WM_UNIT_COMPATIBLE" val="0"/>
   <p:tag name="KSO_WM_UNIT_PRESET_TEXT_INDEX" val="3"/>
   <p:tag name="KSO_WM_UNIT_PRESET_TEXT_LEN" val="17"/>
+</p:tagLst>
+</file>
+
+<file path=ppt/tags/tag40.xml><?xml version="1.0" encoding="utf-8"?>
+<p:tagLst xmlns:p="http://schemas.openxmlformats.org/presentationml/2006/main">
+  <p:tag name="COMMONDATA" val="eyJoZGlkIjoiODcwZjc5M2RmYzUwOWE5MjVkODVjZGMyZDUwOTRjYmEifQ=="/>
+  <p:tag name="commondata" val="eyJoZGlkIjoiYjRhZjQ5NWVmZmQxNmM3NmNkNDYxNWRmNzNmMjA1ZDAifQ=="/>
 </p:tagLst>
 </file>
 
